--- a/Fase 2/Evidencia del proyecto/Formato Presentación final Portafolio.pptx
+++ b/Fase 2/Evidencia del proyecto/Formato Presentación final Portafolio.pptx
@@ -1191,7 +1191,15 @@
     </dgm:pt>
     <dgm:pt modelId="{9A7E2690-DE9C-4572-9BE5-B8C9A3B8BBB3}" type="pres">
       <dgm:prSet presAssocID="{78BFB295-8F5D-4286-B72B-79142F8F0E13}" presName="img" presStyleLbl="fgImgPlace1" presStyleIdx="0" presStyleCnt="2"/>
-      <dgm:spPr/>
+      <dgm:spPr>
+        <a:blipFill>
+          <a:blip xmlns:r="http://schemas.openxmlformats.org/officeDocument/2006/relationships" r:embed="rId1"/>
+          <a:srcRect/>
+          <a:stretch>
+            <a:fillRect l="-9000" r="-9000"/>
+          </a:stretch>
+        </a:blipFill>
+      </dgm:spPr>
     </dgm:pt>
     <dgm:pt modelId="{52D125D2-FCA7-4A2D-AB39-B6BD54F251F2}" type="pres">
       <dgm:prSet presAssocID="{78BFB295-8F5D-4286-B72B-79142F8F0E13}" presName="text" presStyleLbl="node1" presStyleIdx="0" presStyleCnt="2">
@@ -1215,7 +1223,15 @@
     </dgm:pt>
     <dgm:pt modelId="{3F97C059-D720-4D48-953F-B84D04D0BF79}" type="pres">
       <dgm:prSet presAssocID="{02A34BC0-F8BA-4A89-87A4-4F20079DFD06}" presName="img" presStyleLbl="fgImgPlace1" presStyleIdx="1" presStyleCnt="2"/>
-      <dgm:spPr/>
+      <dgm:spPr>
+        <a:blipFill>
+          <a:blip xmlns:r="http://schemas.openxmlformats.org/officeDocument/2006/relationships" r:embed="rId2"/>
+          <a:srcRect/>
+          <a:stretch>
+            <a:fillRect l="-4000" r="-4000"/>
+          </a:stretch>
+        </a:blipFill>
+      </dgm:spPr>
     </dgm:pt>
     <dgm:pt modelId="{CFFDF23F-D296-4CDF-8EE4-8A672559E207}" type="pres">
       <dgm:prSet presAssocID="{02A34BC0-F8BA-4A89-87A4-4F20079DFD06}" presName="text" presStyleLbl="node1" presStyleIdx="1" presStyleCnt="2">
@@ -1432,15 +1448,13 @@
             <a:gd name="adj" fmla="val 10000"/>
           </a:avLst>
         </a:prstGeom>
-        <a:solidFill>
-          <a:schemeClr val="accent5">
-            <a:tint val="50000"/>
-            <a:hueOff val="0"/>
-            <a:satOff val="0"/>
-            <a:lumOff val="0"/>
-            <a:alphaOff val="0"/>
-          </a:schemeClr>
-        </a:solidFill>
+        <a:blipFill>
+          <a:blip xmlns:r="http://schemas.openxmlformats.org/officeDocument/2006/relationships" r:embed="rId1"/>
+          <a:srcRect/>
+          <a:stretch>
+            <a:fillRect l="-9000" r="-9000"/>
+          </a:stretch>
+        </a:blipFill>
         <a:ln>
           <a:noFill/>
         </a:ln>
@@ -1625,15 +1639,13 @@
             <a:gd name="adj" fmla="val 10000"/>
           </a:avLst>
         </a:prstGeom>
-        <a:solidFill>
-          <a:schemeClr val="accent5">
-            <a:tint val="50000"/>
-            <a:hueOff val="0"/>
-            <a:satOff val="0"/>
-            <a:lumOff val="0"/>
-            <a:alphaOff val="0"/>
-          </a:schemeClr>
-        </a:solidFill>
+        <a:blipFill>
+          <a:blip xmlns:r="http://schemas.openxmlformats.org/officeDocument/2006/relationships" r:embed="rId2"/>
+          <a:srcRect/>
+          <a:stretch>
+            <a:fillRect l="-4000" r="-4000"/>
+          </a:stretch>
+        </a:blipFill>
         <a:ln>
           <a:noFill/>
         </a:ln>
@@ -3052,7 +3064,7 @@
           <a:p>
             <a:fld id="{6E1704C8-43E3-4F4F-BE90-356A640D5754}" type="datetimeFigureOut">
               <a:rPr lang="es-CL" smtClean="0"/>
-              <a:t>02-06-2025</a:t>
+              <a:t>09-06-2025</a:t>
             </a:fld>
             <a:endParaRPr lang="es-CL"/>
           </a:p>
@@ -3255,7 +3267,7 @@
           <a:p>
             <a:fld id="{6E1704C8-43E3-4F4F-BE90-356A640D5754}" type="datetimeFigureOut">
               <a:rPr lang="es-CL" smtClean="0"/>
-              <a:t>02-06-2025</a:t>
+              <a:t>09-06-2025</a:t>
             </a:fld>
             <a:endParaRPr lang="es-CL"/>
           </a:p>
@@ -3468,7 +3480,7 @@
           <a:p>
             <a:fld id="{6E1704C8-43E3-4F4F-BE90-356A640D5754}" type="datetimeFigureOut">
               <a:rPr lang="es-CL" smtClean="0"/>
-              <a:t>02-06-2025</a:t>
+              <a:t>09-06-2025</a:t>
             </a:fld>
             <a:endParaRPr lang="es-CL"/>
           </a:p>
@@ -3671,7 +3683,7 @@
           <a:p>
             <a:fld id="{6E1704C8-43E3-4F4F-BE90-356A640D5754}" type="datetimeFigureOut">
               <a:rPr lang="es-CL" smtClean="0"/>
-              <a:t>02-06-2025</a:t>
+              <a:t>09-06-2025</a:t>
             </a:fld>
             <a:endParaRPr lang="es-CL"/>
           </a:p>
@@ -3950,7 +3962,7 @@
           <a:p>
             <a:fld id="{6E1704C8-43E3-4F4F-BE90-356A640D5754}" type="datetimeFigureOut">
               <a:rPr lang="es-CL" smtClean="0"/>
-              <a:t>02-06-2025</a:t>
+              <a:t>09-06-2025</a:t>
             </a:fld>
             <a:endParaRPr lang="es-CL"/>
           </a:p>
@@ -4221,7 +4233,7 @@
           <a:p>
             <a:fld id="{6E1704C8-43E3-4F4F-BE90-356A640D5754}" type="datetimeFigureOut">
               <a:rPr lang="es-CL" smtClean="0"/>
-              <a:t>02-06-2025</a:t>
+              <a:t>09-06-2025</a:t>
             </a:fld>
             <a:endParaRPr lang="es-CL"/>
           </a:p>
@@ -4639,7 +4651,7 @@
           <a:p>
             <a:fld id="{6E1704C8-43E3-4F4F-BE90-356A640D5754}" type="datetimeFigureOut">
               <a:rPr lang="es-CL" smtClean="0"/>
-              <a:t>02-06-2025</a:t>
+              <a:t>09-06-2025</a:t>
             </a:fld>
             <a:endParaRPr lang="es-CL"/>
           </a:p>
@@ -4784,7 +4796,7 @@
           <a:p>
             <a:fld id="{6E1704C8-43E3-4F4F-BE90-356A640D5754}" type="datetimeFigureOut">
               <a:rPr lang="es-CL" smtClean="0"/>
-              <a:t>02-06-2025</a:t>
+              <a:t>09-06-2025</a:t>
             </a:fld>
             <a:endParaRPr lang="es-CL"/>
           </a:p>
@@ -4900,7 +4912,7 @@
           <a:p>
             <a:fld id="{6E1704C8-43E3-4F4F-BE90-356A640D5754}" type="datetimeFigureOut">
               <a:rPr lang="es-CL" smtClean="0"/>
-              <a:t>02-06-2025</a:t>
+              <a:t>09-06-2025</a:t>
             </a:fld>
             <a:endParaRPr lang="es-CL"/>
           </a:p>
@@ -5216,7 +5228,7 @@
           <a:p>
             <a:fld id="{6E1704C8-43E3-4F4F-BE90-356A640D5754}" type="datetimeFigureOut">
               <a:rPr lang="es-CL" smtClean="0"/>
-              <a:t>02-06-2025</a:t>
+              <a:t>09-06-2025</a:t>
             </a:fld>
             <a:endParaRPr lang="es-CL"/>
           </a:p>
@@ -5508,7 +5520,7 @@
           <a:p>
             <a:fld id="{6E1704C8-43E3-4F4F-BE90-356A640D5754}" type="datetimeFigureOut">
               <a:rPr lang="es-CL" smtClean="0"/>
-              <a:t>02-06-2025</a:t>
+              <a:t>09-06-2025</a:t>
             </a:fld>
             <a:endParaRPr lang="es-CL"/>
           </a:p>
@@ -5754,7 +5766,7 @@
           <a:p>
             <a:fld id="{6E1704C8-43E3-4F4F-BE90-356A640D5754}" type="datetimeFigureOut">
               <a:rPr lang="es-CL" smtClean="0"/>
-              <a:t>02-06-2025</a:t>
+              <a:t>09-06-2025</a:t>
             </a:fld>
             <a:endParaRPr lang="es-CL"/>
           </a:p>
@@ -6522,6 +6534,230 @@
           </a:fontRef>
         </p:style>
       </p:cxnSp>
+      <p:sp>
+        <p:nvSpPr>
+          <p:cNvPr id="2" name="Rectángulo: esquinas redondeadas 1">
+            <a:extLst>
+              <a:ext uri="{FF2B5EF4-FFF2-40B4-BE49-F238E27FC236}">
+                <a16:creationId xmlns:a16="http://schemas.microsoft.com/office/drawing/2014/main" id="{6828EFDD-0ED6-00D7-75AF-15893A8963DA}"/>
+              </a:ext>
+            </a:extLst>
+          </p:cNvPr>
+          <p:cNvSpPr/>
+          <p:nvPr/>
+        </p:nvSpPr>
+        <p:spPr>
+          <a:xfrm>
+            <a:off x="614516" y="2273378"/>
+            <a:ext cx="10962967" cy="2505638"/>
+          </a:xfrm>
+          <a:prstGeom prst="roundRect">
+            <a:avLst/>
+          </a:prstGeom>
+        </p:spPr>
+        <p:style>
+          <a:lnRef idx="2">
+            <a:schemeClr val="accent1"/>
+          </a:lnRef>
+          <a:fillRef idx="1">
+            <a:schemeClr val="lt1"/>
+          </a:fillRef>
+          <a:effectRef idx="0">
+            <a:schemeClr val="accent1"/>
+          </a:effectRef>
+          <a:fontRef idx="minor">
+            <a:schemeClr val="dk1"/>
+          </a:fontRef>
+        </p:style>
+        <p:txBody>
+          <a:bodyPr rtlCol="0" anchor="ctr"/>
+          <a:lstStyle/>
+          <a:p>
+            <a:pPr algn="ctr"/>
+            <a:endParaRPr lang="es-CL" dirty="0"/>
+          </a:p>
+        </p:txBody>
+      </p:sp>
+      <p:pic>
+        <p:nvPicPr>
+          <p:cNvPr id="17" name="Imagen 16">
+            <a:extLst>
+              <a:ext uri="{FF2B5EF4-FFF2-40B4-BE49-F238E27FC236}">
+                <a16:creationId xmlns:a16="http://schemas.microsoft.com/office/drawing/2014/main" id="{0723B656-CF15-8197-F818-36606642093B}"/>
+              </a:ext>
+            </a:extLst>
+          </p:cNvPr>
+          <p:cNvPicPr>
+            <a:picLocks noChangeAspect="1"/>
+          </p:cNvPicPr>
+          <p:nvPr/>
+        </p:nvPicPr>
+        <p:blipFill>
+          <a:blip r:embed="rId3">
+            <a:extLst>
+              <a:ext uri="{28A0092B-C50C-407E-A947-70E740481C1C}">
+                <a14:useLocalDpi xmlns:a14="http://schemas.microsoft.com/office/drawing/2010/main" val="0"/>
+              </a:ext>
+            </a:extLst>
+          </a:blip>
+          <a:stretch>
+            <a:fillRect/>
+          </a:stretch>
+        </p:blipFill>
+        <p:spPr>
+          <a:xfrm>
+            <a:off x="6781487" y="2566785"/>
+            <a:ext cx="1556496" cy="1556496"/>
+          </a:xfrm>
+          <a:prstGeom prst="rect">
+            <a:avLst/>
+          </a:prstGeom>
+        </p:spPr>
+      </p:pic>
+      <p:pic>
+        <p:nvPicPr>
+          <p:cNvPr id="19" name="Imagen 18">
+            <a:extLst>
+              <a:ext uri="{FF2B5EF4-FFF2-40B4-BE49-F238E27FC236}">
+                <a16:creationId xmlns:a16="http://schemas.microsoft.com/office/drawing/2014/main" id="{203EC8B3-2B99-D8A5-35EA-EE633EA5477B}"/>
+              </a:ext>
+            </a:extLst>
+          </p:cNvPr>
+          <p:cNvPicPr>
+            <a:picLocks noChangeAspect="1"/>
+          </p:cNvPicPr>
+          <p:nvPr/>
+        </p:nvPicPr>
+        <p:blipFill>
+          <a:blip r:embed="rId4">
+            <a:extLst>
+              <a:ext uri="{28A0092B-C50C-407E-A947-70E740481C1C}">
+                <a14:useLocalDpi xmlns:a14="http://schemas.microsoft.com/office/drawing/2010/main" val="0"/>
+              </a:ext>
+            </a:extLst>
+          </a:blip>
+          <a:stretch>
+            <a:fillRect/>
+          </a:stretch>
+        </p:blipFill>
+        <p:spPr>
+          <a:xfrm>
+            <a:off x="2872656" y="2566785"/>
+            <a:ext cx="1556496" cy="1556496"/>
+          </a:xfrm>
+          <a:prstGeom prst="rect">
+            <a:avLst/>
+          </a:prstGeom>
+        </p:spPr>
+      </p:pic>
+      <p:pic>
+        <p:nvPicPr>
+          <p:cNvPr id="21" name="Imagen 20">
+            <a:extLst>
+              <a:ext uri="{FF2B5EF4-FFF2-40B4-BE49-F238E27FC236}">
+                <a16:creationId xmlns:a16="http://schemas.microsoft.com/office/drawing/2014/main" id="{182F7693-59C1-3321-0CAE-D743CF87E87A}"/>
+              </a:ext>
+            </a:extLst>
+          </p:cNvPr>
+          <p:cNvPicPr>
+            <a:picLocks noChangeAspect="1"/>
+          </p:cNvPicPr>
+          <p:nvPr/>
+        </p:nvPicPr>
+        <p:blipFill>
+          <a:blip r:embed="rId5">
+            <a:extLst>
+              <a:ext uri="{28A0092B-C50C-407E-A947-70E740481C1C}">
+                <a14:useLocalDpi xmlns:a14="http://schemas.microsoft.com/office/drawing/2010/main" val="0"/>
+              </a:ext>
+            </a:extLst>
+          </a:blip>
+          <a:stretch>
+            <a:fillRect/>
+          </a:stretch>
+        </p:blipFill>
+        <p:spPr>
+          <a:xfrm>
+            <a:off x="4852779" y="2566785"/>
+            <a:ext cx="1556496" cy="1556496"/>
+          </a:xfrm>
+          <a:prstGeom prst="rect">
+            <a:avLst/>
+          </a:prstGeom>
+        </p:spPr>
+      </p:pic>
+      <p:pic>
+        <p:nvPicPr>
+          <p:cNvPr id="23" name="Imagen 22">
+            <a:extLst>
+              <a:ext uri="{FF2B5EF4-FFF2-40B4-BE49-F238E27FC236}">
+                <a16:creationId xmlns:a16="http://schemas.microsoft.com/office/drawing/2014/main" id="{90F9B85D-CCC4-B4E2-ED82-15B1BE7AF659}"/>
+              </a:ext>
+            </a:extLst>
+          </p:cNvPr>
+          <p:cNvPicPr>
+            <a:picLocks noChangeAspect="1"/>
+          </p:cNvPicPr>
+          <p:nvPr/>
+        </p:nvPicPr>
+        <p:blipFill>
+          <a:blip r:embed="rId6">
+            <a:extLst>
+              <a:ext uri="{28A0092B-C50C-407E-A947-70E740481C1C}">
+                <a14:useLocalDpi xmlns:a14="http://schemas.microsoft.com/office/drawing/2010/main" val="0"/>
+              </a:ext>
+            </a:extLst>
+          </a:blip>
+          <a:stretch>
+            <a:fillRect/>
+          </a:stretch>
+        </p:blipFill>
+        <p:spPr>
+          <a:xfrm>
+            <a:off x="8337983" y="2518737"/>
+            <a:ext cx="3022792" cy="1733665"/>
+          </a:xfrm>
+          <a:prstGeom prst="rect">
+            <a:avLst/>
+          </a:prstGeom>
+        </p:spPr>
+      </p:pic>
+      <p:pic>
+        <p:nvPicPr>
+          <p:cNvPr id="25" name="Imagen 24">
+            <a:extLst>
+              <a:ext uri="{FF2B5EF4-FFF2-40B4-BE49-F238E27FC236}">
+                <a16:creationId xmlns:a16="http://schemas.microsoft.com/office/drawing/2014/main" id="{C6C38473-BAAF-677B-BCA8-27BA92343D45}"/>
+              </a:ext>
+            </a:extLst>
+          </p:cNvPr>
+          <p:cNvPicPr>
+            <a:picLocks noChangeAspect="1"/>
+          </p:cNvPicPr>
+          <p:nvPr/>
+        </p:nvPicPr>
+        <p:blipFill>
+          <a:blip r:embed="rId7">
+            <a:extLst>
+              <a:ext uri="{28A0092B-C50C-407E-A947-70E740481C1C}">
+                <a14:useLocalDpi xmlns:a14="http://schemas.microsoft.com/office/drawing/2010/main" val="0"/>
+              </a:ext>
+            </a:extLst>
+          </a:blip>
+          <a:stretch>
+            <a:fillRect/>
+          </a:stretch>
+        </p:blipFill>
+        <p:spPr>
+          <a:xfrm>
+            <a:off x="614516" y="2465337"/>
+            <a:ext cx="1927326" cy="1927326"/>
+          </a:xfrm>
+          <a:prstGeom prst="rect">
+            <a:avLst/>
+          </a:prstGeom>
+        </p:spPr>
+      </p:pic>
     </p:spTree>
     <p:extLst>
       <p:ext uri="{BB962C8B-B14F-4D97-AF65-F5344CB8AC3E}">
@@ -6616,8 +6852,8 @@
         </p:nvSpPr>
         <p:spPr>
           <a:xfrm>
-            <a:off x="1" y="2707792"/>
-            <a:ext cx="12191999" cy="1138773"/>
+            <a:off x="-86264" y="1318939"/>
+            <a:ext cx="12191999" cy="769441"/>
           </a:xfrm>
           <a:prstGeom prst="rect">
             <a:avLst/>
@@ -6633,28 +6869,52 @@
             <a:pPr algn="ctr"/>
             <a:r>
               <a:rPr lang="es-MX" sz="4400" dirty="0"/>
-              <a:t>DEMOSTRACIÓN DEL RESULTADO DEL PROYECTO</a:t>
+              <a:t>Demostración del resultado del proyecto</a:t>
             </a:r>
           </a:p>
+        </p:txBody>
+      </p:sp>
+      <p:sp>
+        <p:nvSpPr>
+          <p:cNvPr id="3" name="Rectángulo: esquinas redondeadas 2">
+            <a:extLst>
+              <a:ext uri="{FF2B5EF4-FFF2-40B4-BE49-F238E27FC236}">
+                <a16:creationId xmlns:a16="http://schemas.microsoft.com/office/drawing/2014/main" id="{E00399C4-3294-9B7F-0612-1DFC0F2505E6}"/>
+              </a:ext>
+            </a:extLst>
+          </p:cNvPr>
+          <p:cNvSpPr/>
+          <p:nvPr/>
+        </p:nvSpPr>
+        <p:spPr>
+          <a:xfrm>
+            <a:off x="614516" y="2231595"/>
+            <a:ext cx="10962967" cy="3958051"/>
+          </a:xfrm>
+          <a:prstGeom prst="roundRect">
+            <a:avLst/>
+          </a:prstGeom>
+        </p:spPr>
+        <p:style>
+          <a:lnRef idx="2">
+            <a:schemeClr val="accent1"/>
+          </a:lnRef>
+          <a:fillRef idx="1">
+            <a:schemeClr val="lt1"/>
+          </a:fillRef>
+          <a:effectRef idx="0">
+            <a:schemeClr val="accent1"/>
+          </a:effectRef>
+          <a:fontRef idx="minor">
+            <a:schemeClr val="dk1"/>
+          </a:fontRef>
+        </p:style>
+        <p:txBody>
+          <a:bodyPr rtlCol="0" anchor="ctr"/>
+          <a:lstStyle/>
           <a:p>
             <a:pPr algn="ctr"/>
-            <a:r>
-              <a:rPr lang="es-MX" sz="2400" dirty="0">
-                <a:solidFill>
-                  <a:schemeClr val="bg2">
-                    <a:lumMod val="50000"/>
-                  </a:schemeClr>
-                </a:solidFill>
-              </a:rPr>
-              <a:t>*Exposición del sistema</a:t>
-            </a:r>
-            <a:endParaRPr lang="es-CL" sz="2400" dirty="0">
-              <a:solidFill>
-                <a:schemeClr val="bg2">
-                  <a:lumMod val="50000"/>
-                </a:schemeClr>
-              </a:solidFill>
-            </a:endParaRPr>
+            <a:endParaRPr lang="es-CL" dirty="0"/>
           </a:p>
         </p:txBody>
       </p:sp>
@@ -6774,6 +7034,50 @@
           </a:p>
         </p:txBody>
       </p:sp>
+      <p:sp>
+        <p:nvSpPr>
+          <p:cNvPr id="2" name="Rectángulo: esquinas redondeadas 1">
+            <a:extLst>
+              <a:ext uri="{FF2B5EF4-FFF2-40B4-BE49-F238E27FC236}">
+                <a16:creationId xmlns:a16="http://schemas.microsoft.com/office/drawing/2014/main" id="{F7ECB491-6695-55D6-44D0-26646D837A8F}"/>
+              </a:ext>
+            </a:extLst>
+          </p:cNvPr>
+          <p:cNvSpPr/>
+          <p:nvPr/>
+        </p:nvSpPr>
+        <p:spPr>
+          <a:xfrm>
+            <a:off x="614516" y="2231595"/>
+            <a:ext cx="10962967" cy="3958051"/>
+          </a:xfrm>
+          <a:prstGeom prst="roundRect">
+            <a:avLst/>
+          </a:prstGeom>
+        </p:spPr>
+        <p:style>
+          <a:lnRef idx="2">
+            <a:schemeClr val="accent1"/>
+          </a:lnRef>
+          <a:fillRef idx="1">
+            <a:schemeClr val="lt1"/>
+          </a:fillRef>
+          <a:effectRef idx="0">
+            <a:schemeClr val="accent1"/>
+          </a:effectRef>
+          <a:fontRef idx="minor">
+            <a:schemeClr val="dk1"/>
+          </a:fontRef>
+        </p:style>
+        <p:txBody>
+          <a:bodyPr rtlCol="0" anchor="ctr"/>
+          <a:lstStyle/>
+          <a:p>
+            <a:pPr algn="ctr"/>
+            <a:endParaRPr lang="es-CL" dirty="0"/>
+          </a:p>
+        </p:txBody>
+      </p:sp>
     </p:spTree>
     <p:extLst>
       <p:ext uri="{BB962C8B-B14F-4D97-AF65-F5344CB8AC3E}">
@@ -6886,6 +7190,53 @@
             <a:r>
               <a:rPr lang="es-MX" sz="4400" dirty="0"/>
               <a:t>Obstáculos presentados durante el desarrollo</a:t>
+            </a:r>
+          </a:p>
+        </p:txBody>
+      </p:sp>
+      <p:sp>
+        <p:nvSpPr>
+          <p:cNvPr id="2" name="Rectángulo: esquinas redondeadas 1">
+            <a:extLst>
+              <a:ext uri="{FF2B5EF4-FFF2-40B4-BE49-F238E27FC236}">
+                <a16:creationId xmlns:a16="http://schemas.microsoft.com/office/drawing/2014/main" id="{0C7BE572-35FD-449C-EF93-6C8D236EECDD}"/>
+              </a:ext>
+            </a:extLst>
+          </p:cNvPr>
+          <p:cNvSpPr/>
+          <p:nvPr/>
+        </p:nvSpPr>
+        <p:spPr>
+          <a:xfrm>
+            <a:off x="614516" y="2231595"/>
+            <a:ext cx="10962967" cy="3958051"/>
+          </a:xfrm>
+          <a:prstGeom prst="roundRect">
+            <a:avLst/>
+          </a:prstGeom>
+        </p:spPr>
+        <p:style>
+          <a:lnRef idx="2">
+            <a:schemeClr val="accent1"/>
+          </a:lnRef>
+          <a:fillRef idx="1">
+            <a:schemeClr val="lt1"/>
+          </a:fillRef>
+          <a:effectRef idx="0">
+            <a:schemeClr val="accent1"/>
+          </a:effectRef>
+          <a:fontRef idx="minor">
+            <a:schemeClr val="dk1"/>
+          </a:fontRef>
+        </p:style>
+        <p:txBody>
+          <a:bodyPr rtlCol="0" anchor="ctr"/>
+          <a:lstStyle/>
+          <a:p>
+            <a:pPr algn="ctr"/>
+            <a:r>
+              <a:rPr lang="es-CL" dirty="0"/>
+              <a:t>Durante el desarrollo notamos cierta dificultad en la conciliación de la base de datos con el Backend y que esto se viera reflejado en el Frontend. Sin duda nos llevó más semanas de las que creímos pero eventualmente lo logramos.</a:t>
             </a:r>
           </a:p>
         </p:txBody>
@@ -7099,7 +7450,7 @@
           <p:nvPr>
             <p:extLst>
               <p:ext uri="{D42A27DB-BD31-4B8C-83A1-F6EECF244321}">
-                <p14:modId xmlns:p14="http://schemas.microsoft.com/office/powerpoint/2010/main" val="881553808"/>
+                <p14:modId xmlns:p14="http://schemas.microsoft.com/office/powerpoint/2010/main" val="437105054"/>
               </p:ext>
             </p:extLst>
           </p:nvPr>
@@ -8178,7 +8529,7 @@
             <a:pPr algn="ctr"/>
             <a:r>
               <a:rPr lang="es-MX" dirty="0"/>
-              <a:t>Reducir el tiempo que dedican los dueños del restaurant en las tareas cotidianas para que puedan enfocarse en su etapa de crecimiento.</a:t>
+              <a:t>Crear una aplicación funcional para el cliente</a:t>
             </a:r>
             <a:endParaRPr lang="es-CL" dirty="0"/>
           </a:p>
@@ -8592,7 +8943,7 @@
         </p:nvSpPr>
         <p:spPr>
           <a:xfrm>
-            <a:off x="365133" y="2276100"/>
+            <a:off x="614515" y="2336486"/>
             <a:ext cx="10962967" cy="3598228"/>
           </a:xfrm>
           <a:prstGeom prst="roundRect">
@@ -8617,8 +8968,27 @@
           <a:bodyPr rtlCol="0" anchor="ctr"/>
           <a:lstStyle/>
           <a:p>
-            <a:pPr algn="ctr"/>
-            <a:endParaRPr lang="es-CL" dirty="0"/>
+            <a:pPr algn="just"/>
+            <a:r>
+              <a:rPr lang="es-CL" dirty="0"/>
+              <a:t>Al ser un proyecto realizado por estudiantes no tuvimos acceso a plataformas y herramientas de pago, por ejemplo a </a:t>
+            </a:r>
+            <a:r>
+              <a:rPr lang="es-CL" dirty="0" err="1"/>
+              <a:t>ChatGPT</a:t>
+            </a:r>
+            <a:r>
+              <a:rPr lang="es-CL" dirty="0"/>
+              <a:t> Plus o </a:t>
+            </a:r>
+            <a:r>
+              <a:rPr lang="es-CL" dirty="0" err="1"/>
+              <a:t>Canvas</a:t>
+            </a:r>
+            <a:r>
+              <a:rPr lang="es-CL" dirty="0"/>
+              <a:t> Pro  (la cuales nos ayudaron con las imágenes que utilizamos), por lo que tuvimos accesos limitados durante el día. Así mismo no pudimos subir nuestra aplicación a una pagina web bajo su propio dominio o también nuestra base de datos es de uso local y no albergada en un servidor. </a:t>
+            </a:r>
           </a:p>
         </p:txBody>
       </p:sp>
@@ -8862,8 +9232,8 @@
         </p:nvSpPr>
         <p:spPr>
           <a:xfrm>
-            <a:off x="614515" y="2040572"/>
-            <a:ext cx="10962967" cy="3598228"/>
+            <a:off x="614516" y="2300609"/>
+            <a:ext cx="10962967" cy="3958051"/>
           </a:xfrm>
           <a:prstGeom prst="roundRect">
             <a:avLst/>
@@ -8888,7 +9258,10 @@
           <a:lstStyle/>
           <a:p>
             <a:pPr algn="ctr"/>
-            <a:endParaRPr lang="es-CL" dirty="0"/>
+            <a:r>
+              <a:rPr lang="es-CL" dirty="0"/>
+              <a:t>La metodología escogida fue la tradicional de cascada</a:t>
+            </a:r>
           </a:p>
         </p:txBody>
       </p:sp>
@@ -9152,161 +9525,154 @@
           <p:nvPr>
             <p:extLst>
               <p:ext uri="{D42A27DB-BD31-4B8C-83A1-F6EECF244321}">
-                <p14:modId xmlns:p14="http://schemas.microsoft.com/office/powerpoint/2010/main" val="3560750566"/>
+                <p14:modId xmlns:p14="http://schemas.microsoft.com/office/powerpoint/2010/main" val="1103258265"/>
               </p:ext>
             </p:extLst>
           </p:nvPr>
         </p:nvGraphicFramePr>
         <p:xfrm>
-          <a:off x="1248696" y="2595717"/>
-          <a:ext cx="10235372" cy="3618273"/>
+          <a:off x="1214190" y="2635197"/>
+          <a:ext cx="10121949" cy="3662086"/>
         </p:xfrm>
         <a:graphic>
           <a:graphicData uri="http://schemas.openxmlformats.org/drawingml/2006/table">
             <a:tbl>
               <a:tblPr firstRow="1" firstCol="1" bandRow="1"/>
               <a:tblGrid>
-                <a:gridCol w="1245540">
+                <a:gridCol w="1231612">
                   <a:extLst>
                     <a:ext uri="{9D8B030D-6E8A-4147-A177-3AD203B41FA5}">
                       <a16:colId xmlns:a16="http://schemas.microsoft.com/office/drawing/2014/main" val="1385875515"/>
                     </a:ext>
                   </a:extLst>
                 </a:gridCol>
-                <a:gridCol w="494161">
+                <a:gridCol w="488636">
                   <a:extLst>
                     <a:ext uri="{9D8B030D-6E8A-4147-A177-3AD203B41FA5}">
                       <a16:colId xmlns:a16="http://schemas.microsoft.com/office/drawing/2014/main" val="3026825544"/>
                     </a:ext>
                   </a:extLst>
                 </a:gridCol>
-                <a:gridCol w="482175">
+                <a:gridCol w="476783">
                   <a:extLst>
                     <a:ext uri="{9D8B030D-6E8A-4147-A177-3AD203B41FA5}">
                       <a16:colId xmlns:a16="http://schemas.microsoft.com/office/drawing/2014/main" val="3982458150"/>
                     </a:ext>
                   </a:extLst>
                 </a:gridCol>
-                <a:gridCol w="484940">
+                <a:gridCol w="479518">
                   <a:extLst>
                     <a:ext uri="{9D8B030D-6E8A-4147-A177-3AD203B41FA5}">
                       <a16:colId xmlns:a16="http://schemas.microsoft.com/office/drawing/2014/main" val="2813336322"/>
                     </a:ext>
                   </a:extLst>
                 </a:gridCol>
-                <a:gridCol w="484940">
+                <a:gridCol w="479518">
                   <a:extLst>
                     <a:ext uri="{9D8B030D-6E8A-4147-A177-3AD203B41FA5}">
                       <a16:colId xmlns:a16="http://schemas.microsoft.com/office/drawing/2014/main" val="666810208"/>
                     </a:ext>
                   </a:extLst>
                 </a:gridCol>
-                <a:gridCol w="482175">
+                <a:gridCol w="476783">
                   <a:extLst>
                     <a:ext uri="{9D8B030D-6E8A-4147-A177-3AD203B41FA5}">
                       <a16:colId xmlns:a16="http://schemas.microsoft.com/office/drawing/2014/main" val="441682826"/>
                     </a:ext>
                   </a:extLst>
                 </a:gridCol>
-                <a:gridCol w="482175">
+                <a:gridCol w="476783">
                   <a:extLst>
                     <a:ext uri="{9D8B030D-6E8A-4147-A177-3AD203B41FA5}">
                       <a16:colId xmlns:a16="http://schemas.microsoft.com/office/drawing/2014/main" val="1853034618"/>
                     </a:ext>
                   </a:extLst>
                 </a:gridCol>
-                <a:gridCol w="482175">
+                <a:gridCol w="476783">
                   <a:extLst>
                     <a:ext uri="{9D8B030D-6E8A-4147-A177-3AD203B41FA5}">
                       <a16:colId xmlns:a16="http://schemas.microsoft.com/office/drawing/2014/main" val="161666760"/>
                     </a:ext>
                   </a:extLst>
                 </a:gridCol>
-                <a:gridCol w="482175">
+                <a:gridCol w="476783">
                   <a:extLst>
                     <a:ext uri="{9D8B030D-6E8A-4147-A177-3AD203B41FA5}">
                       <a16:colId xmlns:a16="http://schemas.microsoft.com/office/drawing/2014/main" val="2597728732"/>
                     </a:ext>
                   </a:extLst>
                 </a:gridCol>
-                <a:gridCol w="482175">
+                <a:gridCol w="476783">
                   <a:extLst>
                     <a:ext uri="{9D8B030D-6E8A-4147-A177-3AD203B41FA5}">
                       <a16:colId xmlns:a16="http://schemas.microsoft.com/office/drawing/2014/main" val="3367593723"/>
                     </a:ext>
                   </a:extLst>
                 </a:gridCol>
-                <a:gridCol w="482175">
+                <a:gridCol w="476783">
                   <a:extLst>
                     <a:ext uri="{9D8B030D-6E8A-4147-A177-3AD203B41FA5}">
                       <a16:colId xmlns:a16="http://schemas.microsoft.com/office/drawing/2014/main" val="1610561930"/>
                     </a:ext>
                   </a:extLst>
                 </a:gridCol>
-                <a:gridCol w="482175">
+                <a:gridCol w="476783">
                   <a:extLst>
                     <a:ext uri="{9D8B030D-6E8A-4147-A177-3AD203B41FA5}">
                       <a16:colId xmlns:a16="http://schemas.microsoft.com/office/drawing/2014/main" val="4078685469"/>
                     </a:ext>
                   </a:extLst>
                 </a:gridCol>
-                <a:gridCol w="484017">
+                <a:gridCol w="478605">
                   <a:extLst>
                     <a:ext uri="{9D8B030D-6E8A-4147-A177-3AD203B41FA5}">
                       <a16:colId xmlns:a16="http://schemas.microsoft.com/office/drawing/2014/main" val="1033199576"/>
                     </a:ext>
                   </a:extLst>
                 </a:gridCol>
-                <a:gridCol w="484017">
+                <a:gridCol w="478605">
                   <a:extLst>
                     <a:ext uri="{9D8B030D-6E8A-4147-A177-3AD203B41FA5}">
                       <a16:colId xmlns:a16="http://schemas.microsoft.com/office/drawing/2014/main" val="3244852290"/>
                     </a:ext>
                   </a:extLst>
                 </a:gridCol>
-                <a:gridCol w="484017">
+                <a:gridCol w="478605">
                   <a:extLst>
                     <a:ext uri="{9D8B030D-6E8A-4147-A177-3AD203B41FA5}">
                       <a16:colId xmlns:a16="http://schemas.microsoft.com/office/drawing/2014/main" val="2661357519"/>
                     </a:ext>
                   </a:extLst>
                 </a:gridCol>
-                <a:gridCol w="484017">
+                <a:gridCol w="478605">
                   <a:extLst>
                     <a:ext uri="{9D8B030D-6E8A-4147-A177-3AD203B41FA5}">
                       <a16:colId xmlns:a16="http://schemas.microsoft.com/office/drawing/2014/main" val="1629908258"/>
                     </a:ext>
                   </a:extLst>
                 </a:gridCol>
-                <a:gridCol w="484017">
+                <a:gridCol w="478605">
                   <a:extLst>
                     <a:ext uri="{9D8B030D-6E8A-4147-A177-3AD203B41FA5}">
                       <a16:colId xmlns:a16="http://schemas.microsoft.com/office/drawing/2014/main" val="2147780406"/>
                     </a:ext>
                   </a:extLst>
                 </a:gridCol>
-                <a:gridCol w="140136">
+                <a:gridCol w="617173">
                   <a:extLst>
                     <a:ext uri="{9D8B030D-6E8A-4147-A177-3AD203B41FA5}">
                       <a16:colId xmlns:a16="http://schemas.microsoft.com/office/drawing/2014/main" val="2368806540"/>
                     </a:ext>
                   </a:extLst>
                 </a:gridCol>
-                <a:gridCol w="484017">
-                  <a:extLst>
-                    <a:ext uri="{9D8B030D-6E8A-4147-A177-3AD203B41FA5}">
-                      <a16:colId xmlns:a16="http://schemas.microsoft.com/office/drawing/2014/main" val="3867265020"/>
-                    </a:ext>
-                  </a:extLst>
-                </a:gridCol>
-                <a:gridCol w="484017">
+                <a:gridCol w="524223">
                   <a:extLst>
                     <a:ext uri="{9D8B030D-6E8A-4147-A177-3AD203B41FA5}">
                       <a16:colId xmlns:a16="http://schemas.microsoft.com/office/drawing/2014/main" val="3959863927"/>
                     </a:ext>
                   </a:extLst>
                 </a:gridCol>
-                <a:gridCol w="140136">
+                <a:gridCol w="93980">
                   <a:extLst>
                     <a:ext uri="{9D8B030D-6E8A-4147-A177-3AD203B41FA5}">
                       <a16:colId xmlns:a16="http://schemas.microsoft.com/office/drawing/2014/main" val="366369285"/>
@@ -9314,7 +9680,7 @@
                   </a:extLst>
                 </a:gridCol>
               </a:tblGrid>
-              <a:tr h="524466">
+              <a:tr h="687222">
                 <a:tc rowSpan="2">
                   <a:txBody>
                     <a:bodyPr/>
@@ -9674,7 +10040,7 @@
                   </a:txBody>
                   <a:tcPr/>
                 </a:tc>
-                <a:tc gridSpan="4">
+                <a:tc gridSpan="3">
                   <a:txBody>
                     <a:bodyPr/>
                     <a:lstStyle/>
@@ -9757,17 +10123,17 @@
                       <a:endParaRPr lang="es-CL"/>
                     </a:p>
                   </a:txBody>
-                  <a:tcPr/>
-                </a:tc>
-                <a:tc hMerge="1">
-                  <a:txBody>
-                    <a:bodyPr/>
-                    <a:lstStyle/>
-                    <a:p>
-                      <a:endParaRPr lang="es-CL"/>
-                    </a:p>
-                  </a:txBody>
-                  <a:tcPr/>
+                  <a:tcPr>
+                    <a:lnL w="12700" cap="flat" cmpd="sng" algn="ctr">
+                      <a:solidFill>
+                        <a:srgbClr val="BFBFBF"/>
+                      </a:solidFill>
+                      <a:prstDash val="solid"/>
+                      <a:round/>
+                      <a:headEnd type="none" w="med" len="med"/>
+                      <a:tailEnd type="none" w="med" len="med"/>
+                    </a:lnL>
+                  </a:tcPr>
                 </a:tc>
                 <a:tc hMerge="1">
                   <a:txBody>
@@ -9785,7 +10151,7 @@
                   </a:ext>
                 </a:extLst>
               </a:tr>
-              <a:tr h="540519">
+              <a:tr h="708257">
                 <a:tc vMerge="1">
                   <a:txBody>
                     <a:bodyPr/>
@@ -10831,7 +11197,7 @@
                     </a:lnB>
                   </a:tcPr>
                 </a:tc>
-                <a:tc gridSpan="2">
+                <a:tc>
                   <a:txBody>
                     <a:bodyPr/>
                     <a:lstStyle/>
@@ -10900,29 +11266,11 @@
                     </a:lnB>
                   </a:tcPr>
                 </a:tc>
-                <a:tc hMerge="1">
-                  <a:txBody>
-                    <a:bodyPr/>
-                    <a:lstStyle/>
-                    <a:p>
-                      <a:endParaRPr lang="es-CL"/>
-                    </a:p>
-                  </a:txBody>
-                  <a:tcPr/>
-                </a:tc>
                 <a:tc>
                   <a:txBody>
                     <a:bodyPr/>
                     <a:lstStyle/>
                     <a:p>
-                      <a:pPr algn="ctr">
-                        <a:lnSpc>
-                          <a:spcPct val="150000"/>
-                        </a:lnSpc>
-                        <a:spcAft>
-                          <a:spcPts val="800"/>
-                        </a:spcAft>
-                      </a:pPr>
                       <a:r>
                         <a:rPr lang="es-CL" sz="800" b="1">
                           <a:effectLst/>
@@ -10932,12 +11280,7 @@
                         </a:rPr>
                         <a:t>S 17</a:t>
                       </a:r>
-                      <a:endParaRPr lang="es-CL" sz="1100">
-                        <a:effectLst/>
-                        <a:latin typeface="Calibri" panose="020F0502020204030204" pitchFamily="34" charset="0"/>
-                        <a:ea typeface="Calibri" panose="020F0502020204030204" pitchFamily="34" charset="0"/>
-                        <a:cs typeface="Times New Roman" panose="02020603050405020304" pitchFamily="18" charset="0"/>
-                      </a:endParaRPr>
+                      <a:endParaRPr lang="es-CL"/>
                     </a:p>
                   </a:txBody>
                   <a:tcPr marL="68580" marR="68580" marT="0" marB="0">
@@ -11028,15 +11371,6 @@
                       <a:headEnd type="none" w="med" len="med"/>
                       <a:tailEnd type="none" w="med" len="med"/>
                     </a:lnR>
-                    <a:lnT w="12700" cap="flat" cmpd="sng" algn="ctr">
-                      <a:solidFill>
-                        <a:srgbClr val="BFBFBF"/>
-                      </a:solidFill>
-                      <a:prstDash val="solid"/>
-                      <a:round/>
-                      <a:headEnd type="none" w="med" len="med"/>
-                      <a:tailEnd type="none" w="med" len="med"/>
-                    </a:lnT>
                     <a:lnB w="12700" cap="flat" cmpd="sng" algn="ctr">
                       <a:solidFill>
                         <a:srgbClr val="BFBFBF"/>
@@ -11105,7 +11439,7 @@
                   </a:ext>
                 </a:extLst>
               </a:tr>
-              <a:tr h="1488303">
+              <a:tr h="871128">
                 <a:tc>
                   <a:txBody>
                     <a:bodyPr/>
@@ -11120,18 +11454,97 @@
                         </a:spcAft>
                       </a:pPr>
                       <a:r>
-                        <a:rPr lang="es-CL" sz="800" i="1">
-                          <a:solidFill>
-                            <a:srgbClr val="548DD4"/>
-                          </a:solidFill>
+                        <a:rPr lang="es-CL" sz="1100" dirty="0">
                           <a:effectLst/>
                           <a:latin typeface="Calibri" panose="020F0502020204030204" pitchFamily="34" charset="0"/>
                           <a:ea typeface="Calibri" panose="020F0502020204030204" pitchFamily="34" charset="0"/>
-                          <a:cs typeface="Arial" panose="020B0604020202020204" pitchFamily="34" charset="0"/>
+                          <a:cs typeface="Times New Roman" panose="02020603050405020304" pitchFamily="18" charset="0"/>
                         </a:rPr>
-                        <a:t>Describe actividades del punto anterior</a:t>
+                        <a:t>Planificación del proyecto. </a:t>
                       </a:r>
-                      <a:endParaRPr lang="es-CL" sz="1100">
+                    </a:p>
+                  </a:txBody>
+                  <a:tcPr marL="68580" marR="68580" marT="0" marB="0">
+                    <a:lnL w="12700" cap="flat" cmpd="sng" algn="ctr">
+                      <a:solidFill>
+                        <a:srgbClr val="BFBFBF"/>
+                      </a:solidFill>
+                      <a:prstDash val="solid"/>
+                      <a:round/>
+                      <a:headEnd type="none" w="med" len="med"/>
+                      <a:tailEnd type="none" w="med" len="med"/>
+                    </a:lnL>
+                    <a:lnR w="12700" cap="flat" cmpd="sng" algn="ctr">
+                      <a:solidFill>
+                        <a:srgbClr val="BFBFBF"/>
+                      </a:solidFill>
+                      <a:prstDash val="solid"/>
+                      <a:round/>
+                      <a:headEnd type="none" w="med" len="med"/>
+                      <a:tailEnd type="none" w="med" len="med"/>
+                    </a:lnR>
+                    <a:lnT w="12700" cap="flat" cmpd="sng" algn="ctr">
+                      <a:solidFill>
+                        <a:srgbClr val="BFBFBF"/>
+                      </a:solidFill>
+                      <a:prstDash val="solid"/>
+                      <a:round/>
+                      <a:headEnd type="none" w="med" len="med"/>
+                      <a:tailEnd type="none" w="med" len="med"/>
+                    </a:lnT>
+                    <a:lnB w="12700" cap="flat" cmpd="sng" algn="ctr">
+                      <a:solidFill>
+                        <a:srgbClr val="BFBFBF"/>
+                      </a:solidFill>
+                      <a:prstDash val="solid"/>
+                      <a:round/>
+                      <a:headEnd type="none" w="med" len="med"/>
+                      <a:tailEnd type="none" w="med" len="med"/>
+                    </a:lnB>
+                  </a:tcPr>
+                </a:tc>
+                <a:tc>
+                  <a:txBody>
+                    <a:bodyPr/>
+                    <a:lstStyle/>
+                    <a:p>
+                      <a:pPr algn="ctr">
+                        <a:lnSpc>
+                          <a:spcPct val="150000"/>
+                        </a:lnSpc>
+                        <a:spcAft>
+                          <a:spcPts val="800"/>
+                        </a:spcAft>
+                      </a:pPr>
+                      <a:r>
+                        <a:rPr lang="es-CL" sz="800" b="1" dirty="0">
+                          <a:effectLst/>
+                          <a:latin typeface="Calibri" panose="020F0502020204030204" pitchFamily="34" charset="0"/>
+                          <a:ea typeface="Calibri" panose="020F0502020204030204" pitchFamily="34" charset="0"/>
+                          <a:cs typeface="Times New Roman" panose="02020603050405020304" pitchFamily="18" charset="0"/>
+                        </a:rPr>
+                        <a:t> </a:t>
+                      </a:r>
+                    </a:p>
+                    <a:p>
+                      <a:pPr algn="ctr">
+                        <a:lnSpc>
+                          <a:spcPct val="150000"/>
+                        </a:lnSpc>
+                        <a:spcAft>
+                          <a:spcPts val="800"/>
+                        </a:spcAft>
+                      </a:pPr>
+                      <a:r>
+                        <a:rPr lang="es-CL" sz="800" b="1" dirty="0">
+                          <a:effectLst/>
+                          <a:latin typeface="Calibri" panose="020F0502020204030204" pitchFamily="34" charset="0"/>
+                          <a:ea typeface="Calibri" panose="020F0502020204030204" pitchFamily="34" charset="0"/>
+                          <a:cs typeface="Times New Roman" panose="02020603050405020304" pitchFamily="18" charset="0"/>
+                        </a:rPr>
+                        <a:t>X</a:t>
+                      </a:r>
+                      <a:endParaRPr lang="es-CL" sz="1100" dirty="0">
                         <a:effectLst/>
                         <a:latin typeface="Calibri" panose="020F0502020204030204" pitchFamily="34" charset="0"/>
                         <a:ea typeface="Calibri" panose="020F0502020204030204" pitchFamily="34" charset="0"/>
@@ -11192,7 +11605,10 @@
                         </a:spcAft>
                       </a:pPr>
                       <a:r>
-                        <a:rPr lang="es-CL" sz="800" b="1">
+                        <a:rPr lang="es-CL" sz="800" b="1" kern="1200" dirty="0">
+                          <a:solidFill>
+                            <a:schemeClr val="tx1"/>
+                          </a:solidFill>
                           <a:effectLst/>
                           <a:latin typeface="Calibri" panose="020F0502020204030204" pitchFamily="34" charset="0"/>
                           <a:ea typeface="Calibri" panose="020F0502020204030204" pitchFamily="34" charset="0"/>
@@ -11200,12 +11616,201 @@
                         </a:rPr>
                         <a:t> </a:t>
                       </a:r>
-                      <a:endParaRPr lang="es-CL" sz="1100">
+                    </a:p>
+                    <a:p>
+                      <a:pPr algn="ctr">
+                        <a:lnSpc>
+                          <a:spcPct val="150000"/>
+                        </a:lnSpc>
+                        <a:spcAft>
+                          <a:spcPts val="800"/>
+                        </a:spcAft>
+                      </a:pPr>
+                      <a:r>
+                        <a:rPr lang="es-CL" sz="800" b="1" kern="1200" dirty="0">
+                          <a:solidFill>
+                            <a:schemeClr val="tx1"/>
+                          </a:solidFill>
+                          <a:effectLst/>
+                          <a:latin typeface="Calibri" panose="020F0502020204030204" pitchFamily="34" charset="0"/>
+                          <a:ea typeface="Calibri" panose="020F0502020204030204" pitchFamily="34" charset="0"/>
+                          <a:cs typeface="Times New Roman" panose="02020603050405020304" pitchFamily="18" charset="0"/>
+                        </a:rPr>
+                        <a:t>X</a:t>
+                      </a:r>
+                    </a:p>
+                  </a:txBody>
+                  <a:tcPr marL="68580" marR="68580" marT="0" marB="0">
+                    <a:lnL w="12700" cap="flat" cmpd="sng" algn="ctr">
+                      <a:solidFill>
+                        <a:srgbClr val="BFBFBF"/>
+                      </a:solidFill>
+                      <a:prstDash val="solid"/>
+                      <a:round/>
+                      <a:headEnd type="none" w="med" len="med"/>
+                      <a:tailEnd type="none" w="med" len="med"/>
+                    </a:lnL>
+                    <a:lnR w="12700" cap="flat" cmpd="sng" algn="ctr">
+                      <a:solidFill>
+                        <a:srgbClr val="BFBFBF"/>
+                      </a:solidFill>
+                      <a:prstDash val="solid"/>
+                      <a:round/>
+                      <a:headEnd type="none" w="med" len="med"/>
+                      <a:tailEnd type="none" w="med" len="med"/>
+                    </a:lnR>
+                    <a:lnT w="12700" cap="flat" cmpd="sng" algn="ctr">
+                      <a:solidFill>
+                        <a:srgbClr val="BFBFBF"/>
+                      </a:solidFill>
+                      <a:prstDash val="solid"/>
+                      <a:round/>
+                      <a:headEnd type="none" w="med" len="med"/>
+                      <a:tailEnd type="none" w="med" len="med"/>
+                    </a:lnT>
+                    <a:lnB w="12700" cap="flat" cmpd="sng" algn="ctr">
+                      <a:solidFill>
+                        <a:srgbClr val="BFBFBF"/>
+                      </a:solidFill>
+                      <a:prstDash val="solid"/>
+                      <a:round/>
+                      <a:headEnd type="none" w="med" len="med"/>
+                      <a:tailEnd type="none" w="med" len="med"/>
+                    </a:lnB>
+                  </a:tcPr>
+                </a:tc>
+                <a:tc>
+                  <a:txBody>
+                    <a:bodyPr/>
+                    <a:lstStyle/>
+                    <a:p>
+                      <a:pPr algn="ctr">
+                        <a:lnSpc>
+                          <a:spcPct val="150000"/>
+                        </a:lnSpc>
+                        <a:spcAft>
+                          <a:spcPts val="800"/>
+                        </a:spcAft>
+                      </a:pPr>
+                      <a:endParaRPr lang="es-CL" sz="800" b="1" kern="1200" dirty="0">
+                        <a:solidFill>
+                          <a:schemeClr val="tx1"/>
+                        </a:solidFill>
                         <a:effectLst/>
                         <a:latin typeface="Calibri" panose="020F0502020204030204" pitchFamily="34" charset="0"/>
                         <a:ea typeface="Calibri" panose="020F0502020204030204" pitchFamily="34" charset="0"/>
                         <a:cs typeface="Times New Roman" panose="02020603050405020304" pitchFamily="18" charset="0"/>
                       </a:endParaRPr>
+                    </a:p>
+                    <a:p>
+                      <a:pPr algn="ctr">
+                        <a:lnSpc>
+                          <a:spcPct val="150000"/>
+                        </a:lnSpc>
+                        <a:spcAft>
+                          <a:spcPts val="800"/>
+                        </a:spcAft>
+                      </a:pPr>
+                      <a:r>
+                        <a:rPr lang="es-CL" sz="800" b="1" kern="1200" dirty="0">
+                          <a:solidFill>
+                            <a:schemeClr val="tx1"/>
+                          </a:solidFill>
+                          <a:effectLst/>
+                          <a:latin typeface="Calibri" panose="020F0502020204030204" pitchFamily="34" charset="0"/>
+                          <a:ea typeface="Calibri" panose="020F0502020204030204" pitchFamily="34" charset="0"/>
+                          <a:cs typeface="Times New Roman" panose="02020603050405020304" pitchFamily="18" charset="0"/>
+                        </a:rPr>
+                        <a:t>X </a:t>
+                      </a:r>
+                    </a:p>
+                  </a:txBody>
+                  <a:tcPr marL="68580" marR="68580" marT="0" marB="0">
+                    <a:lnL w="12700" cap="flat" cmpd="sng" algn="ctr">
+                      <a:solidFill>
+                        <a:srgbClr val="BFBFBF"/>
+                      </a:solidFill>
+                      <a:prstDash val="solid"/>
+                      <a:round/>
+                      <a:headEnd type="none" w="med" len="med"/>
+                      <a:tailEnd type="none" w="med" len="med"/>
+                    </a:lnL>
+                    <a:lnR w="12700" cap="flat" cmpd="sng" algn="ctr">
+                      <a:solidFill>
+                        <a:srgbClr val="BFBFBF"/>
+                      </a:solidFill>
+                      <a:prstDash val="solid"/>
+                      <a:round/>
+                      <a:headEnd type="none" w="med" len="med"/>
+                      <a:tailEnd type="none" w="med" len="med"/>
+                    </a:lnR>
+                    <a:lnT w="12700" cap="flat" cmpd="sng" algn="ctr">
+                      <a:solidFill>
+                        <a:srgbClr val="BFBFBF"/>
+                      </a:solidFill>
+                      <a:prstDash val="solid"/>
+                      <a:round/>
+                      <a:headEnd type="none" w="med" len="med"/>
+                      <a:tailEnd type="none" w="med" len="med"/>
+                    </a:lnT>
+                    <a:lnB w="12700" cap="flat" cmpd="sng" algn="ctr">
+                      <a:solidFill>
+                        <a:srgbClr val="BFBFBF"/>
+                      </a:solidFill>
+                      <a:prstDash val="solid"/>
+                      <a:round/>
+                      <a:headEnd type="none" w="med" len="med"/>
+                      <a:tailEnd type="none" w="med" len="med"/>
+                    </a:lnB>
+                  </a:tcPr>
+                </a:tc>
+                <a:tc>
+                  <a:txBody>
+                    <a:bodyPr/>
+                    <a:lstStyle/>
+                    <a:p>
+                      <a:pPr algn="ctr">
+                        <a:lnSpc>
+                          <a:spcPct val="150000"/>
+                        </a:lnSpc>
+                        <a:spcAft>
+                          <a:spcPts val="800"/>
+                        </a:spcAft>
+                      </a:pPr>
+                      <a:r>
+                        <a:rPr lang="es-CL" sz="800" b="1" kern="1200" dirty="0">
+                          <a:solidFill>
+                            <a:schemeClr val="tx1"/>
+                          </a:solidFill>
+                          <a:effectLst/>
+                          <a:latin typeface="Calibri" panose="020F0502020204030204" pitchFamily="34" charset="0"/>
+                          <a:ea typeface="Calibri" panose="020F0502020204030204" pitchFamily="34" charset="0"/>
+                          <a:cs typeface="Times New Roman" panose="02020603050405020304" pitchFamily="18" charset="0"/>
+                        </a:rPr>
+                        <a:t> </a:t>
+                      </a:r>
+                    </a:p>
+                    <a:p>
+                      <a:pPr algn="ctr">
+                        <a:lnSpc>
+                          <a:spcPct val="150000"/>
+                        </a:lnSpc>
+                        <a:spcAft>
+                          <a:spcPts val="800"/>
+                        </a:spcAft>
+                      </a:pPr>
+                      <a:r>
+                        <a:rPr lang="es-CL" sz="800" b="1" kern="1200" dirty="0">
+                          <a:solidFill>
+                            <a:schemeClr val="tx1"/>
+                          </a:solidFill>
+                          <a:effectLst/>
+                          <a:latin typeface="Calibri" panose="020F0502020204030204" pitchFamily="34" charset="0"/>
+                          <a:ea typeface="Calibri" panose="020F0502020204030204" pitchFamily="34" charset="0"/>
+                          <a:cs typeface="Times New Roman" panose="02020603050405020304" pitchFamily="18" charset="0"/>
+                        </a:rPr>
+                        <a:t>X</a:t>
+                      </a:r>
                     </a:p>
                   </a:txBody>
                   <a:tcPr marL="68580" marR="68580" marT="0" marB="0">
@@ -11261,7 +11866,10 @@
                         </a:spcAft>
                       </a:pPr>
                       <a:r>
-                        <a:rPr lang="es-CL" sz="800" b="1">
+                        <a:rPr lang="es-CL" sz="800" b="1" kern="1200" dirty="0">
+                          <a:solidFill>
+                            <a:schemeClr val="tx1"/>
+                          </a:solidFill>
                           <a:effectLst/>
                           <a:latin typeface="Calibri" panose="020F0502020204030204" pitchFamily="34" charset="0"/>
                           <a:ea typeface="Calibri" panose="020F0502020204030204" pitchFamily="34" charset="0"/>
@@ -11269,12 +11877,6 @@
                         </a:rPr>
                         <a:t> </a:t>
                       </a:r>
-                      <a:endParaRPr lang="es-CL" sz="1100">
-                        <a:effectLst/>
-                        <a:latin typeface="Calibri" panose="020F0502020204030204" pitchFamily="34" charset="0"/>
-                        <a:ea typeface="Calibri" panose="020F0502020204030204" pitchFamily="34" charset="0"/>
-                        <a:cs typeface="Times New Roman" panose="02020603050405020304" pitchFamily="18" charset="0"/>
-                      </a:endParaRPr>
                     </a:p>
                   </a:txBody>
                   <a:tcPr marL="68580" marR="68580" marT="0" marB="0">
@@ -11330,7 +11932,10 @@
                         </a:spcAft>
                       </a:pPr>
                       <a:r>
-                        <a:rPr lang="es-CL" sz="800" b="1">
+                        <a:rPr lang="es-CL" sz="800" b="1" kern="1200">
+                          <a:solidFill>
+                            <a:schemeClr val="tx1"/>
+                          </a:solidFill>
                           <a:effectLst/>
                           <a:latin typeface="Calibri" panose="020F0502020204030204" pitchFamily="34" charset="0"/>
                           <a:ea typeface="Calibri" panose="020F0502020204030204" pitchFamily="34" charset="0"/>
@@ -11338,12 +11943,6 @@
                         </a:rPr>
                         <a:t> </a:t>
                       </a:r>
-                      <a:endParaRPr lang="es-CL" sz="1100">
-                        <a:effectLst/>
-                        <a:latin typeface="Calibri" panose="020F0502020204030204" pitchFamily="34" charset="0"/>
-                        <a:ea typeface="Calibri" panose="020F0502020204030204" pitchFamily="34" charset="0"/>
-                        <a:cs typeface="Times New Roman" panose="02020603050405020304" pitchFamily="18" charset="0"/>
-                      </a:endParaRPr>
                     </a:p>
                   </a:txBody>
                   <a:tcPr marL="68580" marR="68580" marT="0" marB="0">
@@ -11399,7 +11998,10 @@
                         </a:spcAft>
                       </a:pPr>
                       <a:r>
-                        <a:rPr lang="es-CL" sz="800" b="1">
+                        <a:rPr lang="es-CL" sz="800" b="1" kern="1200" dirty="0">
+                          <a:solidFill>
+                            <a:schemeClr val="tx1"/>
+                          </a:solidFill>
                           <a:effectLst/>
                           <a:latin typeface="Calibri" panose="020F0502020204030204" pitchFamily="34" charset="0"/>
                           <a:ea typeface="Calibri" panose="020F0502020204030204" pitchFamily="34" charset="0"/>
@@ -11407,12 +12009,6 @@
                         </a:rPr>
                         <a:t> </a:t>
                       </a:r>
-                      <a:endParaRPr lang="es-CL" sz="1100">
-                        <a:effectLst/>
-                        <a:latin typeface="Calibri" panose="020F0502020204030204" pitchFamily="34" charset="0"/>
-                        <a:ea typeface="Calibri" panose="020F0502020204030204" pitchFamily="34" charset="0"/>
-                        <a:cs typeface="Times New Roman" panose="02020603050405020304" pitchFamily="18" charset="0"/>
-                      </a:endParaRPr>
                     </a:p>
                   </a:txBody>
                   <a:tcPr marL="68580" marR="68580" marT="0" marB="0">
@@ -11468,7 +12064,10 @@
                         </a:spcAft>
                       </a:pPr>
                       <a:r>
-                        <a:rPr lang="es-CL" sz="800" b="1">
+                        <a:rPr lang="es-CL" sz="800" b="1" kern="1200">
+                          <a:solidFill>
+                            <a:schemeClr val="tx1"/>
+                          </a:solidFill>
                           <a:effectLst/>
                           <a:latin typeface="Calibri" panose="020F0502020204030204" pitchFamily="34" charset="0"/>
                           <a:ea typeface="Calibri" panose="020F0502020204030204" pitchFamily="34" charset="0"/>
@@ -11476,12 +12075,6 @@
                         </a:rPr>
                         <a:t> </a:t>
                       </a:r>
-                      <a:endParaRPr lang="es-CL" sz="1100">
-                        <a:effectLst/>
-                        <a:latin typeface="Calibri" panose="020F0502020204030204" pitchFamily="34" charset="0"/>
-                        <a:ea typeface="Calibri" panose="020F0502020204030204" pitchFamily="34" charset="0"/>
-                        <a:cs typeface="Times New Roman" panose="02020603050405020304" pitchFamily="18" charset="0"/>
-                      </a:endParaRPr>
                     </a:p>
                   </a:txBody>
                   <a:tcPr marL="68580" marR="68580" marT="0" marB="0">
@@ -11537,7 +12130,10 @@
                         </a:spcAft>
                       </a:pPr>
                       <a:r>
-                        <a:rPr lang="es-CL" sz="800" b="1">
+                        <a:rPr lang="es-CL" sz="800" b="1" kern="1200" dirty="0">
+                          <a:solidFill>
+                            <a:schemeClr val="tx1"/>
+                          </a:solidFill>
                           <a:effectLst/>
                           <a:latin typeface="Calibri" panose="020F0502020204030204" pitchFamily="34" charset="0"/>
                           <a:ea typeface="Calibri" panose="020F0502020204030204" pitchFamily="34" charset="0"/>
@@ -11545,12 +12141,6 @@
                         </a:rPr>
                         <a:t> </a:t>
                       </a:r>
-                      <a:endParaRPr lang="es-CL" sz="1100">
-                        <a:effectLst/>
-                        <a:latin typeface="Calibri" panose="020F0502020204030204" pitchFamily="34" charset="0"/>
-                        <a:ea typeface="Calibri" panose="020F0502020204030204" pitchFamily="34" charset="0"/>
-                        <a:cs typeface="Times New Roman" panose="02020603050405020304" pitchFamily="18" charset="0"/>
-                      </a:endParaRPr>
                     </a:p>
                   </a:txBody>
                   <a:tcPr marL="68580" marR="68580" marT="0" marB="0">
@@ -11606,7 +12196,10 @@
                         </a:spcAft>
                       </a:pPr>
                       <a:r>
-                        <a:rPr lang="es-CL" sz="800" b="1">
+                        <a:rPr lang="es-CL" sz="800" b="1" kern="1200" dirty="0">
+                          <a:solidFill>
+                            <a:schemeClr val="tx1"/>
+                          </a:solidFill>
                           <a:effectLst/>
                           <a:latin typeface="Calibri" panose="020F0502020204030204" pitchFamily="34" charset="0"/>
                           <a:ea typeface="Calibri" panose="020F0502020204030204" pitchFamily="34" charset="0"/>
@@ -11614,12 +12207,6 @@
                         </a:rPr>
                         <a:t> </a:t>
                       </a:r>
-                      <a:endParaRPr lang="es-CL" sz="1100">
-                        <a:effectLst/>
-                        <a:latin typeface="Calibri" panose="020F0502020204030204" pitchFamily="34" charset="0"/>
-                        <a:ea typeface="Calibri" panose="020F0502020204030204" pitchFamily="34" charset="0"/>
-                        <a:cs typeface="Times New Roman" panose="02020603050405020304" pitchFamily="18" charset="0"/>
-                      </a:endParaRPr>
                     </a:p>
                   </a:txBody>
                   <a:tcPr marL="68580" marR="68580" marT="0" marB="0">
@@ -11675,7 +12262,10 @@
                         </a:spcAft>
                       </a:pPr>
                       <a:r>
-                        <a:rPr lang="es-CL" sz="800" b="1">
+                        <a:rPr lang="es-CL" sz="800" b="1" kern="1200" dirty="0">
+                          <a:solidFill>
+                            <a:schemeClr val="tx1"/>
+                          </a:solidFill>
                           <a:effectLst/>
                           <a:latin typeface="Calibri" panose="020F0502020204030204" pitchFamily="34" charset="0"/>
                           <a:ea typeface="Calibri" panose="020F0502020204030204" pitchFamily="34" charset="0"/>
@@ -11683,12 +12273,6 @@
                         </a:rPr>
                         <a:t> </a:t>
                       </a:r>
-                      <a:endParaRPr lang="es-CL" sz="1100">
-                        <a:effectLst/>
-                        <a:latin typeface="Calibri" panose="020F0502020204030204" pitchFamily="34" charset="0"/>
-                        <a:ea typeface="Calibri" panose="020F0502020204030204" pitchFamily="34" charset="0"/>
-                        <a:cs typeface="Times New Roman" panose="02020603050405020304" pitchFamily="18" charset="0"/>
-                      </a:endParaRPr>
                     </a:p>
                   </a:txBody>
                   <a:tcPr marL="68580" marR="68580" marT="0" marB="0">
@@ -11744,7 +12328,10 @@
                         </a:spcAft>
                       </a:pPr>
                       <a:r>
-                        <a:rPr lang="es-CL" sz="800" b="1">
+                        <a:rPr lang="es-CL" sz="800" b="1" kern="1200" dirty="0">
+                          <a:solidFill>
+                            <a:schemeClr val="tx1"/>
+                          </a:solidFill>
                           <a:effectLst/>
                           <a:latin typeface="Calibri" panose="020F0502020204030204" pitchFamily="34" charset="0"/>
                           <a:ea typeface="Calibri" panose="020F0502020204030204" pitchFamily="34" charset="0"/>
@@ -11752,12 +12339,6 @@
                         </a:rPr>
                         <a:t> </a:t>
                       </a:r>
-                      <a:endParaRPr lang="es-CL" sz="1100">
-                        <a:effectLst/>
-                        <a:latin typeface="Calibri" panose="020F0502020204030204" pitchFamily="34" charset="0"/>
-                        <a:ea typeface="Calibri" panose="020F0502020204030204" pitchFamily="34" charset="0"/>
-                        <a:cs typeface="Times New Roman" panose="02020603050405020304" pitchFamily="18" charset="0"/>
-                      </a:endParaRPr>
                     </a:p>
                   </a:txBody>
                   <a:tcPr marL="68580" marR="68580" marT="0" marB="0">
@@ -11813,7 +12394,10 @@
                         </a:spcAft>
                       </a:pPr>
                       <a:r>
-                        <a:rPr lang="es-CL" sz="800" b="1" dirty="0">
+                        <a:rPr lang="es-CL" sz="800" b="1" kern="1200" dirty="0">
+                          <a:solidFill>
+                            <a:schemeClr val="tx1"/>
+                          </a:solidFill>
                           <a:effectLst/>
                           <a:latin typeface="Calibri" panose="020F0502020204030204" pitchFamily="34" charset="0"/>
                           <a:ea typeface="Calibri" panose="020F0502020204030204" pitchFamily="34" charset="0"/>
@@ -11821,12 +12405,6 @@
                         </a:rPr>
                         <a:t> </a:t>
                       </a:r>
-                      <a:endParaRPr lang="es-CL" sz="1100" dirty="0">
-                        <a:effectLst/>
-                        <a:latin typeface="Calibri" panose="020F0502020204030204" pitchFamily="34" charset="0"/>
-                        <a:ea typeface="Calibri" panose="020F0502020204030204" pitchFamily="34" charset="0"/>
-                        <a:cs typeface="Times New Roman" panose="02020603050405020304" pitchFamily="18" charset="0"/>
-                      </a:endParaRPr>
                     </a:p>
                   </a:txBody>
                   <a:tcPr marL="68580" marR="68580" marT="0" marB="0">
@@ -11882,7 +12460,10 @@
                         </a:spcAft>
                       </a:pPr>
                       <a:r>
-                        <a:rPr lang="es-CL" sz="800" b="1">
+                        <a:rPr lang="es-CL" sz="800" b="1" kern="1200" dirty="0">
+                          <a:solidFill>
+                            <a:schemeClr val="tx1"/>
+                          </a:solidFill>
                           <a:effectLst/>
                           <a:latin typeface="Calibri" panose="020F0502020204030204" pitchFamily="34" charset="0"/>
                           <a:ea typeface="Calibri" panose="020F0502020204030204" pitchFamily="34" charset="0"/>
@@ -11890,12 +12471,6 @@
                         </a:rPr>
                         <a:t> </a:t>
                       </a:r>
-                      <a:endParaRPr lang="es-CL" sz="1100">
-                        <a:effectLst/>
-                        <a:latin typeface="Calibri" panose="020F0502020204030204" pitchFamily="34" charset="0"/>
-                        <a:ea typeface="Calibri" panose="020F0502020204030204" pitchFamily="34" charset="0"/>
-                        <a:cs typeface="Times New Roman" panose="02020603050405020304" pitchFamily="18" charset="0"/>
-                      </a:endParaRPr>
                     </a:p>
                   </a:txBody>
                   <a:tcPr marL="68580" marR="68580" marT="0" marB="0">
@@ -11951,7 +12526,10 @@
                         </a:spcAft>
                       </a:pPr>
                       <a:r>
-                        <a:rPr lang="es-CL" sz="800" b="1">
+                        <a:rPr lang="es-CL" sz="800" b="1" kern="1200" dirty="0">
+                          <a:solidFill>
+                            <a:schemeClr val="tx1"/>
+                          </a:solidFill>
                           <a:effectLst/>
                           <a:latin typeface="Calibri" panose="020F0502020204030204" pitchFamily="34" charset="0"/>
                           <a:ea typeface="Calibri" panose="020F0502020204030204" pitchFamily="34" charset="0"/>
@@ -11959,12 +12537,6 @@
                         </a:rPr>
                         <a:t> </a:t>
                       </a:r>
-                      <a:endParaRPr lang="es-CL" sz="1100">
-                        <a:effectLst/>
-                        <a:latin typeface="Calibri" panose="020F0502020204030204" pitchFamily="34" charset="0"/>
-                        <a:ea typeface="Calibri" panose="020F0502020204030204" pitchFamily="34" charset="0"/>
-                        <a:cs typeface="Times New Roman" panose="02020603050405020304" pitchFamily="18" charset="0"/>
-                      </a:endParaRPr>
                     </a:p>
                   </a:txBody>
                   <a:tcPr marL="68580" marR="68580" marT="0" marB="0">
@@ -12020,7 +12592,10 @@
                         </a:spcAft>
                       </a:pPr>
                       <a:r>
-                        <a:rPr lang="es-CL" sz="800" b="1">
+                        <a:rPr lang="es-CL" sz="800" b="1" kern="1200" dirty="0">
+                          <a:solidFill>
+                            <a:schemeClr val="tx1"/>
+                          </a:solidFill>
                           <a:effectLst/>
                           <a:latin typeface="Calibri" panose="020F0502020204030204" pitchFamily="34" charset="0"/>
                           <a:ea typeface="Calibri" panose="020F0502020204030204" pitchFamily="34" charset="0"/>
@@ -12028,12 +12603,64 @@
                         </a:rPr>
                         <a:t> </a:t>
                       </a:r>
-                      <a:endParaRPr lang="es-CL" sz="1100">
-                        <a:effectLst/>
-                        <a:latin typeface="Calibri" panose="020F0502020204030204" pitchFamily="34" charset="0"/>
-                        <a:ea typeface="Calibri" panose="020F0502020204030204" pitchFamily="34" charset="0"/>
-                        <a:cs typeface="Times New Roman" panose="02020603050405020304" pitchFamily="18" charset="0"/>
-                      </a:endParaRPr>
+                    </a:p>
+                  </a:txBody>
+                  <a:tcPr marL="68580" marR="68580" marT="0" marB="0">
+                    <a:lnL w="12700" cap="flat" cmpd="sng" algn="ctr">
+                      <a:solidFill>
+                        <a:srgbClr val="BFBFBF"/>
+                      </a:solidFill>
+                      <a:prstDash val="solid"/>
+                      <a:round/>
+                      <a:headEnd type="none" w="med" len="med"/>
+                      <a:tailEnd type="none" w="med" len="med"/>
+                    </a:lnL>
+                    <a:lnR w="12700" cap="flat" cmpd="sng" algn="ctr">
+                      <a:solidFill>
+                        <a:srgbClr val="BFBFBF"/>
+                      </a:solidFill>
+                      <a:prstDash val="solid"/>
+                      <a:round/>
+                      <a:headEnd type="none" w="med" len="med"/>
+                      <a:tailEnd type="none" w="med" len="med"/>
+                    </a:lnR>
+                    <a:lnT w="12700" cap="flat" cmpd="sng" algn="ctr">
+                      <a:solidFill>
+                        <a:srgbClr val="BFBFBF"/>
+                      </a:solidFill>
+                      <a:prstDash val="solid"/>
+                      <a:round/>
+                      <a:headEnd type="none" w="med" len="med"/>
+                      <a:tailEnd type="none" w="med" len="med"/>
+                    </a:lnT>
+                    <a:lnB w="12700" cap="flat" cmpd="sng" algn="ctr">
+                      <a:solidFill>
+                        <a:srgbClr val="BFBFBF"/>
+                      </a:solidFill>
+                      <a:prstDash val="solid"/>
+                      <a:round/>
+                      <a:headEnd type="none" w="med" len="med"/>
+                      <a:tailEnd type="none" w="med" len="med"/>
+                    </a:lnB>
+                  </a:tcPr>
+                </a:tc>
+                <a:tc>
+                  <a:txBody>
+                    <a:bodyPr/>
+                    <a:lstStyle/>
+                    <a:p>
+                      <a:r>
+                        <a:rPr lang="es-CL" sz="800" b="1" kern="1200" dirty="0">
+                          <a:solidFill>
+                            <a:schemeClr val="tx1"/>
+                          </a:solidFill>
+                          <a:effectLst/>
+                          <a:latin typeface="Calibri" panose="020F0502020204030204" pitchFamily="34" charset="0"/>
+                          <a:ea typeface="Calibri" panose="020F0502020204030204" pitchFamily="34" charset="0"/>
+                          <a:cs typeface="Times New Roman" panose="02020603050405020304" pitchFamily="18" charset="0"/>
+                        </a:rPr>
+                        <a:t> </a:t>
+                      </a:r>
                     </a:p>
                   </a:txBody>
                   <a:tcPr marL="68580" marR="68580" marT="0" marB="0">
@@ -12089,7 +12716,10 @@
                         </a:spcAft>
                       </a:pPr>
                       <a:r>
-                        <a:rPr lang="es-CL" sz="800" b="1">
+                        <a:rPr lang="es-CL" sz="800" b="1" kern="1200" dirty="0">
+                          <a:solidFill>
+                            <a:schemeClr val="tx1"/>
+                          </a:solidFill>
                           <a:effectLst/>
                           <a:latin typeface="Calibri" panose="020F0502020204030204" pitchFamily="34" charset="0"/>
                           <a:ea typeface="Calibri" panose="020F0502020204030204" pitchFamily="34" charset="0"/>
@@ -12097,12 +12727,124 @@
                         </a:rPr>
                         <a:t> </a:t>
                       </a:r>
-                      <a:endParaRPr lang="es-CL" sz="1100">
-                        <a:effectLst/>
-                        <a:latin typeface="Calibri" panose="020F0502020204030204" pitchFamily="34" charset="0"/>
-                        <a:ea typeface="Calibri" panose="020F0502020204030204" pitchFamily="34" charset="0"/>
-                        <a:cs typeface="Times New Roman" panose="02020603050405020304" pitchFamily="18" charset="0"/>
-                      </a:endParaRPr>
+                    </a:p>
+                  </a:txBody>
+                  <a:tcPr marL="68580" marR="68580" marT="0" marB="0">
+                    <a:lnL w="12700" cap="flat" cmpd="sng" algn="ctr">
+                      <a:solidFill>
+                        <a:srgbClr val="BFBFBF"/>
+                      </a:solidFill>
+                      <a:prstDash val="solid"/>
+                      <a:round/>
+                      <a:headEnd type="none" w="med" len="med"/>
+                      <a:tailEnd type="none" w="med" len="med"/>
+                    </a:lnL>
+                    <a:lnR w="12700" cap="flat" cmpd="sng" algn="ctr">
+                      <a:solidFill>
+                        <a:srgbClr val="BFBFBF"/>
+                      </a:solidFill>
+                      <a:prstDash val="solid"/>
+                      <a:round/>
+                      <a:headEnd type="none" w="med" len="med"/>
+                      <a:tailEnd type="none" w="med" len="med"/>
+                    </a:lnR>
+                    <a:lnT w="12700" cap="flat" cmpd="sng" algn="ctr">
+                      <a:solidFill>
+                        <a:srgbClr val="BFBFBF"/>
+                      </a:solidFill>
+                      <a:prstDash val="solid"/>
+                      <a:round/>
+                      <a:headEnd type="none" w="med" len="med"/>
+                      <a:tailEnd type="none" w="med" len="med"/>
+                    </a:lnT>
+                    <a:lnB w="12700" cap="flat" cmpd="sng" algn="ctr">
+                      <a:solidFill>
+                        <a:srgbClr val="BFBFBF"/>
+                      </a:solidFill>
+                      <a:prstDash val="solid"/>
+                      <a:round/>
+                      <a:headEnd type="none" w="med" len="med"/>
+                      <a:tailEnd type="none" w="med" len="med"/>
+                    </a:lnB>
+                  </a:tcPr>
+                </a:tc>
+                <a:tc>
+                  <a:txBody>
+                    <a:bodyPr/>
+                    <a:lstStyle/>
+                    <a:p>
+                      <a:pPr>
+                        <a:lnSpc>
+                          <a:spcPct val="107000"/>
+                        </a:lnSpc>
+                        <a:spcAft>
+                          <a:spcPts val="800"/>
+                        </a:spcAft>
+                      </a:pPr>
+                      <a:r>
+                        <a:rPr lang="es-CL" sz="1100" dirty="0">
+                          <a:effectLst/>
+                          <a:latin typeface="Calibri" panose="020F0502020204030204" pitchFamily="34" charset="0"/>
+                          <a:ea typeface="Calibri" panose="020F0502020204030204" pitchFamily="34" charset="0"/>
+                          <a:cs typeface="Times New Roman" panose="02020603050405020304" pitchFamily="18" charset="0"/>
+                        </a:rPr>
+                        <a:t> </a:t>
+                      </a:r>
+                    </a:p>
+                  </a:txBody>
+                  <a:tcPr marL="0" marR="0" marT="0" marB="0" anchor="ctr">
+                    <a:lnL w="12700" cap="flat" cmpd="sng" algn="ctr">
+                      <a:solidFill>
+                        <a:srgbClr val="BFBFBF"/>
+                      </a:solidFill>
+                      <a:prstDash val="solid"/>
+                      <a:round/>
+                      <a:headEnd type="none" w="med" len="med"/>
+                      <a:tailEnd type="none" w="med" len="med"/>
+                    </a:lnL>
+                    <a:lnR>
+                      <a:noFill/>
+                    </a:lnR>
+                    <a:lnT>
+                      <a:noFill/>
+                    </a:lnT>
+                    <a:lnB>
+                      <a:noFill/>
+                    </a:lnB>
+                  </a:tcPr>
+                </a:tc>
+                <a:extLst>
+                  <a:ext uri="{0D108BD9-81ED-4DB2-BD59-A6C34878D82A}">
+                    <a16:rowId xmlns:a16="http://schemas.microsoft.com/office/drawing/2014/main" val="2457018220"/>
+                  </a:ext>
+                </a:extLst>
+              </a:tr>
+              <a:tr h="708257">
+                <a:tc>
+                  <a:txBody>
+                    <a:bodyPr/>
+                    <a:lstStyle/>
+                    <a:p>
+                      <a:pPr algn="just">
+                        <a:lnSpc>
+                          <a:spcPct val="150000"/>
+                        </a:lnSpc>
+                        <a:spcAft>
+                          <a:spcPts val="800"/>
+                        </a:spcAft>
+                      </a:pPr>
+                      <a:r>
+                        <a:rPr lang="es-CL" sz="1100" kern="1200" dirty="0">
+                          <a:solidFill>
+                            <a:schemeClr val="tx1"/>
+                          </a:solidFill>
+                          <a:effectLst/>
+                          <a:latin typeface="Calibri" panose="020F0502020204030204" pitchFamily="34" charset="0"/>
+                          <a:ea typeface="Calibri" panose="020F0502020204030204" pitchFamily="34" charset="0"/>
+                          <a:cs typeface="Times New Roman" panose="02020603050405020304" pitchFamily="18" charset="0"/>
+                        </a:rPr>
+                        <a:t>Realización del proyecto.</a:t>
+                      </a:r>
                     </a:p>
                   </a:txBody>
                   <a:tcPr marL="68580" marR="68580" marT="0" marB="0">
@@ -12158,7 +12900,10 @@
                         </a:spcAft>
                       </a:pPr>
                       <a:r>
-                        <a:rPr lang="es-CL" sz="800" b="1">
+                        <a:rPr lang="es-CL" sz="800" b="1" kern="1200" dirty="0">
+                          <a:solidFill>
+                            <a:schemeClr val="tx1"/>
+                          </a:solidFill>
                           <a:effectLst/>
                           <a:latin typeface="Calibri" panose="020F0502020204030204" pitchFamily="34" charset="0"/>
                           <a:ea typeface="Calibri" panose="020F0502020204030204" pitchFamily="34" charset="0"/>
@@ -12166,160 +12911,6 @@
                         </a:rPr>
                         <a:t> </a:t>
                       </a:r>
-                      <a:endParaRPr lang="es-CL" sz="1100">
-                        <a:effectLst/>
-                        <a:latin typeface="Calibri" panose="020F0502020204030204" pitchFamily="34" charset="0"/>
-                        <a:ea typeface="Calibri" panose="020F0502020204030204" pitchFamily="34" charset="0"/>
-                        <a:cs typeface="Times New Roman" panose="02020603050405020304" pitchFamily="18" charset="0"/>
-                      </a:endParaRPr>
-                    </a:p>
-                  </a:txBody>
-                  <a:tcPr marL="68580" marR="68580" marT="0" marB="0">
-                    <a:lnL w="12700" cap="flat" cmpd="sng" algn="ctr">
-                      <a:solidFill>
-                        <a:srgbClr val="BFBFBF"/>
-                      </a:solidFill>
-                      <a:prstDash val="solid"/>
-                      <a:round/>
-                      <a:headEnd type="none" w="med" len="med"/>
-                      <a:tailEnd type="none" w="med" len="med"/>
-                    </a:lnL>
-                    <a:lnR w="12700" cap="flat" cmpd="sng" algn="ctr">
-                      <a:solidFill>
-                        <a:srgbClr val="BFBFBF"/>
-                      </a:solidFill>
-                      <a:prstDash val="solid"/>
-                      <a:round/>
-                      <a:headEnd type="none" w="med" len="med"/>
-                      <a:tailEnd type="none" w="med" len="med"/>
-                    </a:lnR>
-                    <a:lnT w="12700" cap="flat" cmpd="sng" algn="ctr">
-                      <a:solidFill>
-                        <a:srgbClr val="BFBFBF"/>
-                      </a:solidFill>
-                      <a:prstDash val="solid"/>
-                      <a:round/>
-                      <a:headEnd type="none" w="med" len="med"/>
-                      <a:tailEnd type="none" w="med" len="med"/>
-                    </a:lnT>
-                    <a:lnB w="12700" cap="flat" cmpd="sng" algn="ctr">
-                      <a:solidFill>
-                        <a:srgbClr val="BFBFBF"/>
-                      </a:solidFill>
-                      <a:prstDash val="solid"/>
-                      <a:round/>
-                      <a:headEnd type="none" w="med" len="med"/>
-                      <a:tailEnd type="none" w="med" len="med"/>
-                    </a:lnB>
-                  </a:tcPr>
-                </a:tc>
-                <a:tc gridSpan="2">
-                  <a:txBody>
-                    <a:bodyPr/>
-                    <a:lstStyle/>
-                    <a:p>
-                      <a:pPr algn="just">
-                        <a:lnSpc>
-                          <a:spcPct val="150000"/>
-                        </a:lnSpc>
-                        <a:spcAft>
-                          <a:spcPts val="800"/>
-                        </a:spcAft>
-                      </a:pPr>
-                      <a:r>
-                        <a:rPr lang="es-CL" sz="800" b="1">
-                          <a:effectLst/>
-                          <a:latin typeface="Calibri" panose="020F0502020204030204" pitchFamily="34" charset="0"/>
-                          <a:ea typeface="Calibri" panose="020F0502020204030204" pitchFamily="34" charset="0"/>
-                          <a:cs typeface="Times New Roman" panose="02020603050405020304" pitchFamily="18" charset="0"/>
-                        </a:rPr>
-                        <a:t> </a:t>
-                      </a:r>
-                      <a:endParaRPr lang="es-CL" sz="1100">
-                        <a:effectLst/>
-                        <a:latin typeface="Calibri" panose="020F0502020204030204" pitchFamily="34" charset="0"/>
-                        <a:ea typeface="Calibri" panose="020F0502020204030204" pitchFamily="34" charset="0"/>
-                        <a:cs typeface="Times New Roman" panose="02020603050405020304" pitchFamily="18" charset="0"/>
-                      </a:endParaRPr>
-                    </a:p>
-                  </a:txBody>
-                  <a:tcPr marL="68580" marR="68580" marT="0" marB="0">
-                    <a:lnL w="12700" cap="flat" cmpd="sng" algn="ctr">
-                      <a:solidFill>
-                        <a:srgbClr val="BFBFBF"/>
-                      </a:solidFill>
-                      <a:prstDash val="solid"/>
-                      <a:round/>
-                      <a:headEnd type="none" w="med" len="med"/>
-                      <a:tailEnd type="none" w="med" len="med"/>
-                    </a:lnL>
-                    <a:lnR w="12700" cap="flat" cmpd="sng" algn="ctr">
-                      <a:solidFill>
-                        <a:srgbClr val="BFBFBF"/>
-                      </a:solidFill>
-                      <a:prstDash val="solid"/>
-                      <a:round/>
-                      <a:headEnd type="none" w="med" len="med"/>
-                      <a:tailEnd type="none" w="med" len="med"/>
-                    </a:lnR>
-                    <a:lnT w="12700" cap="flat" cmpd="sng" algn="ctr">
-                      <a:solidFill>
-                        <a:srgbClr val="BFBFBF"/>
-                      </a:solidFill>
-                      <a:prstDash val="solid"/>
-                      <a:round/>
-                      <a:headEnd type="none" w="med" len="med"/>
-                      <a:tailEnd type="none" w="med" len="med"/>
-                    </a:lnT>
-                    <a:lnB w="12700" cap="flat" cmpd="sng" algn="ctr">
-                      <a:solidFill>
-                        <a:srgbClr val="BFBFBF"/>
-                      </a:solidFill>
-                      <a:prstDash val="solid"/>
-                      <a:round/>
-                      <a:headEnd type="none" w="med" len="med"/>
-                      <a:tailEnd type="none" w="med" len="med"/>
-                    </a:lnB>
-                  </a:tcPr>
-                </a:tc>
-                <a:tc hMerge="1">
-                  <a:txBody>
-                    <a:bodyPr/>
-                    <a:lstStyle/>
-                    <a:p>
-                      <a:endParaRPr lang="es-CL"/>
-                    </a:p>
-                  </a:txBody>
-                  <a:tcPr/>
-                </a:tc>
-                <a:tc>
-                  <a:txBody>
-                    <a:bodyPr/>
-                    <a:lstStyle/>
-                    <a:p>
-                      <a:pPr algn="just">
-                        <a:lnSpc>
-                          <a:spcPct val="150000"/>
-                        </a:lnSpc>
-                        <a:spcAft>
-                          <a:spcPts val="800"/>
-                        </a:spcAft>
-                      </a:pPr>
-                      <a:r>
-                        <a:rPr lang="es-CL" sz="800" b="1">
-                          <a:effectLst/>
-                          <a:latin typeface="Calibri" panose="020F0502020204030204" pitchFamily="34" charset="0"/>
-                          <a:ea typeface="Calibri" panose="020F0502020204030204" pitchFamily="34" charset="0"/>
-                          <a:cs typeface="Times New Roman" panose="02020603050405020304" pitchFamily="18" charset="0"/>
-                        </a:rPr>
-                        <a:t> </a:t>
-                      </a:r>
-                      <a:endParaRPr lang="es-CL" sz="1100">
-                        <a:effectLst/>
-                        <a:latin typeface="Calibri" panose="020F0502020204030204" pitchFamily="34" charset="0"/>
-                        <a:ea typeface="Calibri" panose="020F0502020204030204" pitchFamily="34" charset="0"/>
-                        <a:cs typeface="Times New Roman" panose="02020603050405020304" pitchFamily="18" charset="0"/>
-                      </a:endParaRPr>
                     </a:p>
                   </a:txBody>
                   <a:tcPr marL="68580" marR="68580" marT="0" marB="0">
@@ -12375,7 +12966,10 @@
                         </a:spcAft>
                       </a:pPr>
                       <a:r>
-                        <a:rPr lang="es-CL" sz="800" b="1">
+                        <a:rPr lang="es-CL" sz="800" b="1" kern="1200" dirty="0">
+                          <a:solidFill>
+                            <a:schemeClr val="tx1"/>
+                          </a:solidFill>
                           <a:effectLst/>
                           <a:latin typeface="Calibri" panose="020F0502020204030204" pitchFamily="34" charset="0"/>
                           <a:ea typeface="Calibri" panose="020F0502020204030204" pitchFamily="34" charset="0"/>
@@ -12383,12 +12977,1474 @@
                         </a:rPr>
                         <a:t> </a:t>
                       </a:r>
-                      <a:endParaRPr lang="es-CL" sz="1100">
+                    </a:p>
+                  </a:txBody>
+                  <a:tcPr marL="68580" marR="68580" marT="0" marB="0">
+                    <a:lnL w="12700" cap="flat" cmpd="sng" algn="ctr">
+                      <a:solidFill>
+                        <a:srgbClr val="BFBFBF"/>
+                      </a:solidFill>
+                      <a:prstDash val="solid"/>
+                      <a:round/>
+                      <a:headEnd type="none" w="med" len="med"/>
+                      <a:tailEnd type="none" w="med" len="med"/>
+                    </a:lnL>
+                    <a:lnR w="12700" cap="flat" cmpd="sng" algn="ctr">
+                      <a:solidFill>
+                        <a:srgbClr val="BFBFBF"/>
+                      </a:solidFill>
+                      <a:prstDash val="solid"/>
+                      <a:round/>
+                      <a:headEnd type="none" w="med" len="med"/>
+                      <a:tailEnd type="none" w="med" len="med"/>
+                    </a:lnR>
+                    <a:lnT w="12700" cap="flat" cmpd="sng" algn="ctr">
+                      <a:solidFill>
+                        <a:srgbClr val="BFBFBF"/>
+                      </a:solidFill>
+                      <a:prstDash val="solid"/>
+                      <a:round/>
+                      <a:headEnd type="none" w="med" len="med"/>
+                      <a:tailEnd type="none" w="med" len="med"/>
+                    </a:lnT>
+                    <a:lnB w="12700" cap="flat" cmpd="sng" algn="ctr">
+                      <a:solidFill>
+                        <a:srgbClr val="BFBFBF"/>
+                      </a:solidFill>
+                      <a:prstDash val="solid"/>
+                      <a:round/>
+                      <a:headEnd type="none" w="med" len="med"/>
+                      <a:tailEnd type="none" w="med" len="med"/>
+                    </a:lnB>
+                  </a:tcPr>
+                </a:tc>
+                <a:tc>
+                  <a:txBody>
+                    <a:bodyPr/>
+                    <a:lstStyle/>
+                    <a:p>
+                      <a:pPr algn="just">
+                        <a:lnSpc>
+                          <a:spcPct val="150000"/>
+                        </a:lnSpc>
+                        <a:spcAft>
+                          <a:spcPts val="800"/>
+                        </a:spcAft>
+                      </a:pPr>
+                      <a:r>
+                        <a:rPr lang="es-CL" sz="800" b="1" kern="1200">
+                          <a:solidFill>
+                            <a:schemeClr val="tx1"/>
+                          </a:solidFill>
+                          <a:effectLst/>
+                          <a:latin typeface="Calibri" panose="020F0502020204030204" pitchFamily="34" charset="0"/>
+                          <a:ea typeface="Calibri" panose="020F0502020204030204" pitchFamily="34" charset="0"/>
+                          <a:cs typeface="Times New Roman" panose="02020603050405020304" pitchFamily="18" charset="0"/>
+                        </a:rPr>
+                        <a:t> </a:t>
+                      </a:r>
+                    </a:p>
+                  </a:txBody>
+                  <a:tcPr marL="68580" marR="68580" marT="0" marB="0">
+                    <a:lnL w="12700" cap="flat" cmpd="sng" algn="ctr">
+                      <a:solidFill>
+                        <a:srgbClr val="BFBFBF"/>
+                      </a:solidFill>
+                      <a:prstDash val="solid"/>
+                      <a:round/>
+                      <a:headEnd type="none" w="med" len="med"/>
+                      <a:tailEnd type="none" w="med" len="med"/>
+                    </a:lnL>
+                    <a:lnR w="12700" cap="flat" cmpd="sng" algn="ctr">
+                      <a:solidFill>
+                        <a:srgbClr val="BFBFBF"/>
+                      </a:solidFill>
+                      <a:prstDash val="solid"/>
+                      <a:round/>
+                      <a:headEnd type="none" w="med" len="med"/>
+                      <a:tailEnd type="none" w="med" len="med"/>
+                    </a:lnR>
+                    <a:lnT w="12700" cap="flat" cmpd="sng" algn="ctr">
+                      <a:solidFill>
+                        <a:srgbClr val="BFBFBF"/>
+                      </a:solidFill>
+                      <a:prstDash val="solid"/>
+                      <a:round/>
+                      <a:headEnd type="none" w="med" len="med"/>
+                      <a:tailEnd type="none" w="med" len="med"/>
+                    </a:lnT>
+                    <a:lnB w="12700" cap="flat" cmpd="sng" algn="ctr">
+                      <a:solidFill>
+                        <a:srgbClr val="BFBFBF"/>
+                      </a:solidFill>
+                      <a:prstDash val="solid"/>
+                      <a:round/>
+                      <a:headEnd type="none" w="med" len="med"/>
+                      <a:tailEnd type="none" w="med" len="med"/>
+                    </a:lnB>
+                  </a:tcPr>
+                </a:tc>
+                <a:tc>
+                  <a:txBody>
+                    <a:bodyPr/>
+                    <a:lstStyle/>
+                    <a:p>
+                      <a:pPr algn="just">
+                        <a:lnSpc>
+                          <a:spcPct val="150000"/>
+                        </a:lnSpc>
+                        <a:spcAft>
+                          <a:spcPts val="800"/>
+                        </a:spcAft>
+                      </a:pPr>
+                      <a:r>
+                        <a:rPr lang="es-CL" sz="800" b="1" kern="1200" dirty="0">
+                          <a:solidFill>
+                            <a:schemeClr val="tx1"/>
+                          </a:solidFill>
+                          <a:effectLst/>
+                          <a:latin typeface="Calibri" panose="020F0502020204030204" pitchFamily="34" charset="0"/>
+                          <a:ea typeface="Calibri" panose="020F0502020204030204" pitchFamily="34" charset="0"/>
+                          <a:cs typeface="Times New Roman" panose="02020603050405020304" pitchFamily="18" charset="0"/>
+                        </a:rPr>
+                        <a:t> </a:t>
+                      </a:r>
+                    </a:p>
+                  </a:txBody>
+                  <a:tcPr marL="68580" marR="68580" marT="0" marB="0">
+                    <a:lnL w="12700" cap="flat" cmpd="sng" algn="ctr">
+                      <a:solidFill>
+                        <a:srgbClr val="BFBFBF"/>
+                      </a:solidFill>
+                      <a:prstDash val="solid"/>
+                      <a:round/>
+                      <a:headEnd type="none" w="med" len="med"/>
+                      <a:tailEnd type="none" w="med" len="med"/>
+                    </a:lnL>
+                    <a:lnR w="12700" cap="flat" cmpd="sng" algn="ctr">
+                      <a:solidFill>
+                        <a:srgbClr val="BFBFBF"/>
+                      </a:solidFill>
+                      <a:prstDash val="solid"/>
+                      <a:round/>
+                      <a:headEnd type="none" w="med" len="med"/>
+                      <a:tailEnd type="none" w="med" len="med"/>
+                    </a:lnR>
+                    <a:lnT w="12700" cap="flat" cmpd="sng" algn="ctr">
+                      <a:solidFill>
+                        <a:srgbClr val="BFBFBF"/>
+                      </a:solidFill>
+                      <a:prstDash val="solid"/>
+                      <a:round/>
+                      <a:headEnd type="none" w="med" len="med"/>
+                      <a:tailEnd type="none" w="med" len="med"/>
+                    </a:lnT>
+                    <a:lnB w="12700" cap="flat" cmpd="sng" algn="ctr">
+                      <a:solidFill>
+                        <a:srgbClr val="BFBFBF"/>
+                      </a:solidFill>
+                      <a:prstDash val="solid"/>
+                      <a:round/>
+                      <a:headEnd type="none" w="med" len="med"/>
+                      <a:tailEnd type="none" w="med" len="med"/>
+                    </a:lnB>
+                  </a:tcPr>
+                </a:tc>
+                <a:tc>
+                  <a:txBody>
+                    <a:bodyPr/>
+                    <a:lstStyle/>
+                    <a:p>
+                      <a:pPr marL="0" marR="0" lvl="0" indent="0" algn="ctr" defTabSz="914400" rtl="0" eaLnBrk="1" fontAlgn="auto" latinLnBrk="0" hangingPunct="1">
+                        <a:lnSpc>
+                          <a:spcPct val="150000"/>
+                        </a:lnSpc>
+                        <a:spcBef>
+                          <a:spcPts val="0"/>
+                        </a:spcBef>
+                        <a:spcAft>
+                          <a:spcPts val="800"/>
+                        </a:spcAft>
+                        <a:buClrTx/>
+                        <a:buSzTx/>
+                        <a:buFontTx/>
+                        <a:buNone/>
+                        <a:tabLst/>
+                        <a:defRPr/>
+                      </a:pPr>
+                      <a:endParaRPr kumimoji="0" lang="es-CL" sz="800" b="1" i="0" u="none" strike="noStrike" kern="1200" cap="none" spc="0" normalizeH="0" baseline="0" noProof="0" dirty="0">
+                        <a:ln>
+                          <a:noFill/>
+                        </a:ln>
+                        <a:solidFill>
+                          <a:prstClr val="black"/>
+                        </a:solidFill>
                         <a:effectLst/>
+                        <a:uLnTx/>
+                        <a:uFillTx/>
                         <a:latin typeface="Calibri" panose="020F0502020204030204" pitchFamily="34" charset="0"/>
                         <a:ea typeface="Calibri" panose="020F0502020204030204" pitchFamily="34" charset="0"/>
                         <a:cs typeface="Times New Roman" panose="02020603050405020304" pitchFamily="18" charset="0"/>
                       </a:endParaRPr>
+                    </a:p>
+                    <a:p>
+                      <a:pPr marL="0" marR="0" lvl="0" indent="0" algn="ctr" defTabSz="914400" rtl="0" eaLnBrk="1" fontAlgn="auto" latinLnBrk="0" hangingPunct="1">
+                        <a:lnSpc>
+                          <a:spcPct val="150000"/>
+                        </a:lnSpc>
+                        <a:spcBef>
+                          <a:spcPts val="0"/>
+                        </a:spcBef>
+                        <a:spcAft>
+                          <a:spcPts val="800"/>
+                        </a:spcAft>
+                        <a:buClrTx/>
+                        <a:buSzTx/>
+                        <a:buFontTx/>
+                        <a:buNone/>
+                        <a:tabLst/>
+                        <a:defRPr/>
+                      </a:pPr>
+                      <a:r>
+                        <a:rPr kumimoji="0" lang="es-CL" sz="800" b="1" i="0" u="none" strike="noStrike" kern="1200" cap="none" spc="0" normalizeH="0" baseline="0" noProof="0" dirty="0">
+                          <a:ln>
+                            <a:noFill/>
+                          </a:ln>
+                          <a:solidFill>
+                            <a:prstClr val="black"/>
+                          </a:solidFill>
+                          <a:effectLst/>
+                          <a:uLnTx/>
+                          <a:uFillTx/>
+                          <a:latin typeface="Calibri" panose="020F0502020204030204" pitchFamily="34" charset="0"/>
+                          <a:ea typeface="Calibri" panose="020F0502020204030204" pitchFamily="34" charset="0"/>
+                          <a:cs typeface="Times New Roman" panose="02020603050405020304" pitchFamily="18" charset="0"/>
+                        </a:rPr>
+                        <a:t>X</a:t>
+                      </a:r>
+                    </a:p>
+                  </a:txBody>
+                  <a:tcPr marL="68580" marR="68580" marT="0" marB="0">
+                    <a:lnL w="12700" cap="flat" cmpd="sng" algn="ctr">
+                      <a:solidFill>
+                        <a:srgbClr val="BFBFBF"/>
+                      </a:solidFill>
+                      <a:prstDash val="solid"/>
+                      <a:round/>
+                      <a:headEnd type="none" w="med" len="med"/>
+                      <a:tailEnd type="none" w="med" len="med"/>
+                    </a:lnL>
+                    <a:lnR w="12700" cap="flat" cmpd="sng" algn="ctr">
+                      <a:solidFill>
+                        <a:srgbClr val="BFBFBF"/>
+                      </a:solidFill>
+                      <a:prstDash val="solid"/>
+                      <a:round/>
+                      <a:headEnd type="none" w="med" len="med"/>
+                      <a:tailEnd type="none" w="med" len="med"/>
+                    </a:lnR>
+                    <a:lnT w="12700" cap="flat" cmpd="sng" algn="ctr">
+                      <a:solidFill>
+                        <a:srgbClr val="BFBFBF"/>
+                      </a:solidFill>
+                      <a:prstDash val="solid"/>
+                      <a:round/>
+                      <a:headEnd type="none" w="med" len="med"/>
+                      <a:tailEnd type="none" w="med" len="med"/>
+                    </a:lnT>
+                    <a:lnB w="12700" cap="flat" cmpd="sng" algn="ctr">
+                      <a:solidFill>
+                        <a:srgbClr val="BFBFBF"/>
+                      </a:solidFill>
+                      <a:prstDash val="solid"/>
+                      <a:round/>
+                      <a:headEnd type="none" w="med" len="med"/>
+                      <a:tailEnd type="none" w="med" len="med"/>
+                    </a:lnB>
+                  </a:tcPr>
+                </a:tc>
+                <a:tc>
+                  <a:txBody>
+                    <a:bodyPr/>
+                    <a:lstStyle/>
+                    <a:p>
+                      <a:pPr marL="0" marR="0" lvl="0" indent="0" algn="ctr" defTabSz="914400" rtl="0" eaLnBrk="1" fontAlgn="auto" latinLnBrk="0" hangingPunct="1">
+                        <a:lnSpc>
+                          <a:spcPct val="150000"/>
+                        </a:lnSpc>
+                        <a:spcBef>
+                          <a:spcPts val="0"/>
+                        </a:spcBef>
+                        <a:spcAft>
+                          <a:spcPts val="800"/>
+                        </a:spcAft>
+                        <a:buClrTx/>
+                        <a:buSzTx/>
+                        <a:buFontTx/>
+                        <a:buNone/>
+                        <a:tabLst/>
+                        <a:defRPr/>
+                      </a:pPr>
+                      <a:endParaRPr kumimoji="0" lang="es-CL" sz="800" b="1" i="0" u="none" strike="noStrike" kern="1200" cap="none" spc="0" normalizeH="0" baseline="0" noProof="0" dirty="0">
+                        <a:ln>
+                          <a:noFill/>
+                        </a:ln>
+                        <a:solidFill>
+                          <a:prstClr val="black"/>
+                        </a:solidFill>
+                        <a:effectLst/>
+                        <a:uLnTx/>
+                        <a:uFillTx/>
+                        <a:latin typeface="Calibri" panose="020F0502020204030204" pitchFamily="34" charset="0"/>
+                        <a:ea typeface="Calibri" panose="020F0502020204030204" pitchFamily="34" charset="0"/>
+                        <a:cs typeface="Times New Roman" panose="02020603050405020304" pitchFamily="18" charset="0"/>
+                      </a:endParaRPr>
+                    </a:p>
+                    <a:p>
+                      <a:pPr marL="0" marR="0" lvl="0" indent="0" algn="ctr" defTabSz="914400" rtl="0" eaLnBrk="1" fontAlgn="auto" latinLnBrk="0" hangingPunct="1">
+                        <a:lnSpc>
+                          <a:spcPct val="150000"/>
+                        </a:lnSpc>
+                        <a:spcBef>
+                          <a:spcPts val="0"/>
+                        </a:spcBef>
+                        <a:spcAft>
+                          <a:spcPts val="800"/>
+                        </a:spcAft>
+                        <a:buClrTx/>
+                        <a:buSzTx/>
+                        <a:buFontTx/>
+                        <a:buNone/>
+                        <a:tabLst/>
+                        <a:defRPr/>
+                      </a:pPr>
+                      <a:r>
+                        <a:rPr kumimoji="0" lang="es-CL" sz="800" b="1" i="0" u="none" strike="noStrike" kern="1200" cap="none" spc="0" normalizeH="0" baseline="0" noProof="0" dirty="0">
+                          <a:ln>
+                            <a:noFill/>
+                          </a:ln>
+                          <a:solidFill>
+                            <a:prstClr val="black"/>
+                          </a:solidFill>
+                          <a:effectLst/>
+                          <a:uLnTx/>
+                          <a:uFillTx/>
+                          <a:latin typeface="Calibri" panose="020F0502020204030204" pitchFamily="34" charset="0"/>
+                          <a:ea typeface="Calibri" panose="020F0502020204030204" pitchFamily="34" charset="0"/>
+                          <a:cs typeface="Times New Roman" panose="02020603050405020304" pitchFamily="18" charset="0"/>
+                        </a:rPr>
+                        <a:t>X</a:t>
+                      </a:r>
+                    </a:p>
+                  </a:txBody>
+                  <a:tcPr marL="68580" marR="68580" marT="0" marB="0">
+                    <a:lnL w="12700" cap="flat" cmpd="sng" algn="ctr">
+                      <a:solidFill>
+                        <a:srgbClr val="BFBFBF"/>
+                      </a:solidFill>
+                      <a:prstDash val="solid"/>
+                      <a:round/>
+                      <a:headEnd type="none" w="med" len="med"/>
+                      <a:tailEnd type="none" w="med" len="med"/>
+                    </a:lnL>
+                    <a:lnR w="12700" cap="flat" cmpd="sng" algn="ctr">
+                      <a:solidFill>
+                        <a:srgbClr val="BFBFBF"/>
+                      </a:solidFill>
+                      <a:prstDash val="solid"/>
+                      <a:round/>
+                      <a:headEnd type="none" w="med" len="med"/>
+                      <a:tailEnd type="none" w="med" len="med"/>
+                    </a:lnR>
+                    <a:lnT w="12700" cap="flat" cmpd="sng" algn="ctr">
+                      <a:solidFill>
+                        <a:srgbClr val="BFBFBF"/>
+                      </a:solidFill>
+                      <a:prstDash val="solid"/>
+                      <a:round/>
+                      <a:headEnd type="none" w="med" len="med"/>
+                      <a:tailEnd type="none" w="med" len="med"/>
+                    </a:lnT>
+                    <a:lnB w="12700" cap="flat" cmpd="sng" algn="ctr">
+                      <a:solidFill>
+                        <a:srgbClr val="BFBFBF"/>
+                      </a:solidFill>
+                      <a:prstDash val="solid"/>
+                      <a:round/>
+                      <a:headEnd type="none" w="med" len="med"/>
+                      <a:tailEnd type="none" w="med" len="med"/>
+                    </a:lnB>
+                  </a:tcPr>
+                </a:tc>
+                <a:tc>
+                  <a:txBody>
+                    <a:bodyPr/>
+                    <a:lstStyle/>
+                    <a:p>
+                      <a:pPr marL="0" marR="0" lvl="0" indent="0" algn="ctr" defTabSz="914400" rtl="0" eaLnBrk="1" fontAlgn="auto" latinLnBrk="0" hangingPunct="1">
+                        <a:lnSpc>
+                          <a:spcPct val="150000"/>
+                        </a:lnSpc>
+                        <a:spcBef>
+                          <a:spcPts val="0"/>
+                        </a:spcBef>
+                        <a:spcAft>
+                          <a:spcPts val="800"/>
+                        </a:spcAft>
+                        <a:buClrTx/>
+                        <a:buSzTx/>
+                        <a:buFontTx/>
+                        <a:buNone/>
+                        <a:tabLst/>
+                        <a:defRPr/>
+                      </a:pPr>
+                      <a:endParaRPr kumimoji="0" lang="es-CL" sz="800" b="1" i="0" u="none" strike="noStrike" kern="1200" cap="none" spc="0" normalizeH="0" baseline="0" noProof="0" dirty="0">
+                        <a:ln>
+                          <a:noFill/>
+                        </a:ln>
+                        <a:solidFill>
+                          <a:prstClr val="black"/>
+                        </a:solidFill>
+                        <a:effectLst/>
+                        <a:uLnTx/>
+                        <a:uFillTx/>
+                        <a:latin typeface="Calibri" panose="020F0502020204030204" pitchFamily="34" charset="0"/>
+                        <a:ea typeface="Calibri" panose="020F0502020204030204" pitchFamily="34" charset="0"/>
+                        <a:cs typeface="Times New Roman" panose="02020603050405020304" pitchFamily="18" charset="0"/>
+                      </a:endParaRPr>
+                    </a:p>
+                    <a:p>
+                      <a:pPr marL="0" marR="0" lvl="0" indent="0" algn="ctr" defTabSz="914400" rtl="0" eaLnBrk="1" fontAlgn="auto" latinLnBrk="0" hangingPunct="1">
+                        <a:lnSpc>
+                          <a:spcPct val="150000"/>
+                        </a:lnSpc>
+                        <a:spcBef>
+                          <a:spcPts val="0"/>
+                        </a:spcBef>
+                        <a:spcAft>
+                          <a:spcPts val="800"/>
+                        </a:spcAft>
+                        <a:buClrTx/>
+                        <a:buSzTx/>
+                        <a:buFontTx/>
+                        <a:buNone/>
+                        <a:tabLst/>
+                        <a:defRPr/>
+                      </a:pPr>
+                      <a:r>
+                        <a:rPr kumimoji="0" lang="es-CL" sz="800" b="1" i="0" u="none" strike="noStrike" kern="1200" cap="none" spc="0" normalizeH="0" baseline="0" noProof="0" dirty="0">
+                          <a:ln>
+                            <a:noFill/>
+                          </a:ln>
+                          <a:solidFill>
+                            <a:prstClr val="black"/>
+                          </a:solidFill>
+                          <a:effectLst/>
+                          <a:uLnTx/>
+                          <a:uFillTx/>
+                          <a:latin typeface="Calibri" panose="020F0502020204030204" pitchFamily="34" charset="0"/>
+                          <a:ea typeface="Calibri" panose="020F0502020204030204" pitchFamily="34" charset="0"/>
+                          <a:cs typeface="Times New Roman" panose="02020603050405020304" pitchFamily="18" charset="0"/>
+                        </a:rPr>
+                        <a:t>X</a:t>
+                      </a:r>
+                    </a:p>
+                  </a:txBody>
+                  <a:tcPr marL="68580" marR="68580" marT="0" marB="0">
+                    <a:lnL w="12700" cap="flat" cmpd="sng" algn="ctr">
+                      <a:solidFill>
+                        <a:srgbClr val="BFBFBF"/>
+                      </a:solidFill>
+                      <a:prstDash val="solid"/>
+                      <a:round/>
+                      <a:headEnd type="none" w="med" len="med"/>
+                      <a:tailEnd type="none" w="med" len="med"/>
+                    </a:lnL>
+                    <a:lnR w="12700" cap="flat" cmpd="sng" algn="ctr">
+                      <a:solidFill>
+                        <a:srgbClr val="BFBFBF"/>
+                      </a:solidFill>
+                      <a:prstDash val="solid"/>
+                      <a:round/>
+                      <a:headEnd type="none" w="med" len="med"/>
+                      <a:tailEnd type="none" w="med" len="med"/>
+                    </a:lnR>
+                    <a:lnT w="12700" cap="flat" cmpd="sng" algn="ctr">
+                      <a:solidFill>
+                        <a:srgbClr val="BFBFBF"/>
+                      </a:solidFill>
+                      <a:prstDash val="solid"/>
+                      <a:round/>
+                      <a:headEnd type="none" w="med" len="med"/>
+                      <a:tailEnd type="none" w="med" len="med"/>
+                    </a:lnT>
+                    <a:lnB w="12700" cap="flat" cmpd="sng" algn="ctr">
+                      <a:solidFill>
+                        <a:srgbClr val="BFBFBF"/>
+                      </a:solidFill>
+                      <a:prstDash val="solid"/>
+                      <a:round/>
+                      <a:headEnd type="none" w="med" len="med"/>
+                      <a:tailEnd type="none" w="med" len="med"/>
+                    </a:lnB>
+                  </a:tcPr>
+                </a:tc>
+                <a:tc>
+                  <a:txBody>
+                    <a:bodyPr/>
+                    <a:lstStyle/>
+                    <a:p>
+                      <a:pPr marL="0" marR="0" lvl="0" indent="0" algn="ctr" defTabSz="914400" rtl="0" eaLnBrk="1" fontAlgn="auto" latinLnBrk="0" hangingPunct="1">
+                        <a:lnSpc>
+                          <a:spcPct val="150000"/>
+                        </a:lnSpc>
+                        <a:spcBef>
+                          <a:spcPts val="0"/>
+                        </a:spcBef>
+                        <a:spcAft>
+                          <a:spcPts val="800"/>
+                        </a:spcAft>
+                        <a:buClrTx/>
+                        <a:buSzTx/>
+                        <a:buFontTx/>
+                        <a:buNone/>
+                        <a:tabLst/>
+                        <a:defRPr/>
+                      </a:pPr>
+                      <a:endParaRPr kumimoji="0" lang="es-CL" sz="800" b="1" i="0" u="none" strike="noStrike" kern="1200" cap="none" spc="0" normalizeH="0" baseline="0" noProof="0" dirty="0">
+                        <a:ln>
+                          <a:noFill/>
+                        </a:ln>
+                        <a:solidFill>
+                          <a:prstClr val="black"/>
+                        </a:solidFill>
+                        <a:effectLst/>
+                        <a:uLnTx/>
+                        <a:uFillTx/>
+                        <a:latin typeface="Calibri" panose="020F0502020204030204" pitchFamily="34" charset="0"/>
+                        <a:ea typeface="Calibri" panose="020F0502020204030204" pitchFamily="34" charset="0"/>
+                        <a:cs typeface="Times New Roman" panose="02020603050405020304" pitchFamily="18" charset="0"/>
+                      </a:endParaRPr>
+                    </a:p>
+                    <a:p>
+                      <a:pPr marL="0" marR="0" lvl="0" indent="0" algn="ctr" defTabSz="914400" rtl="0" eaLnBrk="1" fontAlgn="auto" latinLnBrk="0" hangingPunct="1">
+                        <a:lnSpc>
+                          <a:spcPct val="150000"/>
+                        </a:lnSpc>
+                        <a:spcBef>
+                          <a:spcPts val="0"/>
+                        </a:spcBef>
+                        <a:spcAft>
+                          <a:spcPts val="800"/>
+                        </a:spcAft>
+                        <a:buClrTx/>
+                        <a:buSzTx/>
+                        <a:buFontTx/>
+                        <a:buNone/>
+                        <a:tabLst/>
+                        <a:defRPr/>
+                      </a:pPr>
+                      <a:r>
+                        <a:rPr kumimoji="0" lang="es-CL" sz="800" b="1" i="0" u="none" strike="noStrike" kern="1200" cap="none" spc="0" normalizeH="0" baseline="0" noProof="0" dirty="0">
+                          <a:ln>
+                            <a:noFill/>
+                          </a:ln>
+                          <a:solidFill>
+                            <a:prstClr val="black"/>
+                          </a:solidFill>
+                          <a:effectLst/>
+                          <a:uLnTx/>
+                          <a:uFillTx/>
+                          <a:latin typeface="Calibri" panose="020F0502020204030204" pitchFamily="34" charset="0"/>
+                          <a:ea typeface="Calibri" panose="020F0502020204030204" pitchFamily="34" charset="0"/>
+                          <a:cs typeface="Times New Roman" panose="02020603050405020304" pitchFamily="18" charset="0"/>
+                        </a:rPr>
+                        <a:t>X</a:t>
+                      </a:r>
+                    </a:p>
+                  </a:txBody>
+                  <a:tcPr marL="68580" marR="68580" marT="0" marB="0">
+                    <a:lnL w="12700" cap="flat" cmpd="sng" algn="ctr">
+                      <a:solidFill>
+                        <a:srgbClr val="BFBFBF"/>
+                      </a:solidFill>
+                      <a:prstDash val="solid"/>
+                      <a:round/>
+                      <a:headEnd type="none" w="med" len="med"/>
+                      <a:tailEnd type="none" w="med" len="med"/>
+                    </a:lnL>
+                    <a:lnR w="12700" cap="flat" cmpd="sng" algn="ctr">
+                      <a:solidFill>
+                        <a:srgbClr val="BFBFBF"/>
+                      </a:solidFill>
+                      <a:prstDash val="solid"/>
+                      <a:round/>
+                      <a:headEnd type="none" w="med" len="med"/>
+                      <a:tailEnd type="none" w="med" len="med"/>
+                    </a:lnR>
+                    <a:lnT w="12700" cap="flat" cmpd="sng" algn="ctr">
+                      <a:solidFill>
+                        <a:srgbClr val="BFBFBF"/>
+                      </a:solidFill>
+                      <a:prstDash val="solid"/>
+                      <a:round/>
+                      <a:headEnd type="none" w="med" len="med"/>
+                      <a:tailEnd type="none" w="med" len="med"/>
+                    </a:lnT>
+                    <a:lnB w="12700" cap="flat" cmpd="sng" algn="ctr">
+                      <a:solidFill>
+                        <a:srgbClr val="BFBFBF"/>
+                      </a:solidFill>
+                      <a:prstDash val="solid"/>
+                      <a:round/>
+                      <a:headEnd type="none" w="med" len="med"/>
+                      <a:tailEnd type="none" w="med" len="med"/>
+                    </a:lnB>
+                  </a:tcPr>
+                </a:tc>
+                <a:tc>
+                  <a:txBody>
+                    <a:bodyPr/>
+                    <a:lstStyle/>
+                    <a:p>
+                      <a:pPr marL="0" marR="0" lvl="0" indent="0" algn="ctr" defTabSz="914400" rtl="0" eaLnBrk="1" fontAlgn="auto" latinLnBrk="0" hangingPunct="1">
+                        <a:lnSpc>
+                          <a:spcPct val="150000"/>
+                        </a:lnSpc>
+                        <a:spcBef>
+                          <a:spcPts val="0"/>
+                        </a:spcBef>
+                        <a:spcAft>
+                          <a:spcPts val="800"/>
+                        </a:spcAft>
+                        <a:buClrTx/>
+                        <a:buSzTx/>
+                        <a:buFontTx/>
+                        <a:buNone/>
+                        <a:tabLst/>
+                        <a:defRPr/>
+                      </a:pPr>
+                      <a:endParaRPr kumimoji="0" lang="es-CL" sz="800" b="1" i="0" u="none" strike="noStrike" kern="1200" cap="none" spc="0" normalizeH="0" baseline="0" noProof="0" dirty="0">
+                        <a:ln>
+                          <a:noFill/>
+                        </a:ln>
+                        <a:solidFill>
+                          <a:prstClr val="black"/>
+                        </a:solidFill>
+                        <a:effectLst/>
+                        <a:uLnTx/>
+                        <a:uFillTx/>
+                        <a:latin typeface="Calibri" panose="020F0502020204030204" pitchFamily="34" charset="0"/>
+                        <a:ea typeface="Calibri" panose="020F0502020204030204" pitchFamily="34" charset="0"/>
+                        <a:cs typeface="Times New Roman" panose="02020603050405020304" pitchFamily="18" charset="0"/>
+                      </a:endParaRPr>
+                    </a:p>
+                    <a:p>
+                      <a:pPr marL="0" marR="0" lvl="0" indent="0" algn="ctr" defTabSz="914400" rtl="0" eaLnBrk="1" fontAlgn="auto" latinLnBrk="0" hangingPunct="1">
+                        <a:lnSpc>
+                          <a:spcPct val="150000"/>
+                        </a:lnSpc>
+                        <a:spcBef>
+                          <a:spcPts val="0"/>
+                        </a:spcBef>
+                        <a:spcAft>
+                          <a:spcPts val="800"/>
+                        </a:spcAft>
+                        <a:buClrTx/>
+                        <a:buSzTx/>
+                        <a:buFontTx/>
+                        <a:buNone/>
+                        <a:tabLst/>
+                        <a:defRPr/>
+                      </a:pPr>
+                      <a:r>
+                        <a:rPr kumimoji="0" lang="es-CL" sz="800" b="1" i="0" u="none" strike="noStrike" kern="1200" cap="none" spc="0" normalizeH="0" baseline="0" noProof="0" dirty="0">
+                          <a:ln>
+                            <a:noFill/>
+                          </a:ln>
+                          <a:solidFill>
+                            <a:prstClr val="black"/>
+                          </a:solidFill>
+                          <a:effectLst/>
+                          <a:uLnTx/>
+                          <a:uFillTx/>
+                          <a:latin typeface="Calibri" panose="020F0502020204030204" pitchFamily="34" charset="0"/>
+                          <a:ea typeface="Calibri" panose="020F0502020204030204" pitchFamily="34" charset="0"/>
+                          <a:cs typeface="Times New Roman" panose="02020603050405020304" pitchFamily="18" charset="0"/>
+                        </a:rPr>
+                        <a:t>X</a:t>
+                      </a:r>
+                    </a:p>
+                  </a:txBody>
+                  <a:tcPr marL="68580" marR="68580" marT="0" marB="0">
+                    <a:lnL w="12700" cap="flat" cmpd="sng" algn="ctr">
+                      <a:solidFill>
+                        <a:srgbClr val="BFBFBF"/>
+                      </a:solidFill>
+                      <a:prstDash val="solid"/>
+                      <a:round/>
+                      <a:headEnd type="none" w="med" len="med"/>
+                      <a:tailEnd type="none" w="med" len="med"/>
+                    </a:lnL>
+                    <a:lnR w="12700" cap="flat" cmpd="sng" algn="ctr">
+                      <a:solidFill>
+                        <a:srgbClr val="BFBFBF"/>
+                      </a:solidFill>
+                      <a:prstDash val="solid"/>
+                      <a:round/>
+                      <a:headEnd type="none" w="med" len="med"/>
+                      <a:tailEnd type="none" w="med" len="med"/>
+                    </a:lnR>
+                    <a:lnT w="12700" cap="flat" cmpd="sng" algn="ctr">
+                      <a:solidFill>
+                        <a:srgbClr val="BFBFBF"/>
+                      </a:solidFill>
+                      <a:prstDash val="solid"/>
+                      <a:round/>
+                      <a:headEnd type="none" w="med" len="med"/>
+                      <a:tailEnd type="none" w="med" len="med"/>
+                    </a:lnT>
+                    <a:lnB w="12700" cap="flat" cmpd="sng" algn="ctr">
+                      <a:solidFill>
+                        <a:srgbClr val="BFBFBF"/>
+                      </a:solidFill>
+                      <a:prstDash val="solid"/>
+                      <a:round/>
+                      <a:headEnd type="none" w="med" len="med"/>
+                      <a:tailEnd type="none" w="med" len="med"/>
+                    </a:lnB>
+                  </a:tcPr>
+                </a:tc>
+                <a:tc>
+                  <a:txBody>
+                    <a:bodyPr/>
+                    <a:lstStyle/>
+                    <a:p>
+                      <a:pPr marL="0" marR="0" lvl="0" indent="0" algn="ctr" defTabSz="914400" rtl="0" eaLnBrk="1" fontAlgn="auto" latinLnBrk="0" hangingPunct="1">
+                        <a:lnSpc>
+                          <a:spcPct val="150000"/>
+                        </a:lnSpc>
+                        <a:spcBef>
+                          <a:spcPts val="0"/>
+                        </a:spcBef>
+                        <a:spcAft>
+                          <a:spcPts val="800"/>
+                        </a:spcAft>
+                        <a:buClrTx/>
+                        <a:buSzTx/>
+                        <a:buFontTx/>
+                        <a:buNone/>
+                        <a:tabLst/>
+                        <a:defRPr/>
+                      </a:pPr>
+                      <a:endParaRPr kumimoji="0" lang="es-CL" sz="800" b="1" i="0" u="none" strike="noStrike" kern="1200" cap="none" spc="0" normalizeH="0" baseline="0" noProof="0" dirty="0">
+                        <a:ln>
+                          <a:noFill/>
+                        </a:ln>
+                        <a:solidFill>
+                          <a:prstClr val="black"/>
+                        </a:solidFill>
+                        <a:effectLst/>
+                        <a:uLnTx/>
+                        <a:uFillTx/>
+                        <a:latin typeface="Calibri" panose="020F0502020204030204" pitchFamily="34" charset="0"/>
+                        <a:ea typeface="Calibri" panose="020F0502020204030204" pitchFamily="34" charset="0"/>
+                        <a:cs typeface="Times New Roman" panose="02020603050405020304" pitchFamily="18" charset="0"/>
+                      </a:endParaRPr>
+                    </a:p>
+                    <a:p>
+                      <a:pPr marL="0" marR="0" lvl="0" indent="0" algn="ctr" defTabSz="914400" rtl="0" eaLnBrk="1" fontAlgn="auto" latinLnBrk="0" hangingPunct="1">
+                        <a:lnSpc>
+                          <a:spcPct val="150000"/>
+                        </a:lnSpc>
+                        <a:spcBef>
+                          <a:spcPts val="0"/>
+                        </a:spcBef>
+                        <a:spcAft>
+                          <a:spcPts val="800"/>
+                        </a:spcAft>
+                        <a:buClrTx/>
+                        <a:buSzTx/>
+                        <a:buFontTx/>
+                        <a:buNone/>
+                        <a:tabLst/>
+                        <a:defRPr/>
+                      </a:pPr>
+                      <a:r>
+                        <a:rPr kumimoji="0" lang="es-CL" sz="800" b="1" i="0" u="none" strike="noStrike" kern="1200" cap="none" spc="0" normalizeH="0" baseline="0" noProof="0" dirty="0">
+                          <a:ln>
+                            <a:noFill/>
+                          </a:ln>
+                          <a:solidFill>
+                            <a:prstClr val="black"/>
+                          </a:solidFill>
+                          <a:effectLst/>
+                          <a:uLnTx/>
+                          <a:uFillTx/>
+                          <a:latin typeface="Calibri" panose="020F0502020204030204" pitchFamily="34" charset="0"/>
+                          <a:ea typeface="Calibri" panose="020F0502020204030204" pitchFamily="34" charset="0"/>
+                          <a:cs typeface="Times New Roman" panose="02020603050405020304" pitchFamily="18" charset="0"/>
+                        </a:rPr>
+                        <a:t>X</a:t>
+                      </a:r>
+                    </a:p>
+                  </a:txBody>
+                  <a:tcPr marL="68580" marR="68580" marT="0" marB="0">
+                    <a:lnL w="12700" cap="flat" cmpd="sng" algn="ctr">
+                      <a:solidFill>
+                        <a:srgbClr val="BFBFBF"/>
+                      </a:solidFill>
+                      <a:prstDash val="solid"/>
+                      <a:round/>
+                      <a:headEnd type="none" w="med" len="med"/>
+                      <a:tailEnd type="none" w="med" len="med"/>
+                    </a:lnL>
+                    <a:lnR w="12700" cap="flat" cmpd="sng" algn="ctr">
+                      <a:solidFill>
+                        <a:srgbClr val="BFBFBF"/>
+                      </a:solidFill>
+                      <a:prstDash val="solid"/>
+                      <a:round/>
+                      <a:headEnd type="none" w="med" len="med"/>
+                      <a:tailEnd type="none" w="med" len="med"/>
+                    </a:lnR>
+                    <a:lnT w="12700" cap="flat" cmpd="sng" algn="ctr">
+                      <a:solidFill>
+                        <a:srgbClr val="BFBFBF"/>
+                      </a:solidFill>
+                      <a:prstDash val="solid"/>
+                      <a:round/>
+                      <a:headEnd type="none" w="med" len="med"/>
+                      <a:tailEnd type="none" w="med" len="med"/>
+                    </a:lnT>
+                    <a:lnB w="12700" cap="flat" cmpd="sng" algn="ctr">
+                      <a:solidFill>
+                        <a:srgbClr val="BFBFBF"/>
+                      </a:solidFill>
+                      <a:prstDash val="solid"/>
+                      <a:round/>
+                      <a:headEnd type="none" w="med" len="med"/>
+                      <a:tailEnd type="none" w="med" len="med"/>
+                    </a:lnB>
+                  </a:tcPr>
+                </a:tc>
+                <a:tc>
+                  <a:txBody>
+                    <a:bodyPr/>
+                    <a:lstStyle/>
+                    <a:p>
+                      <a:pPr marL="0" marR="0" lvl="0" indent="0" algn="ctr" defTabSz="914400" rtl="0" eaLnBrk="1" fontAlgn="auto" latinLnBrk="0" hangingPunct="1">
+                        <a:lnSpc>
+                          <a:spcPct val="150000"/>
+                        </a:lnSpc>
+                        <a:spcBef>
+                          <a:spcPts val="0"/>
+                        </a:spcBef>
+                        <a:spcAft>
+                          <a:spcPts val="800"/>
+                        </a:spcAft>
+                        <a:buClrTx/>
+                        <a:buSzTx/>
+                        <a:buFontTx/>
+                        <a:buNone/>
+                        <a:tabLst/>
+                        <a:defRPr/>
+                      </a:pPr>
+                      <a:endParaRPr kumimoji="0" lang="es-CL" sz="800" b="1" i="0" u="none" strike="noStrike" kern="1200" cap="none" spc="0" normalizeH="0" baseline="0" noProof="0" dirty="0">
+                        <a:ln>
+                          <a:noFill/>
+                        </a:ln>
+                        <a:solidFill>
+                          <a:prstClr val="black"/>
+                        </a:solidFill>
+                        <a:effectLst/>
+                        <a:uLnTx/>
+                        <a:uFillTx/>
+                        <a:latin typeface="Calibri" panose="020F0502020204030204" pitchFamily="34" charset="0"/>
+                        <a:ea typeface="Calibri" panose="020F0502020204030204" pitchFamily="34" charset="0"/>
+                        <a:cs typeface="Times New Roman" panose="02020603050405020304" pitchFamily="18" charset="0"/>
+                      </a:endParaRPr>
+                    </a:p>
+                    <a:p>
+                      <a:pPr marL="0" marR="0" lvl="0" indent="0" algn="ctr" defTabSz="914400" rtl="0" eaLnBrk="1" fontAlgn="auto" latinLnBrk="0" hangingPunct="1">
+                        <a:lnSpc>
+                          <a:spcPct val="150000"/>
+                        </a:lnSpc>
+                        <a:spcBef>
+                          <a:spcPts val="0"/>
+                        </a:spcBef>
+                        <a:spcAft>
+                          <a:spcPts val="800"/>
+                        </a:spcAft>
+                        <a:buClrTx/>
+                        <a:buSzTx/>
+                        <a:buFontTx/>
+                        <a:buNone/>
+                        <a:tabLst/>
+                        <a:defRPr/>
+                      </a:pPr>
+                      <a:r>
+                        <a:rPr kumimoji="0" lang="es-CL" sz="800" b="1" i="0" u="none" strike="noStrike" kern="1200" cap="none" spc="0" normalizeH="0" baseline="0" noProof="0" dirty="0">
+                          <a:ln>
+                            <a:noFill/>
+                          </a:ln>
+                          <a:solidFill>
+                            <a:prstClr val="black"/>
+                          </a:solidFill>
+                          <a:effectLst/>
+                          <a:uLnTx/>
+                          <a:uFillTx/>
+                          <a:latin typeface="Calibri" panose="020F0502020204030204" pitchFamily="34" charset="0"/>
+                          <a:ea typeface="Calibri" panose="020F0502020204030204" pitchFamily="34" charset="0"/>
+                          <a:cs typeface="Times New Roman" panose="02020603050405020304" pitchFamily="18" charset="0"/>
+                        </a:rPr>
+                        <a:t>X</a:t>
+                      </a:r>
+                    </a:p>
+                  </a:txBody>
+                  <a:tcPr marL="68580" marR="68580" marT="0" marB="0">
+                    <a:lnL w="12700" cap="flat" cmpd="sng" algn="ctr">
+                      <a:solidFill>
+                        <a:srgbClr val="BFBFBF"/>
+                      </a:solidFill>
+                      <a:prstDash val="solid"/>
+                      <a:round/>
+                      <a:headEnd type="none" w="med" len="med"/>
+                      <a:tailEnd type="none" w="med" len="med"/>
+                    </a:lnL>
+                    <a:lnR w="12700" cap="flat" cmpd="sng" algn="ctr">
+                      <a:solidFill>
+                        <a:srgbClr val="BFBFBF"/>
+                      </a:solidFill>
+                      <a:prstDash val="solid"/>
+                      <a:round/>
+                      <a:headEnd type="none" w="med" len="med"/>
+                      <a:tailEnd type="none" w="med" len="med"/>
+                    </a:lnR>
+                    <a:lnT w="12700" cap="flat" cmpd="sng" algn="ctr">
+                      <a:solidFill>
+                        <a:srgbClr val="BFBFBF"/>
+                      </a:solidFill>
+                      <a:prstDash val="solid"/>
+                      <a:round/>
+                      <a:headEnd type="none" w="med" len="med"/>
+                      <a:tailEnd type="none" w="med" len="med"/>
+                    </a:lnT>
+                    <a:lnB w="12700" cap="flat" cmpd="sng" algn="ctr">
+                      <a:solidFill>
+                        <a:srgbClr val="BFBFBF"/>
+                      </a:solidFill>
+                      <a:prstDash val="solid"/>
+                      <a:round/>
+                      <a:headEnd type="none" w="med" len="med"/>
+                      <a:tailEnd type="none" w="med" len="med"/>
+                    </a:lnB>
+                  </a:tcPr>
+                </a:tc>
+                <a:tc>
+                  <a:txBody>
+                    <a:bodyPr/>
+                    <a:lstStyle/>
+                    <a:p>
+                      <a:pPr marL="0" marR="0" lvl="0" indent="0" algn="ctr" defTabSz="914400" rtl="0" eaLnBrk="1" fontAlgn="auto" latinLnBrk="0" hangingPunct="1">
+                        <a:lnSpc>
+                          <a:spcPct val="150000"/>
+                        </a:lnSpc>
+                        <a:spcBef>
+                          <a:spcPts val="0"/>
+                        </a:spcBef>
+                        <a:spcAft>
+                          <a:spcPts val="800"/>
+                        </a:spcAft>
+                        <a:buClrTx/>
+                        <a:buSzTx/>
+                        <a:buFontTx/>
+                        <a:buNone/>
+                        <a:tabLst/>
+                        <a:defRPr/>
+                      </a:pPr>
+                      <a:endParaRPr kumimoji="0" lang="es-CL" sz="800" b="1" i="0" u="none" strike="noStrike" kern="1200" cap="none" spc="0" normalizeH="0" baseline="0" noProof="0" dirty="0">
+                        <a:ln>
+                          <a:noFill/>
+                        </a:ln>
+                        <a:solidFill>
+                          <a:prstClr val="black"/>
+                        </a:solidFill>
+                        <a:effectLst/>
+                        <a:uLnTx/>
+                        <a:uFillTx/>
+                        <a:latin typeface="Calibri" panose="020F0502020204030204" pitchFamily="34" charset="0"/>
+                        <a:ea typeface="Calibri" panose="020F0502020204030204" pitchFamily="34" charset="0"/>
+                        <a:cs typeface="Times New Roman" panose="02020603050405020304" pitchFamily="18" charset="0"/>
+                      </a:endParaRPr>
+                    </a:p>
+                    <a:p>
+                      <a:pPr marL="0" marR="0" lvl="0" indent="0" algn="ctr" defTabSz="914400" rtl="0" eaLnBrk="1" fontAlgn="auto" latinLnBrk="0" hangingPunct="1">
+                        <a:lnSpc>
+                          <a:spcPct val="150000"/>
+                        </a:lnSpc>
+                        <a:spcBef>
+                          <a:spcPts val="0"/>
+                        </a:spcBef>
+                        <a:spcAft>
+                          <a:spcPts val="800"/>
+                        </a:spcAft>
+                        <a:buClrTx/>
+                        <a:buSzTx/>
+                        <a:buFontTx/>
+                        <a:buNone/>
+                        <a:tabLst/>
+                        <a:defRPr/>
+                      </a:pPr>
+                      <a:r>
+                        <a:rPr kumimoji="0" lang="es-CL" sz="800" b="1" i="0" u="none" strike="noStrike" kern="1200" cap="none" spc="0" normalizeH="0" baseline="0" noProof="0" dirty="0">
+                          <a:ln>
+                            <a:noFill/>
+                          </a:ln>
+                          <a:solidFill>
+                            <a:prstClr val="black"/>
+                          </a:solidFill>
+                          <a:effectLst/>
+                          <a:uLnTx/>
+                          <a:uFillTx/>
+                          <a:latin typeface="Calibri" panose="020F0502020204030204" pitchFamily="34" charset="0"/>
+                          <a:ea typeface="Calibri" panose="020F0502020204030204" pitchFamily="34" charset="0"/>
+                          <a:cs typeface="Times New Roman" panose="02020603050405020304" pitchFamily="18" charset="0"/>
+                        </a:rPr>
+                        <a:t>X</a:t>
+                      </a:r>
+                    </a:p>
+                  </a:txBody>
+                  <a:tcPr marL="68580" marR="68580" marT="0" marB="0">
+                    <a:lnL w="12700" cap="flat" cmpd="sng" algn="ctr">
+                      <a:solidFill>
+                        <a:srgbClr val="BFBFBF"/>
+                      </a:solidFill>
+                      <a:prstDash val="solid"/>
+                      <a:round/>
+                      <a:headEnd type="none" w="med" len="med"/>
+                      <a:tailEnd type="none" w="med" len="med"/>
+                    </a:lnL>
+                    <a:lnR w="12700" cap="flat" cmpd="sng" algn="ctr">
+                      <a:solidFill>
+                        <a:srgbClr val="BFBFBF"/>
+                      </a:solidFill>
+                      <a:prstDash val="solid"/>
+                      <a:round/>
+                      <a:headEnd type="none" w="med" len="med"/>
+                      <a:tailEnd type="none" w="med" len="med"/>
+                    </a:lnR>
+                    <a:lnT w="12700" cap="flat" cmpd="sng" algn="ctr">
+                      <a:solidFill>
+                        <a:srgbClr val="BFBFBF"/>
+                      </a:solidFill>
+                      <a:prstDash val="solid"/>
+                      <a:round/>
+                      <a:headEnd type="none" w="med" len="med"/>
+                      <a:tailEnd type="none" w="med" len="med"/>
+                    </a:lnT>
+                    <a:lnB w="12700" cap="flat" cmpd="sng" algn="ctr">
+                      <a:solidFill>
+                        <a:srgbClr val="BFBFBF"/>
+                      </a:solidFill>
+                      <a:prstDash val="solid"/>
+                      <a:round/>
+                      <a:headEnd type="none" w="med" len="med"/>
+                      <a:tailEnd type="none" w="med" len="med"/>
+                    </a:lnB>
+                  </a:tcPr>
+                </a:tc>
+                <a:tc>
+                  <a:txBody>
+                    <a:bodyPr/>
+                    <a:lstStyle/>
+                    <a:p>
+                      <a:pPr marL="0" marR="0" lvl="0" indent="0" algn="ctr" defTabSz="914400" rtl="0" eaLnBrk="1" fontAlgn="auto" latinLnBrk="0" hangingPunct="1">
+                        <a:lnSpc>
+                          <a:spcPct val="150000"/>
+                        </a:lnSpc>
+                        <a:spcBef>
+                          <a:spcPts val="0"/>
+                        </a:spcBef>
+                        <a:spcAft>
+                          <a:spcPts val="800"/>
+                        </a:spcAft>
+                        <a:buClrTx/>
+                        <a:buSzTx/>
+                        <a:buFontTx/>
+                        <a:buNone/>
+                        <a:tabLst/>
+                        <a:defRPr/>
+                      </a:pPr>
+                      <a:endParaRPr kumimoji="0" lang="es-CL" sz="800" b="1" i="0" u="none" strike="noStrike" kern="1200" cap="none" spc="0" normalizeH="0" baseline="0" noProof="0" dirty="0">
+                        <a:ln>
+                          <a:noFill/>
+                        </a:ln>
+                        <a:solidFill>
+                          <a:prstClr val="black"/>
+                        </a:solidFill>
+                        <a:effectLst/>
+                        <a:uLnTx/>
+                        <a:uFillTx/>
+                        <a:latin typeface="Calibri" panose="020F0502020204030204" pitchFamily="34" charset="0"/>
+                        <a:ea typeface="Calibri" panose="020F0502020204030204" pitchFamily="34" charset="0"/>
+                        <a:cs typeface="Times New Roman" panose="02020603050405020304" pitchFamily="18" charset="0"/>
+                      </a:endParaRPr>
+                    </a:p>
+                    <a:p>
+                      <a:pPr marL="0" marR="0" lvl="0" indent="0" algn="ctr" defTabSz="914400" rtl="0" eaLnBrk="1" fontAlgn="auto" latinLnBrk="0" hangingPunct="1">
+                        <a:lnSpc>
+                          <a:spcPct val="150000"/>
+                        </a:lnSpc>
+                        <a:spcBef>
+                          <a:spcPts val="0"/>
+                        </a:spcBef>
+                        <a:spcAft>
+                          <a:spcPts val="800"/>
+                        </a:spcAft>
+                        <a:buClrTx/>
+                        <a:buSzTx/>
+                        <a:buFontTx/>
+                        <a:buNone/>
+                        <a:tabLst/>
+                        <a:defRPr/>
+                      </a:pPr>
+                      <a:endParaRPr kumimoji="0" lang="es-CL" sz="800" b="1" i="0" u="none" strike="noStrike" kern="1200" cap="none" spc="0" normalizeH="0" baseline="0" noProof="0" dirty="0">
+                        <a:ln>
+                          <a:noFill/>
+                        </a:ln>
+                        <a:solidFill>
+                          <a:prstClr val="black"/>
+                        </a:solidFill>
+                        <a:effectLst/>
+                        <a:uLnTx/>
+                        <a:uFillTx/>
+                        <a:latin typeface="Calibri" panose="020F0502020204030204" pitchFamily="34" charset="0"/>
+                        <a:ea typeface="Calibri" panose="020F0502020204030204" pitchFamily="34" charset="0"/>
+                        <a:cs typeface="Times New Roman" panose="02020603050405020304" pitchFamily="18" charset="0"/>
+                      </a:endParaRPr>
+                    </a:p>
+                  </a:txBody>
+                  <a:tcPr marL="68580" marR="68580" marT="0" marB="0">
+                    <a:lnL w="12700" cap="flat" cmpd="sng" algn="ctr">
+                      <a:solidFill>
+                        <a:srgbClr val="BFBFBF"/>
+                      </a:solidFill>
+                      <a:prstDash val="solid"/>
+                      <a:round/>
+                      <a:headEnd type="none" w="med" len="med"/>
+                      <a:tailEnd type="none" w="med" len="med"/>
+                    </a:lnL>
+                    <a:lnR w="12700" cap="flat" cmpd="sng" algn="ctr">
+                      <a:solidFill>
+                        <a:srgbClr val="BFBFBF"/>
+                      </a:solidFill>
+                      <a:prstDash val="solid"/>
+                      <a:round/>
+                      <a:headEnd type="none" w="med" len="med"/>
+                      <a:tailEnd type="none" w="med" len="med"/>
+                    </a:lnR>
+                    <a:lnT w="12700" cap="flat" cmpd="sng" algn="ctr">
+                      <a:solidFill>
+                        <a:srgbClr val="BFBFBF"/>
+                      </a:solidFill>
+                      <a:prstDash val="solid"/>
+                      <a:round/>
+                      <a:headEnd type="none" w="med" len="med"/>
+                      <a:tailEnd type="none" w="med" len="med"/>
+                    </a:lnT>
+                    <a:lnB w="12700" cap="flat" cmpd="sng" algn="ctr">
+                      <a:solidFill>
+                        <a:srgbClr val="BFBFBF"/>
+                      </a:solidFill>
+                      <a:prstDash val="solid"/>
+                      <a:round/>
+                      <a:headEnd type="none" w="med" len="med"/>
+                      <a:tailEnd type="none" w="med" len="med"/>
+                    </a:lnB>
+                  </a:tcPr>
+                </a:tc>
+                <a:tc>
+                  <a:txBody>
+                    <a:bodyPr/>
+                    <a:lstStyle/>
+                    <a:p>
+                      <a:pPr algn="just">
+                        <a:lnSpc>
+                          <a:spcPct val="150000"/>
+                        </a:lnSpc>
+                        <a:spcAft>
+                          <a:spcPts val="800"/>
+                        </a:spcAft>
+                      </a:pPr>
+                      <a:r>
+                        <a:rPr lang="es-CL" sz="800" b="1" kern="1200">
+                          <a:solidFill>
+                            <a:schemeClr val="tx1"/>
+                          </a:solidFill>
+                          <a:effectLst/>
+                          <a:latin typeface="Calibri" panose="020F0502020204030204" pitchFamily="34" charset="0"/>
+                          <a:ea typeface="Calibri" panose="020F0502020204030204" pitchFamily="34" charset="0"/>
+                          <a:cs typeface="Times New Roman" panose="02020603050405020304" pitchFamily="18" charset="0"/>
+                        </a:rPr>
+                        <a:t> </a:t>
+                      </a:r>
+                    </a:p>
+                  </a:txBody>
+                  <a:tcPr marL="68580" marR="68580" marT="0" marB="0">
+                    <a:lnL w="12700" cap="flat" cmpd="sng" algn="ctr">
+                      <a:solidFill>
+                        <a:srgbClr val="BFBFBF"/>
+                      </a:solidFill>
+                      <a:prstDash val="solid"/>
+                      <a:round/>
+                      <a:headEnd type="none" w="med" len="med"/>
+                      <a:tailEnd type="none" w="med" len="med"/>
+                    </a:lnL>
+                    <a:lnR w="12700" cap="flat" cmpd="sng" algn="ctr">
+                      <a:solidFill>
+                        <a:srgbClr val="BFBFBF"/>
+                      </a:solidFill>
+                      <a:prstDash val="solid"/>
+                      <a:round/>
+                      <a:headEnd type="none" w="med" len="med"/>
+                      <a:tailEnd type="none" w="med" len="med"/>
+                    </a:lnR>
+                    <a:lnT w="12700" cap="flat" cmpd="sng" algn="ctr">
+                      <a:solidFill>
+                        <a:srgbClr val="BFBFBF"/>
+                      </a:solidFill>
+                      <a:prstDash val="solid"/>
+                      <a:round/>
+                      <a:headEnd type="none" w="med" len="med"/>
+                      <a:tailEnd type="none" w="med" len="med"/>
+                    </a:lnT>
+                    <a:lnB w="12700" cap="flat" cmpd="sng" algn="ctr">
+                      <a:solidFill>
+                        <a:srgbClr val="BFBFBF"/>
+                      </a:solidFill>
+                      <a:prstDash val="solid"/>
+                      <a:round/>
+                      <a:headEnd type="none" w="med" len="med"/>
+                      <a:tailEnd type="none" w="med" len="med"/>
+                    </a:lnB>
+                  </a:tcPr>
+                </a:tc>
+                <a:tc>
+                  <a:txBody>
+                    <a:bodyPr/>
+                    <a:lstStyle/>
+                    <a:p>
+                      <a:pPr algn="just">
+                        <a:lnSpc>
+                          <a:spcPct val="150000"/>
+                        </a:lnSpc>
+                        <a:spcAft>
+                          <a:spcPts val="800"/>
+                        </a:spcAft>
+                      </a:pPr>
+                      <a:r>
+                        <a:rPr lang="es-CL" sz="800" b="1" kern="1200">
+                          <a:solidFill>
+                            <a:schemeClr val="tx1"/>
+                          </a:solidFill>
+                          <a:effectLst/>
+                          <a:latin typeface="Calibri" panose="020F0502020204030204" pitchFamily="34" charset="0"/>
+                          <a:ea typeface="Calibri" panose="020F0502020204030204" pitchFamily="34" charset="0"/>
+                          <a:cs typeface="Times New Roman" panose="02020603050405020304" pitchFamily="18" charset="0"/>
+                        </a:rPr>
+                        <a:t> </a:t>
+                      </a:r>
+                    </a:p>
+                  </a:txBody>
+                  <a:tcPr marL="68580" marR="68580" marT="0" marB="0">
+                    <a:lnL w="12700" cap="flat" cmpd="sng" algn="ctr">
+                      <a:solidFill>
+                        <a:srgbClr val="BFBFBF"/>
+                      </a:solidFill>
+                      <a:prstDash val="solid"/>
+                      <a:round/>
+                      <a:headEnd type="none" w="med" len="med"/>
+                      <a:tailEnd type="none" w="med" len="med"/>
+                    </a:lnL>
+                    <a:lnR w="12700" cap="flat" cmpd="sng" algn="ctr">
+                      <a:solidFill>
+                        <a:srgbClr val="BFBFBF"/>
+                      </a:solidFill>
+                      <a:prstDash val="solid"/>
+                      <a:round/>
+                      <a:headEnd type="none" w="med" len="med"/>
+                      <a:tailEnd type="none" w="med" len="med"/>
+                    </a:lnR>
+                    <a:lnT w="12700" cap="flat" cmpd="sng" algn="ctr">
+                      <a:solidFill>
+                        <a:srgbClr val="BFBFBF"/>
+                      </a:solidFill>
+                      <a:prstDash val="solid"/>
+                      <a:round/>
+                      <a:headEnd type="none" w="med" len="med"/>
+                      <a:tailEnd type="none" w="med" len="med"/>
+                    </a:lnT>
+                    <a:lnB w="12700" cap="flat" cmpd="sng" algn="ctr">
+                      <a:solidFill>
+                        <a:srgbClr val="BFBFBF"/>
+                      </a:solidFill>
+                      <a:prstDash val="solid"/>
+                      <a:round/>
+                      <a:headEnd type="none" w="med" len="med"/>
+                      <a:tailEnd type="none" w="med" len="med"/>
+                    </a:lnB>
+                  </a:tcPr>
+                </a:tc>
+                <a:tc>
+                  <a:txBody>
+                    <a:bodyPr/>
+                    <a:lstStyle/>
+                    <a:p>
+                      <a:pPr algn="just">
+                        <a:lnSpc>
+                          <a:spcPct val="150000"/>
+                        </a:lnSpc>
+                        <a:spcAft>
+                          <a:spcPts val="800"/>
+                        </a:spcAft>
+                      </a:pPr>
+                      <a:r>
+                        <a:rPr lang="es-CL" sz="800" b="1" kern="1200">
+                          <a:solidFill>
+                            <a:schemeClr val="tx1"/>
+                          </a:solidFill>
+                          <a:effectLst/>
+                          <a:latin typeface="Calibri" panose="020F0502020204030204" pitchFamily="34" charset="0"/>
+                          <a:ea typeface="Calibri" panose="020F0502020204030204" pitchFamily="34" charset="0"/>
+                          <a:cs typeface="Times New Roman" panose="02020603050405020304" pitchFamily="18" charset="0"/>
+                        </a:rPr>
+                        <a:t> </a:t>
+                      </a:r>
+                    </a:p>
+                  </a:txBody>
+                  <a:tcPr marL="68580" marR="68580" marT="0" marB="0">
+                    <a:lnL w="12700" cap="flat" cmpd="sng" algn="ctr">
+                      <a:solidFill>
+                        <a:srgbClr val="BFBFBF"/>
+                      </a:solidFill>
+                      <a:prstDash val="solid"/>
+                      <a:round/>
+                      <a:headEnd type="none" w="med" len="med"/>
+                      <a:tailEnd type="none" w="med" len="med"/>
+                    </a:lnL>
+                    <a:lnR w="12700" cap="flat" cmpd="sng" algn="ctr">
+                      <a:solidFill>
+                        <a:srgbClr val="BFBFBF"/>
+                      </a:solidFill>
+                      <a:prstDash val="solid"/>
+                      <a:round/>
+                      <a:headEnd type="none" w="med" len="med"/>
+                      <a:tailEnd type="none" w="med" len="med"/>
+                    </a:lnR>
+                    <a:lnT w="12700" cap="flat" cmpd="sng" algn="ctr">
+                      <a:solidFill>
+                        <a:srgbClr val="BFBFBF"/>
+                      </a:solidFill>
+                      <a:prstDash val="solid"/>
+                      <a:round/>
+                      <a:headEnd type="none" w="med" len="med"/>
+                      <a:tailEnd type="none" w="med" len="med"/>
+                    </a:lnT>
+                    <a:lnB w="12700" cap="flat" cmpd="sng" algn="ctr">
+                      <a:solidFill>
+                        <a:srgbClr val="BFBFBF"/>
+                      </a:solidFill>
+                      <a:prstDash val="solid"/>
+                      <a:round/>
+                      <a:headEnd type="none" w="med" len="med"/>
+                      <a:tailEnd type="none" w="med" len="med"/>
+                    </a:lnB>
+                  </a:tcPr>
+                </a:tc>
+                <a:tc>
+                  <a:txBody>
+                    <a:bodyPr/>
+                    <a:lstStyle/>
+                    <a:p>
+                      <a:r>
+                        <a:rPr lang="es-CL" sz="800" b="1" kern="1200">
+                          <a:solidFill>
+                            <a:schemeClr val="tx1"/>
+                          </a:solidFill>
+                          <a:effectLst/>
+                          <a:latin typeface="Calibri" panose="020F0502020204030204" pitchFamily="34" charset="0"/>
+                          <a:ea typeface="Calibri" panose="020F0502020204030204" pitchFamily="34" charset="0"/>
+                          <a:cs typeface="Times New Roman" panose="02020603050405020304" pitchFamily="18" charset="0"/>
+                        </a:rPr>
+                        <a:t> </a:t>
+                      </a:r>
+                    </a:p>
+                  </a:txBody>
+                  <a:tcPr marL="68580" marR="68580" marT="0" marB="0">
+                    <a:lnL w="12700" cap="flat" cmpd="sng" algn="ctr">
+                      <a:solidFill>
+                        <a:srgbClr val="BFBFBF"/>
+                      </a:solidFill>
+                      <a:prstDash val="solid"/>
+                      <a:round/>
+                      <a:headEnd type="none" w="med" len="med"/>
+                      <a:tailEnd type="none" w="med" len="med"/>
+                    </a:lnL>
+                    <a:lnR w="12700" cap="flat" cmpd="sng" algn="ctr">
+                      <a:solidFill>
+                        <a:srgbClr val="BFBFBF"/>
+                      </a:solidFill>
+                      <a:prstDash val="solid"/>
+                      <a:round/>
+                      <a:headEnd type="none" w="med" len="med"/>
+                      <a:tailEnd type="none" w="med" len="med"/>
+                    </a:lnR>
+                    <a:lnT w="12700" cap="flat" cmpd="sng" algn="ctr">
+                      <a:solidFill>
+                        <a:srgbClr val="BFBFBF"/>
+                      </a:solidFill>
+                      <a:prstDash val="solid"/>
+                      <a:round/>
+                      <a:headEnd type="none" w="med" len="med"/>
+                      <a:tailEnd type="none" w="med" len="med"/>
+                    </a:lnT>
+                    <a:lnB w="12700" cap="flat" cmpd="sng" algn="ctr">
+                      <a:solidFill>
+                        <a:srgbClr val="BFBFBF"/>
+                      </a:solidFill>
+                      <a:prstDash val="solid"/>
+                      <a:round/>
+                      <a:headEnd type="none" w="med" len="med"/>
+                      <a:tailEnd type="none" w="med" len="med"/>
+                    </a:lnB>
+                  </a:tcPr>
+                </a:tc>
+                <a:tc>
+                  <a:txBody>
+                    <a:bodyPr/>
+                    <a:lstStyle/>
+                    <a:p>
+                      <a:pPr algn="just">
+                        <a:lnSpc>
+                          <a:spcPct val="150000"/>
+                        </a:lnSpc>
+                        <a:spcAft>
+                          <a:spcPts val="800"/>
+                        </a:spcAft>
+                      </a:pPr>
+                      <a:r>
+                        <a:rPr lang="es-CL" sz="800" b="1" kern="1200">
+                          <a:solidFill>
+                            <a:schemeClr val="tx1"/>
+                          </a:solidFill>
+                          <a:effectLst/>
+                          <a:latin typeface="Calibri" panose="020F0502020204030204" pitchFamily="34" charset="0"/>
+                          <a:ea typeface="Calibri" panose="020F0502020204030204" pitchFamily="34" charset="0"/>
+                          <a:cs typeface="Times New Roman" panose="02020603050405020304" pitchFamily="18" charset="0"/>
+                        </a:rPr>
+                        <a:t> </a:t>
+                      </a:r>
                     </a:p>
                   </a:txBody>
                   <a:tcPr marL="68580" marR="68580" marT="0" marB="0">
@@ -12477,11 +14533,11 @@
                 </a:tc>
                 <a:extLst>
                   <a:ext uri="{0D108BD9-81ED-4DB2-BD59-A6C34878D82A}">
-                    <a16:rowId xmlns:a16="http://schemas.microsoft.com/office/drawing/2014/main" val="2457018220"/>
+                    <a16:rowId xmlns:a16="http://schemas.microsoft.com/office/drawing/2014/main" val="3031361947"/>
                   </a:ext>
                 </a:extLst>
               </a:tr>
-              <a:tr h="540519">
+              <a:tr h="687222">
                 <a:tc>
                   <a:txBody>
                     <a:bodyPr/>
@@ -12496,20 +14552,17 @@
                         </a:spcAft>
                       </a:pPr>
                       <a:r>
-                        <a:rPr lang="es-CL" sz="800" b="1">
+                        <a:rPr lang="es-CL" sz="1100" kern="1200" dirty="0">
+                          <a:solidFill>
+                            <a:schemeClr val="tx1"/>
+                          </a:solidFill>
                           <a:effectLst/>
                           <a:latin typeface="Calibri" panose="020F0502020204030204" pitchFamily="34" charset="0"/>
                           <a:ea typeface="Calibri" panose="020F0502020204030204" pitchFamily="34" charset="0"/>
                           <a:cs typeface="Times New Roman" panose="02020603050405020304" pitchFamily="18" charset="0"/>
                         </a:rPr>
-                        <a:t> </a:t>
+                        <a:t>Documentación del proyecto.</a:t>
                       </a:r>
-                      <a:endParaRPr lang="es-CL" sz="1100">
-                        <a:effectLst/>
-                        <a:latin typeface="Calibri" panose="020F0502020204030204" pitchFamily="34" charset="0"/>
-                        <a:ea typeface="Calibri" panose="020F0502020204030204" pitchFamily="34" charset="0"/>
-                        <a:cs typeface="Times New Roman" panose="02020603050405020304" pitchFamily="18" charset="0"/>
-                      </a:endParaRPr>
                     </a:p>
                   </a:txBody>
                   <a:tcPr marL="68580" marR="68580" marT="0" marB="0">
@@ -12565,7 +14618,10 @@
                         </a:spcAft>
                       </a:pPr>
                       <a:r>
-                        <a:rPr lang="es-CL" sz="800" b="1">
+                        <a:rPr lang="es-CL" sz="800" b="1" kern="1200">
+                          <a:solidFill>
+                            <a:schemeClr val="tx1"/>
+                          </a:solidFill>
                           <a:effectLst/>
                           <a:latin typeface="Calibri" panose="020F0502020204030204" pitchFamily="34" charset="0"/>
                           <a:ea typeface="Calibri" panose="020F0502020204030204" pitchFamily="34" charset="0"/>
@@ -12573,12 +14629,6 @@
                         </a:rPr>
                         <a:t> </a:t>
                       </a:r>
-                      <a:endParaRPr lang="es-CL" sz="1100">
-                        <a:effectLst/>
-                        <a:latin typeface="Calibri" panose="020F0502020204030204" pitchFamily="34" charset="0"/>
-                        <a:ea typeface="Calibri" panose="020F0502020204030204" pitchFamily="34" charset="0"/>
-                        <a:cs typeface="Times New Roman" panose="02020603050405020304" pitchFamily="18" charset="0"/>
-                      </a:endParaRPr>
                     </a:p>
                   </a:txBody>
                   <a:tcPr marL="68580" marR="68580" marT="0" marB="0">
@@ -12634,7 +14684,10 @@
                         </a:spcAft>
                       </a:pPr>
                       <a:r>
-                        <a:rPr lang="es-CL" sz="800" b="1">
+                        <a:rPr lang="es-CL" sz="800" b="1" kern="1200">
+                          <a:solidFill>
+                            <a:schemeClr val="tx1"/>
+                          </a:solidFill>
                           <a:effectLst/>
                           <a:latin typeface="Calibri" panose="020F0502020204030204" pitchFamily="34" charset="0"/>
                           <a:ea typeface="Calibri" panose="020F0502020204030204" pitchFamily="34" charset="0"/>
@@ -12642,12 +14695,6 @@
                         </a:rPr>
                         <a:t> </a:t>
                       </a:r>
-                      <a:endParaRPr lang="es-CL" sz="1100">
-                        <a:effectLst/>
-                        <a:latin typeface="Calibri" panose="020F0502020204030204" pitchFamily="34" charset="0"/>
-                        <a:ea typeface="Calibri" panose="020F0502020204030204" pitchFamily="34" charset="0"/>
-                        <a:cs typeface="Times New Roman" panose="02020603050405020304" pitchFamily="18" charset="0"/>
-                      </a:endParaRPr>
                     </a:p>
                   </a:txBody>
                   <a:tcPr marL="68580" marR="68580" marT="0" marB="0">
@@ -12703,7 +14750,10 @@
                         </a:spcAft>
                       </a:pPr>
                       <a:r>
-                        <a:rPr lang="es-CL" sz="800" b="1">
+                        <a:rPr lang="es-CL" sz="800" b="1" kern="1200">
+                          <a:solidFill>
+                            <a:schemeClr val="tx1"/>
+                          </a:solidFill>
                           <a:effectLst/>
                           <a:latin typeface="Calibri" panose="020F0502020204030204" pitchFamily="34" charset="0"/>
                           <a:ea typeface="Calibri" panose="020F0502020204030204" pitchFamily="34" charset="0"/>
@@ -12711,12 +14761,6 @@
                         </a:rPr>
                         <a:t> </a:t>
                       </a:r>
-                      <a:endParaRPr lang="es-CL" sz="1100">
-                        <a:effectLst/>
-                        <a:latin typeface="Calibri" panose="020F0502020204030204" pitchFamily="34" charset="0"/>
-                        <a:ea typeface="Calibri" panose="020F0502020204030204" pitchFamily="34" charset="0"/>
-                        <a:cs typeface="Times New Roman" panose="02020603050405020304" pitchFamily="18" charset="0"/>
-                      </a:endParaRPr>
                     </a:p>
                   </a:txBody>
                   <a:tcPr marL="68580" marR="68580" marT="0" marB="0">
@@ -12772,7 +14816,10 @@
                         </a:spcAft>
                       </a:pPr>
                       <a:r>
-                        <a:rPr lang="es-CL" sz="800" b="1">
+                        <a:rPr lang="es-CL" sz="800" b="1" kern="1200" dirty="0">
+                          <a:solidFill>
+                            <a:schemeClr val="tx1"/>
+                          </a:solidFill>
                           <a:effectLst/>
                           <a:latin typeface="Calibri" panose="020F0502020204030204" pitchFamily="34" charset="0"/>
                           <a:ea typeface="Calibri" panose="020F0502020204030204" pitchFamily="34" charset="0"/>
@@ -12780,12 +14827,6 @@
                         </a:rPr>
                         <a:t> </a:t>
                       </a:r>
-                      <a:endParaRPr lang="es-CL" sz="1100">
-                        <a:effectLst/>
-                        <a:latin typeface="Calibri" panose="020F0502020204030204" pitchFamily="34" charset="0"/>
-                        <a:ea typeface="Calibri" panose="020F0502020204030204" pitchFamily="34" charset="0"/>
-                        <a:cs typeface="Times New Roman" panose="02020603050405020304" pitchFamily="18" charset="0"/>
-                      </a:endParaRPr>
                     </a:p>
                   </a:txBody>
                   <a:tcPr marL="68580" marR="68580" marT="0" marB="0">
@@ -12841,7 +14882,10 @@
                         </a:spcAft>
                       </a:pPr>
                       <a:r>
-                        <a:rPr lang="es-CL" sz="800" b="1">
+                        <a:rPr lang="es-CL" sz="800" b="1" kern="1200" dirty="0">
+                          <a:solidFill>
+                            <a:schemeClr val="tx1"/>
+                          </a:solidFill>
                           <a:effectLst/>
                           <a:latin typeface="Calibri" panose="020F0502020204030204" pitchFamily="34" charset="0"/>
                           <a:ea typeface="Calibri" panose="020F0502020204030204" pitchFamily="34" charset="0"/>
@@ -12849,12 +14893,6 @@
                         </a:rPr>
                         <a:t> </a:t>
                       </a:r>
-                      <a:endParaRPr lang="es-CL" sz="1100">
-                        <a:effectLst/>
-                        <a:latin typeface="Calibri" panose="020F0502020204030204" pitchFamily="34" charset="0"/>
-                        <a:ea typeface="Calibri" panose="020F0502020204030204" pitchFamily="34" charset="0"/>
-                        <a:cs typeface="Times New Roman" panose="02020603050405020304" pitchFamily="18" charset="0"/>
-                      </a:endParaRPr>
                     </a:p>
                   </a:txBody>
                   <a:tcPr marL="68580" marR="68580" marT="0" marB="0">
@@ -12910,7 +14948,10 @@
                         </a:spcAft>
                       </a:pPr>
                       <a:r>
-                        <a:rPr lang="es-CL" sz="800" b="1">
+                        <a:rPr lang="es-CL" sz="800" b="1" kern="1200" dirty="0">
+                          <a:solidFill>
+                            <a:schemeClr val="tx1"/>
+                          </a:solidFill>
                           <a:effectLst/>
                           <a:latin typeface="Calibri" panose="020F0502020204030204" pitchFamily="34" charset="0"/>
                           <a:ea typeface="Calibri" panose="020F0502020204030204" pitchFamily="34" charset="0"/>
@@ -12918,12 +14959,6 @@
                         </a:rPr>
                         <a:t> </a:t>
                       </a:r>
-                      <a:endParaRPr lang="es-CL" sz="1100">
-                        <a:effectLst/>
-                        <a:latin typeface="Calibri" panose="020F0502020204030204" pitchFamily="34" charset="0"/>
-                        <a:ea typeface="Calibri" panose="020F0502020204030204" pitchFamily="34" charset="0"/>
-                        <a:cs typeface="Times New Roman" panose="02020603050405020304" pitchFamily="18" charset="0"/>
-                      </a:endParaRPr>
                     </a:p>
                   </a:txBody>
                   <a:tcPr marL="68580" marR="68580" marT="0" marB="0">
@@ -12979,7 +15014,10 @@
                         </a:spcAft>
                       </a:pPr>
                       <a:r>
-                        <a:rPr lang="es-CL" sz="800" b="1">
+                        <a:rPr lang="es-CL" sz="800" b="1" kern="1200" dirty="0">
+                          <a:solidFill>
+                            <a:schemeClr val="tx1"/>
+                          </a:solidFill>
                           <a:effectLst/>
                           <a:latin typeface="Calibri" panose="020F0502020204030204" pitchFamily="34" charset="0"/>
                           <a:ea typeface="Calibri" panose="020F0502020204030204" pitchFamily="34" charset="0"/>
@@ -12987,12 +15025,6 @@
                         </a:rPr>
                         <a:t> </a:t>
                       </a:r>
-                      <a:endParaRPr lang="es-CL" sz="1100">
-                        <a:effectLst/>
-                        <a:latin typeface="Calibri" panose="020F0502020204030204" pitchFamily="34" charset="0"/>
-                        <a:ea typeface="Calibri" panose="020F0502020204030204" pitchFamily="34" charset="0"/>
-                        <a:cs typeface="Times New Roman" panose="02020603050405020304" pitchFamily="18" charset="0"/>
-                      </a:endParaRPr>
                     </a:p>
                   </a:txBody>
                   <a:tcPr marL="68580" marR="68580" marT="0" marB="0">
@@ -13048,7 +15080,10 @@
                         </a:spcAft>
                       </a:pPr>
                       <a:r>
-                        <a:rPr lang="es-CL" sz="800" b="1">
+                        <a:rPr lang="es-CL" sz="800" b="1" kern="1200" dirty="0">
+                          <a:solidFill>
+                            <a:schemeClr val="tx1"/>
+                          </a:solidFill>
                           <a:effectLst/>
                           <a:latin typeface="Calibri" panose="020F0502020204030204" pitchFamily="34" charset="0"/>
                           <a:ea typeface="Calibri" panose="020F0502020204030204" pitchFamily="34" charset="0"/>
@@ -13056,12 +15091,6 @@
                         </a:rPr>
                         <a:t> </a:t>
                       </a:r>
-                      <a:endParaRPr lang="es-CL" sz="1100">
-                        <a:effectLst/>
-                        <a:latin typeface="Calibri" panose="020F0502020204030204" pitchFamily="34" charset="0"/>
-                        <a:ea typeface="Calibri" panose="020F0502020204030204" pitchFamily="34" charset="0"/>
-                        <a:cs typeface="Times New Roman" panose="02020603050405020304" pitchFamily="18" charset="0"/>
-                      </a:endParaRPr>
                     </a:p>
                   </a:txBody>
                   <a:tcPr marL="68580" marR="68580" marT="0" marB="0">
@@ -13117,7 +15146,10 @@
                         </a:spcAft>
                       </a:pPr>
                       <a:r>
-                        <a:rPr lang="es-CL" sz="800" b="1">
+                        <a:rPr lang="es-CL" sz="800" b="1" kern="1200" dirty="0">
+                          <a:solidFill>
+                            <a:schemeClr val="tx1"/>
+                          </a:solidFill>
                           <a:effectLst/>
                           <a:latin typeface="Calibri" panose="020F0502020204030204" pitchFamily="34" charset="0"/>
                           <a:ea typeface="Calibri" panose="020F0502020204030204" pitchFamily="34" charset="0"/>
@@ -13125,12 +15157,6 @@
                         </a:rPr>
                         <a:t> </a:t>
                       </a:r>
-                      <a:endParaRPr lang="es-CL" sz="1100">
-                        <a:effectLst/>
-                        <a:latin typeface="Calibri" panose="020F0502020204030204" pitchFamily="34" charset="0"/>
-                        <a:ea typeface="Calibri" panose="020F0502020204030204" pitchFamily="34" charset="0"/>
-                        <a:cs typeface="Times New Roman" panose="02020603050405020304" pitchFamily="18" charset="0"/>
-                      </a:endParaRPr>
                     </a:p>
                   </a:txBody>
                   <a:tcPr marL="68580" marR="68580" marT="0" marB="0">
@@ -13186,7 +15212,10 @@
                         </a:spcAft>
                       </a:pPr>
                       <a:r>
-                        <a:rPr lang="es-CL" sz="800" b="1">
+                        <a:rPr lang="es-CL" sz="800" b="1" kern="1200">
+                          <a:solidFill>
+                            <a:schemeClr val="tx1"/>
+                          </a:solidFill>
                           <a:effectLst/>
                           <a:latin typeface="Calibri" panose="020F0502020204030204" pitchFamily="34" charset="0"/>
                           <a:ea typeface="Calibri" panose="020F0502020204030204" pitchFamily="34" charset="0"/>
@@ -13194,12 +15223,6 @@
                         </a:rPr>
                         <a:t> </a:t>
                       </a:r>
-                      <a:endParaRPr lang="es-CL" sz="1100">
-                        <a:effectLst/>
-                        <a:latin typeface="Calibri" panose="020F0502020204030204" pitchFamily="34" charset="0"/>
-                        <a:ea typeface="Calibri" panose="020F0502020204030204" pitchFamily="34" charset="0"/>
-                        <a:cs typeface="Times New Roman" panose="02020603050405020304" pitchFamily="18" charset="0"/>
-                      </a:endParaRPr>
                     </a:p>
                   </a:txBody>
                   <a:tcPr marL="68580" marR="68580" marT="0" marB="0">
@@ -13255,7 +15278,10 @@
                         </a:spcAft>
                       </a:pPr>
                       <a:r>
-                        <a:rPr lang="es-CL" sz="800" b="1">
+                        <a:rPr lang="es-CL" sz="800" b="1" kern="1200" dirty="0">
+                          <a:solidFill>
+                            <a:schemeClr val="tx1"/>
+                          </a:solidFill>
                           <a:effectLst/>
                           <a:latin typeface="Calibri" panose="020F0502020204030204" pitchFamily="34" charset="0"/>
                           <a:ea typeface="Calibri" panose="020F0502020204030204" pitchFamily="34" charset="0"/>
@@ -13263,12 +15289,6 @@
                         </a:rPr>
                         <a:t> </a:t>
                       </a:r>
-                      <a:endParaRPr lang="es-CL" sz="1100">
-                        <a:effectLst/>
-                        <a:latin typeface="Calibri" panose="020F0502020204030204" pitchFamily="34" charset="0"/>
-                        <a:ea typeface="Calibri" panose="020F0502020204030204" pitchFamily="34" charset="0"/>
-                        <a:cs typeface="Times New Roman" panose="02020603050405020304" pitchFamily="18" charset="0"/>
-                      </a:endParaRPr>
                     </a:p>
                   </a:txBody>
                   <a:tcPr marL="68580" marR="68580" marT="0" marB="0">
@@ -13324,7 +15344,10 @@
                         </a:spcAft>
                       </a:pPr>
                       <a:r>
-                        <a:rPr lang="es-CL" sz="800" b="1">
+                        <a:rPr lang="es-CL" sz="800" b="1" kern="1200" dirty="0">
+                          <a:solidFill>
+                            <a:schemeClr val="tx1"/>
+                          </a:solidFill>
                           <a:effectLst/>
                           <a:latin typeface="Calibri" panose="020F0502020204030204" pitchFamily="34" charset="0"/>
                           <a:ea typeface="Calibri" panose="020F0502020204030204" pitchFamily="34" charset="0"/>
@@ -13332,12 +15355,6 @@
                         </a:rPr>
                         <a:t> </a:t>
                       </a:r>
-                      <a:endParaRPr lang="es-CL" sz="1100">
-                        <a:effectLst/>
-                        <a:latin typeface="Calibri" panose="020F0502020204030204" pitchFamily="34" charset="0"/>
-                        <a:ea typeface="Calibri" panose="020F0502020204030204" pitchFamily="34" charset="0"/>
-                        <a:cs typeface="Times New Roman" panose="02020603050405020304" pitchFamily="18" charset="0"/>
-                      </a:endParaRPr>
                     </a:p>
                   </a:txBody>
                   <a:tcPr marL="68580" marR="68580" marT="0" marB="0">
@@ -13393,7 +15410,10 @@
                         </a:spcAft>
                       </a:pPr>
                       <a:r>
-                        <a:rPr lang="es-CL" sz="800" b="1">
+                        <a:rPr lang="es-CL" sz="800" b="1" kern="1200" dirty="0">
+                          <a:solidFill>
+                            <a:schemeClr val="tx1"/>
+                          </a:solidFill>
                           <a:effectLst/>
                           <a:latin typeface="Calibri" panose="020F0502020204030204" pitchFamily="34" charset="0"/>
                           <a:ea typeface="Calibri" panose="020F0502020204030204" pitchFamily="34" charset="0"/>
@@ -13401,12 +15421,28 @@
                         </a:rPr>
                         <a:t> </a:t>
                       </a:r>
-                      <a:endParaRPr lang="es-CL" sz="1100">
-                        <a:effectLst/>
-                        <a:latin typeface="Calibri" panose="020F0502020204030204" pitchFamily="34" charset="0"/>
-                        <a:ea typeface="Calibri" panose="020F0502020204030204" pitchFamily="34" charset="0"/>
-                        <a:cs typeface="Times New Roman" panose="02020603050405020304" pitchFamily="18" charset="0"/>
-                      </a:endParaRPr>
+                    </a:p>
+                    <a:p>
+                      <a:pPr algn="ctr">
+                        <a:lnSpc>
+                          <a:spcPct val="150000"/>
+                        </a:lnSpc>
+                        <a:spcAft>
+                          <a:spcPts val="800"/>
+                        </a:spcAft>
+                      </a:pPr>
+                      <a:r>
+                        <a:rPr lang="es-CL" sz="800" b="1" kern="1200" dirty="0">
+                          <a:solidFill>
+                            <a:schemeClr val="tx1"/>
+                          </a:solidFill>
+                          <a:effectLst/>
+                          <a:latin typeface="Calibri" panose="020F0502020204030204" pitchFamily="34" charset="0"/>
+                          <a:ea typeface="Calibri" panose="020F0502020204030204" pitchFamily="34" charset="0"/>
+                          <a:cs typeface="Times New Roman" panose="02020603050405020304" pitchFamily="18" charset="0"/>
+                        </a:rPr>
+                        <a:t>X</a:t>
+                      </a:r>
                     </a:p>
                   </a:txBody>
                   <a:tcPr marL="68580" marR="68580" marT="0" marB="0">
@@ -13453,29 +15489,73 @@
                     <a:bodyPr/>
                     <a:lstStyle/>
                     <a:p>
-                      <a:pPr algn="just">
+                      <a:pPr marL="0" marR="0" lvl="0" indent="0" algn="ctr" defTabSz="914400" rtl="0" eaLnBrk="1" fontAlgn="auto" latinLnBrk="0" hangingPunct="1">
                         <a:lnSpc>
                           <a:spcPct val="150000"/>
                         </a:lnSpc>
+                        <a:spcBef>
+                          <a:spcPts val="0"/>
+                        </a:spcBef>
                         <a:spcAft>
                           <a:spcPts val="800"/>
                         </a:spcAft>
+                        <a:buClrTx/>
+                        <a:buSzTx/>
+                        <a:buFontTx/>
+                        <a:buNone/>
+                        <a:tabLst/>
+                        <a:defRPr/>
+                      </a:pPr>
+                      <a:endParaRPr kumimoji="0" lang="es-CL" sz="800" b="1" i="0" u="none" strike="noStrike" kern="1200" cap="none" spc="0" normalizeH="0" baseline="0" noProof="0" dirty="0">
+                        <a:ln>
+                          <a:noFill/>
+                        </a:ln>
+                        <a:solidFill>
+                          <a:prstClr val="black"/>
+                        </a:solidFill>
+                        <a:effectLst/>
+                        <a:uLnTx/>
+                        <a:uFillTx/>
+                        <a:latin typeface="Calibri" panose="020F0502020204030204" pitchFamily="34" charset="0"/>
+                        <a:ea typeface="Calibri" panose="020F0502020204030204" pitchFamily="34" charset="0"/>
+                        <a:cs typeface="Times New Roman" panose="02020603050405020304" pitchFamily="18" charset="0"/>
+                      </a:endParaRPr>
+                    </a:p>
+                    <a:p>
+                      <a:pPr marL="0" marR="0" lvl="0" indent="0" algn="ctr" defTabSz="914400" rtl="0" eaLnBrk="1" fontAlgn="auto" latinLnBrk="0" hangingPunct="1">
+                        <a:lnSpc>
+                          <a:spcPct val="150000"/>
+                        </a:lnSpc>
+                        <a:spcBef>
+                          <a:spcPts val="0"/>
+                        </a:spcBef>
+                        <a:spcAft>
+                          <a:spcPts val="800"/>
+                        </a:spcAft>
+                        <a:buClrTx/>
+                        <a:buSzTx/>
+                        <a:buFontTx/>
+                        <a:buNone/>
+                        <a:tabLst/>
+                        <a:defRPr/>
                       </a:pPr>
                       <a:r>
-                        <a:rPr lang="es-CL" sz="800" b="1">
+                        <a:rPr kumimoji="0" lang="es-CL" sz="800" b="1" i="0" u="none" strike="noStrike" kern="1200" cap="none" spc="0" normalizeH="0" baseline="0" noProof="0" dirty="0">
+                          <a:ln>
+                            <a:noFill/>
+                          </a:ln>
+                          <a:solidFill>
+                            <a:prstClr val="black"/>
+                          </a:solidFill>
                           <a:effectLst/>
+                          <a:uLnTx/>
+                          <a:uFillTx/>
                           <a:latin typeface="Calibri" panose="020F0502020204030204" pitchFamily="34" charset="0"/>
                           <a:ea typeface="Calibri" panose="020F0502020204030204" pitchFamily="34" charset="0"/>
                           <a:cs typeface="Times New Roman" panose="02020603050405020304" pitchFamily="18" charset="0"/>
                         </a:rPr>
-                        <a:t> </a:t>
+                        <a:t>X</a:t>
                       </a:r>
-                      <a:endParaRPr lang="es-CL" sz="1100">
-                        <a:effectLst/>
-                        <a:latin typeface="Calibri" panose="020F0502020204030204" pitchFamily="34" charset="0"/>
-                        <a:ea typeface="Calibri" panose="020F0502020204030204" pitchFamily="34" charset="0"/>
-                        <a:cs typeface="Times New Roman" panose="02020603050405020304" pitchFamily="18" charset="0"/>
-                      </a:endParaRPr>
                     </a:p>
                   </a:txBody>
                   <a:tcPr marL="68580" marR="68580" marT="0" marB="0">
@@ -13522,177 +15602,73 @@
                     <a:bodyPr/>
                     <a:lstStyle/>
                     <a:p>
-                      <a:pPr algn="just">
+                      <a:pPr marL="0" marR="0" lvl="0" indent="0" algn="ctr" defTabSz="914400" rtl="0" eaLnBrk="1" fontAlgn="auto" latinLnBrk="0" hangingPunct="1">
                         <a:lnSpc>
                           <a:spcPct val="150000"/>
                         </a:lnSpc>
+                        <a:spcBef>
+                          <a:spcPts val="0"/>
+                        </a:spcBef>
                         <a:spcAft>
                           <a:spcPts val="800"/>
                         </a:spcAft>
+                        <a:buClrTx/>
+                        <a:buSzTx/>
+                        <a:buFontTx/>
+                        <a:buNone/>
+                        <a:tabLst/>
+                        <a:defRPr/>
                       </a:pPr>
-                      <a:r>
-                        <a:rPr lang="es-CL" sz="800" b="1">
-                          <a:effectLst/>
-                          <a:latin typeface="Calibri" panose="020F0502020204030204" pitchFamily="34" charset="0"/>
-                          <a:ea typeface="Calibri" panose="020F0502020204030204" pitchFamily="34" charset="0"/>
-                          <a:cs typeface="Times New Roman" panose="02020603050405020304" pitchFamily="18" charset="0"/>
-                        </a:rPr>
-                        <a:t> </a:t>
-                      </a:r>
-                      <a:endParaRPr lang="es-CL" sz="1100">
+                      <a:endParaRPr kumimoji="0" lang="es-CL" sz="800" b="1" i="0" u="none" strike="noStrike" kern="1200" cap="none" spc="0" normalizeH="0" baseline="0" noProof="0" dirty="0">
+                        <a:ln>
+                          <a:noFill/>
+                        </a:ln>
+                        <a:solidFill>
+                          <a:prstClr val="black"/>
+                        </a:solidFill>
                         <a:effectLst/>
+                        <a:uLnTx/>
+                        <a:uFillTx/>
                         <a:latin typeface="Calibri" panose="020F0502020204030204" pitchFamily="34" charset="0"/>
                         <a:ea typeface="Calibri" panose="020F0502020204030204" pitchFamily="34" charset="0"/>
                         <a:cs typeface="Times New Roman" panose="02020603050405020304" pitchFamily="18" charset="0"/>
                       </a:endParaRPr>
                     </a:p>
-                  </a:txBody>
-                  <a:tcPr marL="68580" marR="68580" marT="0" marB="0">
-                    <a:lnL w="12700" cap="flat" cmpd="sng" algn="ctr">
-                      <a:solidFill>
-                        <a:srgbClr val="BFBFBF"/>
-                      </a:solidFill>
-                      <a:prstDash val="solid"/>
-                      <a:round/>
-                      <a:headEnd type="none" w="med" len="med"/>
-                      <a:tailEnd type="none" w="med" len="med"/>
-                    </a:lnL>
-                    <a:lnR w="12700" cap="flat" cmpd="sng" algn="ctr">
-                      <a:solidFill>
-                        <a:srgbClr val="BFBFBF"/>
-                      </a:solidFill>
-                      <a:prstDash val="solid"/>
-                      <a:round/>
-                      <a:headEnd type="none" w="med" len="med"/>
-                      <a:tailEnd type="none" w="med" len="med"/>
-                    </a:lnR>
-                    <a:lnT w="12700" cap="flat" cmpd="sng" algn="ctr">
-                      <a:solidFill>
-                        <a:srgbClr val="BFBFBF"/>
-                      </a:solidFill>
-                      <a:prstDash val="solid"/>
-                      <a:round/>
-                      <a:headEnd type="none" w="med" len="med"/>
-                      <a:tailEnd type="none" w="med" len="med"/>
-                    </a:lnT>
-                    <a:lnB w="12700" cap="flat" cmpd="sng" algn="ctr">
-                      <a:solidFill>
-                        <a:srgbClr val="BFBFBF"/>
-                      </a:solidFill>
-                      <a:prstDash val="solid"/>
-                      <a:round/>
-                      <a:headEnd type="none" w="med" len="med"/>
-                      <a:tailEnd type="none" w="med" len="med"/>
-                    </a:lnB>
-                  </a:tcPr>
-                </a:tc>
-                <a:tc gridSpan="2">
-                  <a:txBody>
-                    <a:bodyPr/>
-                    <a:lstStyle/>
                     <a:p>
-                      <a:pPr algn="just">
+                      <a:pPr marL="0" marR="0" lvl="0" indent="0" algn="ctr" defTabSz="914400" rtl="0" eaLnBrk="1" fontAlgn="auto" latinLnBrk="0" hangingPunct="1">
                         <a:lnSpc>
                           <a:spcPct val="150000"/>
                         </a:lnSpc>
+                        <a:spcBef>
+                          <a:spcPts val="0"/>
+                        </a:spcBef>
                         <a:spcAft>
                           <a:spcPts val="800"/>
                         </a:spcAft>
+                        <a:buClrTx/>
+                        <a:buSzTx/>
+                        <a:buFontTx/>
+                        <a:buNone/>
+                        <a:tabLst/>
+                        <a:defRPr/>
                       </a:pPr>
                       <a:r>
-                        <a:rPr lang="es-CL" sz="800" b="1">
+                        <a:rPr kumimoji="0" lang="es-CL" sz="800" b="1" i="0" u="none" strike="noStrike" kern="1200" cap="none" spc="0" normalizeH="0" baseline="0" noProof="0" dirty="0">
+                          <a:ln>
+                            <a:noFill/>
+                          </a:ln>
+                          <a:solidFill>
+                            <a:prstClr val="black"/>
+                          </a:solidFill>
                           <a:effectLst/>
+                          <a:uLnTx/>
+                          <a:uFillTx/>
                           <a:latin typeface="Calibri" panose="020F0502020204030204" pitchFamily="34" charset="0"/>
                           <a:ea typeface="Calibri" panose="020F0502020204030204" pitchFamily="34" charset="0"/>
                           <a:cs typeface="Times New Roman" panose="02020603050405020304" pitchFamily="18" charset="0"/>
                         </a:rPr>
-                        <a:t> </a:t>
+                        <a:t>X</a:t>
                       </a:r>
-                      <a:endParaRPr lang="es-CL" sz="1100">
-                        <a:effectLst/>
-                        <a:latin typeface="Calibri" panose="020F0502020204030204" pitchFamily="34" charset="0"/>
-                        <a:ea typeface="Calibri" panose="020F0502020204030204" pitchFamily="34" charset="0"/>
-                        <a:cs typeface="Times New Roman" panose="02020603050405020304" pitchFamily="18" charset="0"/>
-                      </a:endParaRPr>
-                    </a:p>
-                  </a:txBody>
-                  <a:tcPr marL="68580" marR="68580" marT="0" marB="0">
-                    <a:lnL w="12700" cap="flat" cmpd="sng" algn="ctr">
-                      <a:solidFill>
-                        <a:srgbClr val="BFBFBF"/>
-                      </a:solidFill>
-                      <a:prstDash val="solid"/>
-                      <a:round/>
-                      <a:headEnd type="none" w="med" len="med"/>
-                      <a:tailEnd type="none" w="med" len="med"/>
-                    </a:lnL>
-                    <a:lnR w="12700" cap="flat" cmpd="sng" algn="ctr">
-                      <a:solidFill>
-                        <a:srgbClr val="BFBFBF"/>
-                      </a:solidFill>
-                      <a:prstDash val="solid"/>
-                      <a:round/>
-                      <a:headEnd type="none" w="med" len="med"/>
-                      <a:tailEnd type="none" w="med" len="med"/>
-                    </a:lnR>
-                    <a:lnT w="12700" cap="flat" cmpd="sng" algn="ctr">
-                      <a:solidFill>
-                        <a:srgbClr val="BFBFBF"/>
-                      </a:solidFill>
-                      <a:prstDash val="solid"/>
-                      <a:round/>
-                      <a:headEnd type="none" w="med" len="med"/>
-                      <a:tailEnd type="none" w="med" len="med"/>
-                    </a:lnT>
-                    <a:lnB w="12700" cap="flat" cmpd="sng" algn="ctr">
-                      <a:solidFill>
-                        <a:srgbClr val="BFBFBF"/>
-                      </a:solidFill>
-                      <a:prstDash val="solid"/>
-                      <a:round/>
-                      <a:headEnd type="none" w="med" len="med"/>
-                      <a:tailEnd type="none" w="med" len="med"/>
-                    </a:lnB>
-                  </a:tcPr>
-                </a:tc>
-                <a:tc hMerge="1">
-                  <a:txBody>
-                    <a:bodyPr/>
-                    <a:lstStyle/>
-                    <a:p>
-                      <a:endParaRPr lang="es-CL"/>
-                    </a:p>
-                  </a:txBody>
-                  <a:tcPr/>
-                </a:tc>
-                <a:tc>
-                  <a:txBody>
-                    <a:bodyPr/>
-                    <a:lstStyle/>
-                    <a:p>
-                      <a:pPr algn="just">
-                        <a:lnSpc>
-                          <a:spcPct val="150000"/>
-                        </a:lnSpc>
-                        <a:spcAft>
-                          <a:spcPts val="800"/>
-                        </a:spcAft>
-                      </a:pPr>
-                      <a:r>
-                        <a:rPr lang="es-CL" sz="800" b="1">
-                          <a:effectLst/>
-                          <a:latin typeface="Calibri" panose="020F0502020204030204" pitchFamily="34" charset="0"/>
-                          <a:ea typeface="Calibri" panose="020F0502020204030204" pitchFamily="34" charset="0"/>
-                          <a:cs typeface="Times New Roman" panose="02020603050405020304" pitchFamily="18" charset="0"/>
-                        </a:rPr>
-                        <a:t> </a:t>
-                      </a:r>
-                      <a:endParaRPr lang="es-CL" sz="1100">
-                        <a:effectLst/>
-                        <a:latin typeface="Calibri" panose="020F0502020204030204" pitchFamily="34" charset="0"/>
-                        <a:ea typeface="Calibri" panose="020F0502020204030204" pitchFamily="34" charset="0"/>
-                        <a:cs typeface="Times New Roman" panose="02020603050405020304" pitchFamily="18" charset="0"/>
-                      </a:endParaRPr>
                     </a:p>
                   </a:txBody>
                   <a:tcPr marL="68580" marR="68580" marT="0" marB="0">
@@ -13739,29 +15715,73 @@
                     <a:bodyPr/>
                     <a:lstStyle/>
                     <a:p>
-                      <a:pPr algn="just">
+                      <a:pPr marL="0" marR="0" lvl="0" indent="0" algn="ctr" defTabSz="914400" rtl="0" eaLnBrk="1" fontAlgn="auto" latinLnBrk="0" hangingPunct="1">
                         <a:lnSpc>
                           <a:spcPct val="150000"/>
                         </a:lnSpc>
+                        <a:spcBef>
+                          <a:spcPts val="0"/>
+                        </a:spcBef>
                         <a:spcAft>
                           <a:spcPts val="800"/>
                         </a:spcAft>
+                        <a:buClrTx/>
+                        <a:buSzTx/>
+                        <a:buFontTx/>
+                        <a:buNone/>
+                        <a:tabLst/>
+                        <a:defRPr/>
+                      </a:pPr>
+                      <a:endParaRPr kumimoji="0" lang="es-CL" sz="800" b="1" i="0" u="none" strike="noStrike" kern="1200" cap="none" spc="0" normalizeH="0" baseline="0" noProof="0" dirty="0">
+                        <a:ln>
+                          <a:noFill/>
+                        </a:ln>
+                        <a:solidFill>
+                          <a:prstClr val="black"/>
+                        </a:solidFill>
+                        <a:effectLst/>
+                        <a:uLnTx/>
+                        <a:uFillTx/>
+                        <a:latin typeface="Calibri" panose="020F0502020204030204" pitchFamily="34" charset="0"/>
+                        <a:ea typeface="Calibri" panose="020F0502020204030204" pitchFamily="34" charset="0"/>
+                        <a:cs typeface="Times New Roman" panose="02020603050405020304" pitchFamily="18" charset="0"/>
+                      </a:endParaRPr>
+                    </a:p>
+                    <a:p>
+                      <a:pPr marL="0" marR="0" lvl="0" indent="0" algn="ctr" defTabSz="914400" rtl="0" eaLnBrk="1" fontAlgn="auto" latinLnBrk="0" hangingPunct="1">
+                        <a:lnSpc>
+                          <a:spcPct val="150000"/>
+                        </a:lnSpc>
+                        <a:spcBef>
+                          <a:spcPts val="0"/>
+                        </a:spcBef>
+                        <a:spcAft>
+                          <a:spcPts val="800"/>
+                        </a:spcAft>
+                        <a:buClrTx/>
+                        <a:buSzTx/>
+                        <a:buFontTx/>
+                        <a:buNone/>
+                        <a:tabLst/>
+                        <a:defRPr/>
                       </a:pPr>
                       <a:r>
-                        <a:rPr lang="es-CL" sz="800" b="1">
+                        <a:rPr kumimoji="0" lang="es-CL" sz="800" b="1" i="0" u="none" strike="noStrike" kern="1200" cap="none" spc="0" normalizeH="0" baseline="0" noProof="0" dirty="0">
+                          <a:ln>
+                            <a:noFill/>
+                          </a:ln>
+                          <a:solidFill>
+                            <a:prstClr val="black"/>
+                          </a:solidFill>
                           <a:effectLst/>
+                          <a:uLnTx/>
+                          <a:uFillTx/>
                           <a:latin typeface="Calibri" panose="020F0502020204030204" pitchFamily="34" charset="0"/>
                           <a:ea typeface="Calibri" panose="020F0502020204030204" pitchFamily="34" charset="0"/>
                           <a:cs typeface="Times New Roman" panose="02020603050405020304" pitchFamily="18" charset="0"/>
                         </a:rPr>
-                        <a:t> </a:t>
+                        <a:t>X</a:t>
                       </a:r>
-                      <a:endParaRPr lang="es-CL" sz="1100">
-                        <a:effectLst/>
-                        <a:latin typeface="Calibri" panose="020F0502020204030204" pitchFamily="34" charset="0"/>
-                        <a:ea typeface="Calibri" panose="020F0502020204030204" pitchFamily="34" charset="0"/>
-                        <a:cs typeface="Times New Roman" panose="02020603050405020304" pitchFamily="18" charset="0"/>
-                      </a:endParaRPr>
                     </a:p>
                   </a:txBody>
                   <a:tcPr marL="68580" marR="68580" marT="0" marB="0">
@@ -13808,81 +15828,73 @@
                     <a:bodyPr/>
                     <a:lstStyle/>
                     <a:p>
-                      <a:pPr>
+                      <a:pPr marL="0" marR="0" lvl="0" indent="0" algn="ctr" defTabSz="914400" rtl="0" eaLnBrk="1" fontAlgn="auto" latinLnBrk="0" hangingPunct="1">
                         <a:lnSpc>
-                          <a:spcPct val="107000"/>
+                          <a:spcPct val="150000"/>
                         </a:lnSpc>
+                        <a:spcBef>
+                          <a:spcPts val="0"/>
+                        </a:spcBef>
                         <a:spcAft>
                           <a:spcPts val="800"/>
                         </a:spcAft>
+                        <a:buClrTx/>
+                        <a:buSzTx/>
+                        <a:buFontTx/>
+                        <a:buNone/>
+                        <a:tabLst/>
+                        <a:defRPr/>
+                      </a:pPr>
+                      <a:endParaRPr kumimoji="0" lang="es-CL" sz="800" b="1" i="0" u="none" strike="noStrike" kern="1200" cap="none" spc="0" normalizeH="0" baseline="0" noProof="0" dirty="0">
+                        <a:ln>
+                          <a:noFill/>
+                        </a:ln>
+                        <a:solidFill>
+                          <a:prstClr val="black"/>
+                        </a:solidFill>
+                        <a:effectLst/>
+                        <a:uLnTx/>
+                        <a:uFillTx/>
+                        <a:latin typeface="Calibri" panose="020F0502020204030204" pitchFamily="34" charset="0"/>
+                        <a:ea typeface="Calibri" panose="020F0502020204030204" pitchFamily="34" charset="0"/>
+                        <a:cs typeface="Times New Roman" panose="02020603050405020304" pitchFamily="18" charset="0"/>
+                      </a:endParaRPr>
+                    </a:p>
+                    <a:p>
+                      <a:pPr marL="0" marR="0" lvl="0" indent="0" algn="ctr" defTabSz="914400" rtl="0" eaLnBrk="1" fontAlgn="auto" latinLnBrk="0" hangingPunct="1">
+                        <a:lnSpc>
+                          <a:spcPct val="150000"/>
+                        </a:lnSpc>
+                        <a:spcBef>
+                          <a:spcPts val="0"/>
+                        </a:spcBef>
+                        <a:spcAft>
+                          <a:spcPts val="800"/>
+                        </a:spcAft>
+                        <a:buClrTx/>
+                        <a:buSzTx/>
+                        <a:buFontTx/>
+                        <a:buNone/>
+                        <a:tabLst/>
+                        <a:defRPr/>
                       </a:pPr>
                       <a:r>
-                        <a:rPr lang="es-CL" sz="1100">
+                        <a:rPr kumimoji="0" lang="es-CL" sz="800" b="1" i="0" u="none" strike="noStrike" kern="1200" cap="none" spc="0" normalizeH="0" baseline="0" noProof="0" dirty="0">
+                          <a:ln>
+                            <a:noFill/>
+                          </a:ln>
+                          <a:solidFill>
+                            <a:prstClr val="black"/>
+                          </a:solidFill>
                           <a:effectLst/>
+                          <a:uLnTx/>
+                          <a:uFillTx/>
                           <a:latin typeface="Calibri" panose="020F0502020204030204" pitchFamily="34" charset="0"/>
                           <a:ea typeface="Calibri" panose="020F0502020204030204" pitchFamily="34" charset="0"/>
                           <a:cs typeface="Times New Roman" panose="02020603050405020304" pitchFamily="18" charset="0"/>
                         </a:rPr>
-                        <a:t> </a:t>
+                        <a:t>X</a:t>
                       </a:r>
-                    </a:p>
-                  </a:txBody>
-                  <a:tcPr marL="0" marR="0" marT="0" marB="0" anchor="ctr">
-                    <a:lnL w="12700" cap="flat" cmpd="sng" algn="ctr">
-                      <a:solidFill>
-                        <a:srgbClr val="BFBFBF"/>
-                      </a:solidFill>
-                      <a:prstDash val="solid"/>
-                      <a:round/>
-                      <a:headEnd type="none" w="med" len="med"/>
-                      <a:tailEnd type="none" w="med" len="med"/>
-                    </a:lnL>
-                    <a:lnR>
-                      <a:noFill/>
-                    </a:lnR>
-                    <a:lnT>
-                      <a:noFill/>
-                    </a:lnT>
-                    <a:lnB>
-                      <a:noFill/>
-                    </a:lnB>
-                  </a:tcPr>
-                </a:tc>
-                <a:extLst>
-                  <a:ext uri="{0D108BD9-81ED-4DB2-BD59-A6C34878D82A}">
-                    <a16:rowId xmlns:a16="http://schemas.microsoft.com/office/drawing/2014/main" val="3031361947"/>
-                  </a:ext>
-                </a:extLst>
-              </a:tr>
-              <a:tr h="524466">
-                <a:tc>
-                  <a:txBody>
-                    <a:bodyPr/>
-                    <a:lstStyle/>
-                    <a:p>
-                      <a:pPr algn="just">
-                        <a:lnSpc>
-                          <a:spcPct val="150000"/>
-                        </a:lnSpc>
-                        <a:spcAft>
-                          <a:spcPts val="800"/>
-                        </a:spcAft>
-                      </a:pPr>
-                      <a:r>
-                        <a:rPr lang="es-CL" sz="800" b="1">
-                          <a:effectLst/>
-                          <a:latin typeface="Calibri" panose="020F0502020204030204" pitchFamily="34" charset="0"/>
-                          <a:ea typeface="Calibri" panose="020F0502020204030204" pitchFamily="34" charset="0"/>
-                          <a:cs typeface="Times New Roman" panose="02020603050405020304" pitchFamily="18" charset="0"/>
-                        </a:rPr>
-                        <a:t> </a:t>
-                      </a:r>
-                      <a:endParaRPr lang="es-CL" sz="1100">
-                        <a:effectLst/>
-                        <a:latin typeface="Calibri" panose="020F0502020204030204" pitchFamily="34" charset="0"/>
-                        <a:ea typeface="Calibri" panose="020F0502020204030204" pitchFamily="34" charset="0"/>
-                        <a:cs typeface="Times New Roman" panose="02020603050405020304" pitchFamily="18" charset="0"/>
-                      </a:endParaRPr>
                     </a:p>
                   </a:txBody>
                   <a:tcPr marL="68580" marR="68580" marT="0" marB="0">
@@ -13929,1212 +15941,73 @@
                     <a:bodyPr/>
                     <a:lstStyle/>
                     <a:p>
-                      <a:pPr algn="just">
+                      <a:pPr marL="0" marR="0" lvl="0" indent="0" algn="ctr" defTabSz="914400" rtl="0" eaLnBrk="1" fontAlgn="auto" latinLnBrk="0" hangingPunct="1">
                         <a:lnSpc>
                           <a:spcPct val="150000"/>
                         </a:lnSpc>
+                        <a:spcBef>
+                          <a:spcPts val="0"/>
+                        </a:spcBef>
                         <a:spcAft>
                           <a:spcPts val="800"/>
                         </a:spcAft>
+                        <a:buClrTx/>
+                        <a:buSzTx/>
+                        <a:buFontTx/>
+                        <a:buNone/>
+                        <a:tabLst/>
+                        <a:defRPr/>
                       </a:pPr>
-                      <a:r>
-                        <a:rPr lang="es-CL" sz="800" b="1">
-                          <a:effectLst/>
-                          <a:latin typeface="Calibri" panose="020F0502020204030204" pitchFamily="34" charset="0"/>
-                          <a:ea typeface="Calibri" panose="020F0502020204030204" pitchFamily="34" charset="0"/>
-                          <a:cs typeface="Times New Roman" panose="02020603050405020304" pitchFamily="18" charset="0"/>
-                        </a:rPr>
-                        <a:t> </a:t>
-                      </a:r>
-                      <a:endParaRPr lang="es-CL" sz="1100">
+                      <a:endParaRPr kumimoji="0" lang="es-CL" sz="800" b="1" i="0" u="none" strike="noStrike" kern="1200" cap="none" spc="0" normalizeH="0" baseline="0" noProof="0" dirty="0">
+                        <a:ln>
+                          <a:noFill/>
+                        </a:ln>
+                        <a:solidFill>
+                          <a:prstClr val="black"/>
+                        </a:solidFill>
                         <a:effectLst/>
+                        <a:uLnTx/>
+                        <a:uFillTx/>
                         <a:latin typeface="Calibri" panose="020F0502020204030204" pitchFamily="34" charset="0"/>
                         <a:ea typeface="Calibri" panose="020F0502020204030204" pitchFamily="34" charset="0"/>
                         <a:cs typeface="Times New Roman" panose="02020603050405020304" pitchFamily="18" charset="0"/>
                       </a:endParaRPr>
                     </a:p>
-                  </a:txBody>
-                  <a:tcPr marL="68580" marR="68580" marT="0" marB="0">
-                    <a:lnL w="12700" cap="flat" cmpd="sng" algn="ctr">
-                      <a:solidFill>
-                        <a:srgbClr val="BFBFBF"/>
-                      </a:solidFill>
-                      <a:prstDash val="solid"/>
-                      <a:round/>
-                      <a:headEnd type="none" w="med" len="med"/>
-                      <a:tailEnd type="none" w="med" len="med"/>
-                    </a:lnL>
-                    <a:lnR w="12700" cap="flat" cmpd="sng" algn="ctr">
-                      <a:solidFill>
-                        <a:srgbClr val="BFBFBF"/>
-                      </a:solidFill>
-                      <a:prstDash val="solid"/>
-                      <a:round/>
-                      <a:headEnd type="none" w="med" len="med"/>
-                      <a:tailEnd type="none" w="med" len="med"/>
-                    </a:lnR>
-                    <a:lnT w="12700" cap="flat" cmpd="sng" algn="ctr">
-                      <a:solidFill>
-                        <a:srgbClr val="BFBFBF"/>
-                      </a:solidFill>
-                      <a:prstDash val="solid"/>
-                      <a:round/>
-                      <a:headEnd type="none" w="med" len="med"/>
-                      <a:tailEnd type="none" w="med" len="med"/>
-                    </a:lnT>
-                    <a:lnB w="12700" cap="flat" cmpd="sng" algn="ctr">
-                      <a:solidFill>
-                        <a:srgbClr val="BFBFBF"/>
-                      </a:solidFill>
-                      <a:prstDash val="solid"/>
-                      <a:round/>
-                      <a:headEnd type="none" w="med" len="med"/>
-                      <a:tailEnd type="none" w="med" len="med"/>
-                    </a:lnB>
-                  </a:tcPr>
-                </a:tc>
-                <a:tc>
-                  <a:txBody>
-                    <a:bodyPr/>
-                    <a:lstStyle/>
                     <a:p>
-                      <a:pPr algn="just">
+                      <a:pPr marL="0" marR="0" lvl="0" indent="0" algn="ctr" defTabSz="914400" rtl="0" eaLnBrk="1" fontAlgn="auto" latinLnBrk="0" hangingPunct="1">
                         <a:lnSpc>
                           <a:spcPct val="150000"/>
                         </a:lnSpc>
+                        <a:spcBef>
+                          <a:spcPts val="0"/>
+                        </a:spcBef>
                         <a:spcAft>
                           <a:spcPts val="800"/>
                         </a:spcAft>
+                        <a:buClrTx/>
+                        <a:buSzTx/>
+                        <a:buFontTx/>
+                        <a:buNone/>
+                        <a:tabLst/>
+                        <a:defRPr/>
                       </a:pPr>
                       <a:r>
-                        <a:rPr lang="es-CL" sz="800" b="1">
+                        <a:rPr kumimoji="0" lang="es-CL" sz="800" b="1" i="0" u="none" strike="noStrike" kern="1200" cap="none" spc="0" normalizeH="0" baseline="0" noProof="0" dirty="0">
+                          <a:ln>
+                            <a:noFill/>
+                          </a:ln>
+                          <a:solidFill>
+                            <a:prstClr val="black"/>
+                          </a:solidFill>
                           <a:effectLst/>
+                          <a:uLnTx/>
+                          <a:uFillTx/>
                           <a:latin typeface="Calibri" panose="020F0502020204030204" pitchFamily="34" charset="0"/>
                           <a:ea typeface="Calibri" panose="020F0502020204030204" pitchFamily="34" charset="0"/>
                           <a:cs typeface="Times New Roman" panose="02020603050405020304" pitchFamily="18" charset="0"/>
                         </a:rPr>
-                        <a:t> </a:t>
+                        <a:t>X</a:t>
                       </a:r>
-                      <a:endParaRPr lang="es-CL" sz="1100">
-                        <a:effectLst/>
-                        <a:latin typeface="Calibri" panose="020F0502020204030204" pitchFamily="34" charset="0"/>
-                        <a:ea typeface="Calibri" panose="020F0502020204030204" pitchFamily="34" charset="0"/>
-                        <a:cs typeface="Times New Roman" panose="02020603050405020304" pitchFamily="18" charset="0"/>
-                      </a:endParaRPr>
-                    </a:p>
-                  </a:txBody>
-                  <a:tcPr marL="68580" marR="68580" marT="0" marB="0">
-                    <a:lnL w="12700" cap="flat" cmpd="sng" algn="ctr">
-                      <a:solidFill>
-                        <a:srgbClr val="BFBFBF"/>
-                      </a:solidFill>
-                      <a:prstDash val="solid"/>
-                      <a:round/>
-                      <a:headEnd type="none" w="med" len="med"/>
-                      <a:tailEnd type="none" w="med" len="med"/>
-                    </a:lnL>
-                    <a:lnR w="12700" cap="flat" cmpd="sng" algn="ctr">
-                      <a:solidFill>
-                        <a:srgbClr val="BFBFBF"/>
-                      </a:solidFill>
-                      <a:prstDash val="solid"/>
-                      <a:round/>
-                      <a:headEnd type="none" w="med" len="med"/>
-                      <a:tailEnd type="none" w="med" len="med"/>
-                    </a:lnR>
-                    <a:lnT w="12700" cap="flat" cmpd="sng" algn="ctr">
-                      <a:solidFill>
-                        <a:srgbClr val="BFBFBF"/>
-                      </a:solidFill>
-                      <a:prstDash val="solid"/>
-                      <a:round/>
-                      <a:headEnd type="none" w="med" len="med"/>
-                      <a:tailEnd type="none" w="med" len="med"/>
-                    </a:lnT>
-                    <a:lnB w="12700" cap="flat" cmpd="sng" algn="ctr">
-                      <a:solidFill>
-                        <a:srgbClr val="BFBFBF"/>
-                      </a:solidFill>
-                      <a:prstDash val="solid"/>
-                      <a:round/>
-                      <a:headEnd type="none" w="med" len="med"/>
-                      <a:tailEnd type="none" w="med" len="med"/>
-                    </a:lnB>
-                  </a:tcPr>
-                </a:tc>
-                <a:tc>
-                  <a:txBody>
-                    <a:bodyPr/>
-                    <a:lstStyle/>
-                    <a:p>
-                      <a:pPr algn="just">
-                        <a:lnSpc>
-                          <a:spcPct val="150000"/>
-                        </a:lnSpc>
-                        <a:spcAft>
-                          <a:spcPts val="800"/>
-                        </a:spcAft>
-                      </a:pPr>
-                      <a:r>
-                        <a:rPr lang="es-CL" sz="800" b="1">
-                          <a:effectLst/>
-                          <a:latin typeface="Calibri" panose="020F0502020204030204" pitchFamily="34" charset="0"/>
-                          <a:ea typeface="Calibri" panose="020F0502020204030204" pitchFamily="34" charset="0"/>
-                          <a:cs typeface="Times New Roman" panose="02020603050405020304" pitchFamily="18" charset="0"/>
-                        </a:rPr>
-                        <a:t> </a:t>
-                      </a:r>
-                      <a:endParaRPr lang="es-CL" sz="1100">
-                        <a:effectLst/>
-                        <a:latin typeface="Calibri" panose="020F0502020204030204" pitchFamily="34" charset="0"/>
-                        <a:ea typeface="Calibri" panose="020F0502020204030204" pitchFamily="34" charset="0"/>
-                        <a:cs typeface="Times New Roman" panose="02020603050405020304" pitchFamily="18" charset="0"/>
-                      </a:endParaRPr>
-                    </a:p>
-                  </a:txBody>
-                  <a:tcPr marL="68580" marR="68580" marT="0" marB="0">
-                    <a:lnL w="12700" cap="flat" cmpd="sng" algn="ctr">
-                      <a:solidFill>
-                        <a:srgbClr val="BFBFBF"/>
-                      </a:solidFill>
-                      <a:prstDash val="solid"/>
-                      <a:round/>
-                      <a:headEnd type="none" w="med" len="med"/>
-                      <a:tailEnd type="none" w="med" len="med"/>
-                    </a:lnL>
-                    <a:lnR w="12700" cap="flat" cmpd="sng" algn="ctr">
-                      <a:solidFill>
-                        <a:srgbClr val="BFBFBF"/>
-                      </a:solidFill>
-                      <a:prstDash val="solid"/>
-                      <a:round/>
-                      <a:headEnd type="none" w="med" len="med"/>
-                      <a:tailEnd type="none" w="med" len="med"/>
-                    </a:lnR>
-                    <a:lnT w="12700" cap="flat" cmpd="sng" algn="ctr">
-                      <a:solidFill>
-                        <a:srgbClr val="BFBFBF"/>
-                      </a:solidFill>
-                      <a:prstDash val="solid"/>
-                      <a:round/>
-                      <a:headEnd type="none" w="med" len="med"/>
-                      <a:tailEnd type="none" w="med" len="med"/>
-                    </a:lnT>
-                    <a:lnB w="12700" cap="flat" cmpd="sng" algn="ctr">
-                      <a:solidFill>
-                        <a:srgbClr val="BFBFBF"/>
-                      </a:solidFill>
-                      <a:prstDash val="solid"/>
-                      <a:round/>
-                      <a:headEnd type="none" w="med" len="med"/>
-                      <a:tailEnd type="none" w="med" len="med"/>
-                    </a:lnB>
-                  </a:tcPr>
-                </a:tc>
-                <a:tc>
-                  <a:txBody>
-                    <a:bodyPr/>
-                    <a:lstStyle/>
-                    <a:p>
-                      <a:pPr algn="just">
-                        <a:lnSpc>
-                          <a:spcPct val="150000"/>
-                        </a:lnSpc>
-                        <a:spcAft>
-                          <a:spcPts val="800"/>
-                        </a:spcAft>
-                      </a:pPr>
-                      <a:r>
-                        <a:rPr lang="es-CL" sz="800" b="1">
-                          <a:effectLst/>
-                          <a:latin typeface="Calibri" panose="020F0502020204030204" pitchFamily="34" charset="0"/>
-                          <a:ea typeface="Calibri" panose="020F0502020204030204" pitchFamily="34" charset="0"/>
-                          <a:cs typeface="Times New Roman" panose="02020603050405020304" pitchFamily="18" charset="0"/>
-                        </a:rPr>
-                        <a:t> </a:t>
-                      </a:r>
-                      <a:endParaRPr lang="es-CL" sz="1100">
-                        <a:effectLst/>
-                        <a:latin typeface="Calibri" panose="020F0502020204030204" pitchFamily="34" charset="0"/>
-                        <a:ea typeface="Calibri" panose="020F0502020204030204" pitchFamily="34" charset="0"/>
-                        <a:cs typeface="Times New Roman" panose="02020603050405020304" pitchFamily="18" charset="0"/>
-                      </a:endParaRPr>
-                    </a:p>
-                  </a:txBody>
-                  <a:tcPr marL="68580" marR="68580" marT="0" marB="0">
-                    <a:lnL w="12700" cap="flat" cmpd="sng" algn="ctr">
-                      <a:solidFill>
-                        <a:srgbClr val="BFBFBF"/>
-                      </a:solidFill>
-                      <a:prstDash val="solid"/>
-                      <a:round/>
-                      <a:headEnd type="none" w="med" len="med"/>
-                      <a:tailEnd type="none" w="med" len="med"/>
-                    </a:lnL>
-                    <a:lnR w="12700" cap="flat" cmpd="sng" algn="ctr">
-                      <a:solidFill>
-                        <a:srgbClr val="BFBFBF"/>
-                      </a:solidFill>
-                      <a:prstDash val="solid"/>
-                      <a:round/>
-                      <a:headEnd type="none" w="med" len="med"/>
-                      <a:tailEnd type="none" w="med" len="med"/>
-                    </a:lnR>
-                    <a:lnT w="12700" cap="flat" cmpd="sng" algn="ctr">
-                      <a:solidFill>
-                        <a:srgbClr val="BFBFBF"/>
-                      </a:solidFill>
-                      <a:prstDash val="solid"/>
-                      <a:round/>
-                      <a:headEnd type="none" w="med" len="med"/>
-                      <a:tailEnd type="none" w="med" len="med"/>
-                    </a:lnT>
-                    <a:lnB w="12700" cap="flat" cmpd="sng" algn="ctr">
-                      <a:solidFill>
-                        <a:srgbClr val="BFBFBF"/>
-                      </a:solidFill>
-                      <a:prstDash val="solid"/>
-                      <a:round/>
-                      <a:headEnd type="none" w="med" len="med"/>
-                      <a:tailEnd type="none" w="med" len="med"/>
-                    </a:lnB>
-                  </a:tcPr>
-                </a:tc>
-                <a:tc>
-                  <a:txBody>
-                    <a:bodyPr/>
-                    <a:lstStyle/>
-                    <a:p>
-                      <a:pPr algn="just">
-                        <a:lnSpc>
-                          <a:spcPct val="150000"/>
-                        </a:lnSpc>
-                        <a:spcAft>
-                          <a:spcPts val="800"/>
-                        </a:spcAft>
-                      </a:pPr>
-                      <a:r>
-                        <a:rPr lang="es-CL" sz="800" b="1">
-                          <a:effectLst/>
-                          <a:latin typeface="Calibri" panose="020F0502020204030204" pitchFamily="34" charset="0"/>
-                          <a:ea typeface="Calibri" panose="020F0502020204030204" pitchFamily="34" charset="0"/>
-                          <a:cs typeface="Times New Roman" panose="02020603050405020304" pitchFamily="18" charset="0"/>
-                        </a:rPr>
-                        <a:t> </a:t>
-                      </a:r>
-                      <a:endParaRPr lang="es-CL" sz="1100">
-                        <a:effectLst/>
-                        <a:latin typeface="Calibri" panose="020F0502020204030204" pitchFamily="34" charset="0"/>
-                        <a:ea typeface="Calibri" panose="020F0502020204030204" pitchFamily="34" charset="0"/>
-                        <a:cs typeface="Times New Roman" panose="02020603050405020304" pitchFamily="18" charset="0"/>
-                      </a:endParaRPr>
-                    </a:p>
-                  </a:txBody>
-                  <a:tcPr marL="68580" marR="68580" marT="0" marB="0">
-                    <a:lnL w="12700" cap="flat" cmpd="sng" algn="ctr">
-                      <a:solidFill>
-                        <a:srgbClr val="BFBFBF"/>
-                      </a:solidFill>
-                      <a:prstDash val="solid"/>
-                      <a:round/>
-                      <a:headEnd type="none" w="med" len="med"/>
-                      <a:tailEnd type="none" w="med" len="med"/>
-                    </a:lnL>
-                    <a:lnR w="12700" cap="flat" cmpd="sng" algn="ctr">
-                      <a:solidFill>
-                        <a:srgbClr val="BFBFBF"/>
-                      </a:solidFill>
-                      <a:prstDash val="solid"/>
-                      <a:round/>
-                      <a:headEnd type="none" w="med" len="med"/>
-                      <a:tailEnd type="none" w="med" len="med"/>
-                    </a:lnR>
-                    <a:lnT w="12700" cap="flat" cmpd="sng" algn="ctr">
-                      <a:solidFill>
-                        <a:srgbClr val="BFBFBF"/>
-                      </a:solidFill>
-                      <a:prstDash val="solid"/>
-                      <a:round/>
-                      <a:headEnd type="none" w="med" len="med"/>
-                      <a:tailEnd type="none" w="med" len="med"/>
-                    </a:lnT>
-                    <a:lnB w="12700" cap="flat" cmpd="sng" algn="ctr">
-                      <a:solidFill>
-                        <a:srgbClr val="BFBFBF"/>
-                      </a:solidFill>
-                      <a:prstDash val="solid"/>
-                      <a:round/>
-                      <a:headEnd type="none" w="med" len="med"/>
-                      <a:tailEnd type="none" w="med" len="med"/>
-                    </a:lnB>
-                  </a:tcPr>
-                </a:tc>
-                <a:tc>
-                  <a:txBody>
-                    <a:bodyPr/>
-                    <a:lstStyle/>
-                    <a:p>
-                      <a:pPr algn="just">
-                        <a:lnSpc>
-                          <a:spcPct val="150000"/>
-                        </a:lnSpc>
-                        <a:spcAft>
-                          <a:spcPts val="800"/>
-                        </a:spcAft>
-                      </a:pPr>
-                      <a:r>
-                        <a:rPr lang="es-CL" sz="800" b="1">
-                          <a:effectLst/>
-                          <a:latin typeface="Calibri" panose="020F0502020204030204" pitchFamily="34" charset="0"/>
-                          <a:ea typeface="Calibri" panose="020F0502020204030204" pitchFamily="34" charset="0"/>
-                          <a:cs typeface="Times New Roman" panose="02020603050405020304" pitchFamily="18" charset="0"/>
-                        </a:rPr>
-                        <a:t> </a:t>
-                      </a:r>
-                      <a:endParaRPr lang="es-CL" sz="1100">
-                        <a:effectLst/>
-                        <a:latin typeface="Calibri" panose="020F0502020204030204" pitchFamily="34" charset="0"/>
-                        <a:ea typeface="Calibri" panose="020F0502020204030204" pitchFamily="34" charset="0"/>
-                        <a:cs typeface="Times New Roman" panose="02020603050405020304" pitchFamily="18" charset="0"/>
-                      </a:endParaRPr>
-                    </a:p>
-                  </a:txBody>
-                  <a:tcPr marL="68580" marR="68580" marT="0" marB="0">
-                    <a:lnL w="12700" cap="flat" cmpd="sng" algn="ctr">
-                      <a:solidFill>
-                        <a:srgbClr val="BFBFBF"/>
-                      </a:solidFill>
-                      <a:prstDash val="solid"/>
-                      <a:round/>
-                      <a:headEnd type="none" w="med" len="med"/>
-                      <a:tailEnd type="none" w="med" len="med"/>
-                    </a:lnL>
-                    <a:lnR w="12700" cap="flat" cmpd="sng" algn="ctr">
-                      <a:solidFill>
-                        <a:srgbClr val="BFBFBF"/>
-                      </a:solidFill>
-                      <a:prstDash val="solid"/>
-                      <a:round/>
-                      <a:headEnd type="none" w="med" len="med"/>
-                      <a:tailEnd type="none" w="med" len="med"/>
-                    </a:lnR>
-                    <a:lnT w="12700" cap="flat" cmpd="sng" algn="ctr">
-                      <a:solidFill>
-                        <a:srgbClr val="BFBFBF"/>
-                      </a:solidFill>
-                      <a:prstDash val="solid"/>
-                      <a:round/>
-                      <a:headEnd type="none" w="med" len="med"/>
-                      <a:tailEnd type="none" w="med" len="med"/>
-                    </a:lnT>
-                    <a:lnB w="12700" cap="flat" cmpd="sng" algn="ctr">
-                      <a:solidFill>
-                        <a:srgbClr val="BFBFBF"/>
-                      </a:solidFill>
-                      <a:prstDash val="solid"/>
-                      <a:round/>
-                      <a:headEnd type="none" w="med" len="med"/>
-                      <a:tailEnd type="none" w="med" len="med"/>
-                    </a:lnB>
-                  </a:tcPr>
-                </a:tc>
-                <a:tc>
-                  <a:txBody>
-                    <a:bodyPr/>
-                    <a:lstStyle/>
-                    <a:p>
-                      <a:pPr algn="just">
-                        <a:lnSpc>
-                          <a:spcPct val="150000"/>
-                        </a:lnSpc>
-                        <a:spcAft>
-                          <a:spcPts val="800"/>
-                        </a:spcAft>
-                      </a:pPr>
-                      <a:r>
-                        <a:rPr lang="es-CL" sz="800" b="1">
-                          <a:effectLst/>
-                          <a:latin typeface="Calibri" panose="020F0502020204030204" pitchFamily="34" charset="0"/>
-                          <a:ea typeface="Calibri" panose="020F0502020204030204" pitchFamily="34" charset="0"/>
-                          <a:cs typeface="Times New Roman" panose="02020603050405020304" pitchFamily="18" charset="0"/>
-                        </a:rPr>
-                        <a:t> </a:t>
-                      </a:r>
-                      <a:endParaRPr lang="es-CL" sz="1100">
-                        <a:effectLst/>
-                        <a:latin typeface="Calibri" panose="020F0502020204030204" pitchFamily="34" charset="0"/>
-                        <a:ea typeface="Calibri" panose="020F0502020204030204" pitchFamily="34" charset="0"/>
-                        <a:cs typeface="Times New Roman" panose="02020603050405020304" pitchFamily="18" charset="0"/>
-                      </a:endParaRPr>
-                    </a:p>
-                  </a:txBody>
-                  <a:tcPr marL="68580" marR="68580" marT="0" marB="0">
-                    <a:lnL w="12700" cap="flat" cmpd="sng" algn="ctr">
-                      <a:solidFill>
-                        <a:srgbClr val="BFBFBF"/>
-                      </a:solidFill>
-                      <a:prstDash val="solid"/>
-                      <a:round/>
-                      <a:headEnd type="none" w="med" len="med"/>
-                      <a:tailEnd type="none" w="med" len="med"/>
-                    </a:lnL>
-                    <a:lnR w="12700" cap="flat" cmpd="sng" algn="ctr">
-                      <a:solidFill>
-                        <a:srgbClr val="BFBFBF"/>
-                      </a:solidFill>
-                      <a:prstDash val="solid"/>
-                      <a:round/>
-                      <a:headEnd type="none" w="med" len="med"/>
-                      <a:tailEnd type="none" w="med" len="med"/>
-                    </a:lnR>
-                    <a:lnT w="12700" cap="flat" cmpd="sng" algn="ctr">
-                      <a:solidFill>
-                        <a:srgbClr val="BFBFBF"/>
-                      </a:solidFill>
-                      <a:prstDash val="solid"/>
-                      <a:round/>
-                      <a:headEnd type="none" w="med" len="med"/>
-                      <a:tailEnd type="none" w="med" len="med"/>
-                    </a:lnT>
-                    <a:lnB w="12700" cap="flat" cmpd="sng" algn="ctr">
-                      <a:solidFill>
-                        <a:srgbClr val="BFBFBF"/>
-                      </a:solidFill>
-                      <a:prstDash val="solid"/>
-                      <a:round/>
-                      <a:headEnd type="none" w="med" len="med"/>
-                      <a:tailEnd type="none" w="med" len="med"/>
-                    </a:lnB>
-                  </a:tcPr>
-                </a:tc>
-                <a:tc>
-                  <a:txBody>
-                    <a:bodyPr/>
-                    <a:lstStyle/>
-                    <a:p>
-                      <a:pPr algn="just">
-                        <a:lnSpc>
-                          <a:spcPct val="150000"/>
-                        </a:lnSpc>
-                        <a:spcAft>
-                          <a:spcPts val="800"/>
-                        </a:spcAft>
-                      </a:pPr>
-                      <a:r>
-                        <a:rPr lang="es-CL" sz="800" b="1">
-                          <a:effectLst/>
-                          <a:latin typeface="Calibri" panose="020F0502020204030204" pitchFamily="34" charset="0"/>
-                          <a:ea typeface="Calibri" panose="020F0502020204030204" pitchFamily="34" charset="0"/>
-                          <a:cs typeface="Times New Roman" panose="02020603050405020304" pitchFamily="18" charset="0"/>
-                        </a:rPr>
-                        <a:t> </a:t>
-                      </a:r>
-                      <a:endParaRPr lang="es-CL" sz="1100">
-                        <a:effectLst/>
-                        <a:latin typeface="Calibri" panose="020F0502020204030204" pitchFamily="34" charset="0"/>
-                        <a:ea typeface="Calibri" panose="020F0502020204030204" pitchFamily="34" charset="0"/>
-                        <a:cs typeface="Times New Roman" panose="02020603050405020304" pitchFamily="18" charset="0"/>
-                      </a:endParaRPr>
-                    </a:p>
-                  </a:txBody>
-                  <a:tcPr marL="68580" marR="68580" marT="0" marB="0">
-                    <a:lnL w="12700" cap="flat" cmpd="sng" algn="ctr">
-                      <a:solidFill>
-                        <a:srgbClr val="BFBFBF"/>
-                      </a:solidFill>
-                      <a:prstDash val="solid"/>
-                      <a:round/>
-                      <a:headEnd type="none" w="med" len="med"/>
-                      <a:tailEnd type="none" w="med" len="med"/>
-                    </a:lnL>
-                    <a:lnR w="12700" cap="flat" cmpd="sng" algn="ctr">
-                      <a:solidFill>
-                        <a:srgbClr val="BFBFBF"/>
-                      </a:solidFill>
-                      <a:prstDash val="solid"/>
-                      <a:round/>
-                      <a:headEnd type="none" w="med" len="med"/>
-                      <a:tailEnd type="none" w="med" len="med"/>
-                    </a:lnR>
-                    <a:lnT w="12700" cap="flat" cmpd="sng" algn="ctr">
-                      <a:solidFill>
-                        <a:srgbClr val="BFBFBF"/>
-                      </a:solidFill>
-                      <a:prstDash val="solid"/>
-                      <a:round/>
-                      <a:headEnd type="none" w="med" len="med"/>
-                      <a:tailEnd type="none" w="med" len="med"/>
-                    </a:lnT>
-                    <a:lnB w="12700" cap="flat" cmpd="sng" algn="ctr">
-                      <a:solidFill>
-                        <a:srgbClr val="BFBFBF"/>
-                      </a:solidFill>
-                      <a:prstDash val="solid"/>
-                      <a:round/>
-                      <a:headEnd type="none" w="med" len="med"/>
-                      <a:tailEnd type="none" w="med" len="med"/>
-                    </a:lnB>
-                  </a:tcPr>
-                </a:tc>
-                <a:tc>
-                  <a:txBody>
-                    <a:bodyPr/>
-                    <a:lstStyle/>
-                    <a:p>
-                      <a:pPr algn="just">
-                        <a:lnSpc>
-                          <a:spcPct val="150000"/>
-                        </a:lnSpc>
-                        <a:spcAft>
-                          <a:spcPts val="800"/>
-                        </a:spcAft>
-                      </a:pPr>
-                      <a:r>
-                        <a:rPr lang="es-CL" sz="800" b="1">
-                          <a:effectLst/>
-                          <a:latin typeface="Calibri" panose="020F0502020204030204" pitchFamily="34" charset="0"/>
-                          <a:ea typeface="Calibri" panose="020F0502020204030204" pitchFamily="34" charset="0"/>
-                          <a:cs typeface="Times New Roman" panose="02020603050405020304" pitchFamily="18" charset="0"/>
-                        </a:rPr>
-                        <a:t> </a:t>
-                      </a:r>
-                      <a:endParaRPr lang="es-CL" sz="1100">
-                        <a:effectLst/>
-                        <a:latin typeface="Calibri" panose="020F0502020204030204" pitchFamily="34" charset="0"/>
-                        <a:ea typeface="Calibri" panose="020F0502020204030204" pitchFamily="34" charset="0"/>
-                        <a:cs typeface="Times New Roman" panose="02020603050405020304" pitchFamily="18" charset="0"/>
-                      </a:endParaRPr>
-                    </a:p>
-                  </a:txBody>
-                  <a:tcPr marL="68580" marR="68580" marT="0" marB="0">
-                    <a:lnL w="12700" cap="flat" cmpd="sng" algn="ctr">
-                      <a:solidFill>
-                        <a:srgbClr val="BFBFBF"/>
-                      </a:solidFill>
-                      <a:prstDash val="solid"/>
-                      <a:round/>
-                      <a:headEnd type="none" w="med" len="med"/>
-                      <a:tailEnd type="none" w="med" len="med"/>
-                    </a:lnL>
-                    <a:lnR w="12700" cap="flat" cmpd="sng" algn="ctr">
-                      <a:solidFill>
-                        <a:srgbClr val="BFBFBF"/>
-                      </a:solidFill>
-                      <a:prstDash val="solid"/>
-                      <a:round/>
-                      <a:headEnd type="none" w="med" len="med"/>
-                      <a:tailEnd type="none" w="med" len="med"/>
-                    </a:lnR>
-                    <a:lnT w="12700" cap="flat" cmpd="sng" algn="ctr">
-                      <a:solidFill>
-                        <a:srgbClr val="BFBFBF"/>
-                      </a:solidFill>
-                      <a:prstDash val="solid"/>
-                      <a:round/>
-                      <a:headEnd type="none" w="med" len="med"/>
-                      <a:tailEnd type="none" w="med" len="med"/>
-                    </a:lnT>
-                    <a:lnB w="12700" cap="flat" cmpd="sng" algn="ctr">
-                      <a:solidFill>
-                        <a:srgbClr val="BFBFBF"/>
-                      </a:solidFill>
-                      <a:prstDash val="solid"/>
-                      <a:round/>
-                      <a:headEnd type="none" w="med" len="med"/>
-                      <a:tailEnd type="none" w="med" len="med"/>
-                    </a:lnB>
-                  </a:tcPr>
-                </a:tc>
-                <a:tc>
-                  <a:txBody>
-                    <a:bodyPr/>
-                    <a:lstStyle/>
-                    <a:p>
-                      <a:pPr algn="just">
-                        <a:lnSpc>
-                          <a:spcPct val="150000"/>
-                        </a:lnSpc>
-                        <a:spcAft>
-                          <a:spcPts val="800"/>
-                        </a:spcAft>
-                      </a:pPr>
-                      <a:r>
-                        <a:rPr lang="es-CL" sz="800" b="1">
-                          <a:effectLst/>
-                          <a:latin typeface="Calibri" panose="020F0502020204030204" pitchFamily="34" charset="0"/>
-                          <a:ea typeface="Calibri" panose="020F0502020204030204" pitchFamily="34" charset="0"/>
-                          <a:cs typeface="Times New Roman" panose="02020603050405020304" pitchFamily="18" charset="0"/>
-                        </a:rPr>
-                        <a:t> </a:t>
-                      </a:r>
-                      <a:endParaRPr lang="es-CL" sz="1100">
-                        <a:effectLst/>
-                        <a:latin typeface="Calibri" panose="020F0502020204030204" pitchFamily="34" charset="0"/>
-                        <a:ea typeface="Calibri" panose="020F0502020204030204" pitchFamily="34" charset="0"/>
-                        <a:cs typeface="Times New Roman" panose="02020603050405020304" pitchFamily="18" charset="0"/>
-                      </a:endParaRPr>
-                    </a:p>
-                  </a:txBody>
-                  <a:tcPr marL="68580" marR="68580" marT="0" marB="0">
-                    <a:lnL w="12700" cap="flat" cmpd="sng" algn="ctr">
-                      <a:solidFill>
-                        <a:srgbClr val="BFBFBF"/>
-                      </a:solidFill>
-                      <a:prstDash val="solid"/>
-                      <a:round/>
-                      <a:headEnd type="none" w="med" len="med"/>
-                      <a:tailEnd type="none" w="med" len="med"/>
-                    </a:lnL>
-                    <a:lnR w="12700" cap="flat" cmpd="sng" algn="ctr">
-                      <a:solidFill>
-                        <a:srgbClr val="BFBFBF"/>
-                      </a:solidFill>
-                      <a:prstDash val="solid"/>
-                      <a:round/>
-                      <a:headEnd type="none" w="med" len="med"/>
-                      <a:tailEnd type="none" w="med" len="med"/>
-                    </a:lnR>
-                    <a:lnT w="12700" cap="flat" cmpd="sng" algn="ctr">
-                      <a:solidFill>
-                        <a:srgbClr val="BFBFBF"/>
-                      </a:solidFill>
-                      <a:prstDash val="solid"/>
-                      <a:round/>
-                      <a:headEnd type="none" w="med" len="med"/>
-                      <a:tailEnd type="none" w="med" len="med"/>
-                    </a:lnT>
-                    <a:lnB w="12700" cap="flat" cmpd="sng" algn="ctr">
-                      <a:solidFill>
-                        <a:srgbClr val="BFBFBF"/>
-                      </a:solidFill>
-                      <a:prstDash val="solid"/>
-                      <a:round/>
-                      <a:headEnd type="none" w="med" len="med"/>
-                      <a:tailEnd type="none" w="med" len="med"/>
-                    </a:lnB>
-                  </a:tcPr>
-                </a:tc>
-                <a:tc>
-                  <a:txBody>
-                    <a:bodyPr/>
-                    <a:lstStyle/>
-                    <a:p>
-                      <a:pPr algn="just">
-                        <a:lnSpc>
-                          <a:spcPct val="150000"/>
-                        </a:lnSpc>
-                        <a:spcAft>
-                          <a:spcPts val="800"/>
-                        </a:spcAft>
-                      </a:pPr>
-                      <a:r>
-                        <a:rPr lang="es-CL" sz="800" b="1">
-                          <a:effectLst/>
-                          <a:latin typeface="Calibri" panose="020F0502020204030204" pitchFamily="34" charset="0"/>
-                          <a:ea typeface="Calibri" panose="020F0502020204030204" pitchFamily="34" charset="0"/>
-                          <a:cs typeface="Times New Roman" panose="02020603050405020304" pitchFamily="18" charset="0"/>
-                        </a:rPr>
-                        <a:t> </a:t>
-                      </a:r>
-                      <a:endParaRPr lang="es-CL" sz="1100">
-                        <a:effectLst/>
-                        <a:latin typeface="Calibri" panose="020F0502020204030204" pitchFamily="34" charset="0"/>
-                        <a:ea typeface="Calibri" panose="020F0502020204030204" pitchFamily="34" charset="0"/>
-                        <a:cs typeface="Times New Roman" panose="02020603050405020304" pitchFamily="18" charset="0"/>
-                      </a:endParaRPr>
-                    </a:p>
-                  </a:txBody>
-                  <a:tcPr marL="68580" marR="68580" marT="0" marB="0">
-                    <a:lnL w="12700" cap="flat" cmpd="sng" algn="ctr">
-                      <a:solidFill>
-                        <a:srgbClr val="BFBFBF"/>
-                      </a:solidFill>
-                      <a:prstDash val="solid"/>
-                      <a:round/>
-                      <a:headEnd type="none" w="med" len="med"/>
-                      <a:tailEnd type="none" w="med" len="med"/>
-                    </a:lnL>
-                    <a:lnR w="12700" cap="flat" cmpd="sng" algn="ctr">
-                      <a:solidFill>
-                        <a:srgbClr val="BFBFBF"/>
-                      </a:solidFill>
-                      <a:prstDash val="solid"/>
-                      <a:round/>
-                      <a:headEnd type="none" w="med" len="med"/>
-                      <a:tailEnd type="none" w="med" len="med"/>
-                    </a:lnR>
-                    <a:lnT w="12700" cap="flat" cmpd="sng" algn="ctr">
-                      <a:solidFill>
-                        <a:srgbClr val="BFBFBF"/>
-                      </a:solidFill>
-                      <a:prstDash val="solid"/>
-                      <a:round/>
-                      <a:headEnd type="none" w="med" len="med"/>
-                      <a:tailEnd type="none" w="med" len="med"/>
-                    </a:lnT>
-                    <a:lnB w="12700" cap="flat" cmpd="sng" algn="ctr">
-                      <a:solidFill>
-                        <a:srgbClr val="BFBFBF"/>
-                      </a:solidFill>
-                      <a:prstDash val="solid"/>
-                      <a:round/>
-                      <a:headEnd type="none" w="med" len="med"/>
-                      <a:tailEnd type="none" w="med" len="med"/>
-                    </a:lnB>
-                  </a:tcPr>
-                </a:tc>
-                <a:tc>
-                  <a:txBody>
-                    <a:bodyPr/>
-                    <a:lstStyle/>
-                    <a:p>
-                      <a:pPr algn="just">
-                        <a:lnSpc>
-                          <a:spcPct val="150000"/>
-                        </a:lnSpc>
-                        <a:spcAft>
-                          <a:spcPts val="800"/>
-                        </a:spcAft>
-                      </a:pPr>
-                      <a:r>
-                        <a:rPr lang="es-CL" sz="800" b="1">
-                          <a:effectLst/>
-                          <a:latin typeface="Calibri" panose="020F0502020204030204" pitchFamily="34" charset="0"/>
-                          <a:ea typeface="Calibri" panose="020F0502020204030204" pitchFamily="34" charset="0"/>
-                          <a:cs typeface="Times New Roman" panose="02020603050405020304" pitchFamily="18" charset="0"/>
-                        </a:rPr>
-                        <a:t> </a:t>
-                      </a:r>
-                      <a:endParaRPr lang="es-CL" sz="1100">
-                        <a:effectLst/>
-                        <a:latin typeface="Calibri" panose="020F0502020204030204" pitchFamily="34" charset="0"/>
-                        <a:ea typeface="Calibri" panose="020F0502020204030204" pitchFamily="34" charset="0"/>
-                        <a:cs typeface="Times New Roman" panose="02020603050405020304" pitchFamily="18" charset="0"/>
-                      </a:endParaRPr>
-                    </a:p>
-                  </a:txBody>
-                  <a:tcPr marL="68580" marR="68580" marT="0" marB="0">
-                    <a:lnL w="12700" cap="flat" cmpd="sng" algn="ctr">
-                      <a:solidFill>
-                        <a:srgbClr val="BFBFBF"/>
-                      </a:solidFill>
-                      <a:prstDash val="solid"/>
-                      <a:round/>
-                      <a:headEnd type="none" w="med" len="med"/>
-                      <a:tailEnd type="none" w="med" len="med"/>
-                    </a:lnL>
-                    <a:lnR w="12700" cap="flat" cmpd="sng" algn="ctr">
-                      <a:solidFill>
-                        <a:srgbClr val="BFBFBF"/>
-                      </a:solidFill>
-                      <a:prstDash val="solid"/>
-                      <a:round/>
-                      <a:headEnd type="none" w="med" len="med"/>
-                      <a:tailEnd type="none" w="med" len="med"/>
-                    </a:lnR>
-                    <a:lnT w="12700" cap="flat" cmpd="sng" algn="ctr">
-                      <a:solidFill>
-                        <a:srgbClr val="BFBFBF"/>
-                      </a:solidFill>
-                      <a:prstDash val="solid"/>
-                      <a:round/>
-                      <a:headEnd type="none" w="med" len="med"/>
-                      <a:tailEnd type="none" w="med" len="med"/>
-                    </a:lnT>
-                    <a:lnB w="12700" cap="flat" cmpd="sng" algn="ctr">
-                      <a:solidFill>
-                        <a:srgbClr val="BFBFBF"/>
-                      </a:solidFill>
-                      <a:prstDash val="solid"/>
-                      <a:round/>
-                      <a:headEnd type="none" w="med" len="med"/>
-                      <a:tailEnd type="none" w="med" len="med"/>
-                    </a:lnB>
-                  </a:tcPr>
-                </a:tc>
-                <a:tc>
-                  <a:txBody>
-                    <a:bodyPr/>
-                    <a:lstStyle/>
-                    <a:p>
-                      <a:pPr algn="just">
-                        <a:lnSpc>
-                          <a:spcPct val="150000"/>
-                        </a:lnSpc>
-                        <a:spcAft>
-                          <a:spcPts val="800"/>
-                        </a:spcAft>
-                      </a:pPr>
-                      <a:r>
-                        <a:rPr lang="es-CL" sz="800" b="1">
-                          <a:effectLst/>
-                          <a:latin typeface="Calibri" panose="020F0502020204030204" pitchFamily="34" charset="0"/>
-                          <a:ea typeface="Calibri" panose="020F0502020204030204" pitchFamily="34" charset="0"/>
-                          <a:cs typeface="Times New Roman" panose="02020603050405020304" pitchFamily="18" charset="0"/>
-                        </a:rPr>
-                        <a:t> </a:t>
-                      </a:r>
-                      <a:endParaRPr lang="es-CL" sz="1100">
-                        <a:effectLst/>
-                        <a:latin typeface="Calibri" panose="020F0502020204030204" pitchFamily="34" charset="0"/>
-                        <a:ea typeface="Calibri" panose="020F0502020204030204" pitchFamily="34" charset="0"/>
-                        <a:cs typeface="Times New Roman" panose="02020603050405020304" pitchFamily="18" charset="0"/>
-                      </a:endParaRPr>
-                    </a:p>
-                  </a:txBody>
-                  <a:tcPr marL="68580" marR="68580" marT="0" marB="0">
-                    <a:lnL w="12700" cap="flat" cmpd="sng" algn="ctr">
-                      <a:solidFill>
-                        <a:srgbClr val="BFBFBF"/>
-                      </a:solidFill>
-                      <a:prstDash val="solid"/>
-                      <a:round/>
-                      <a:headEnd type="none" w="med" len="med"/>
-                      <a:tailEnd type="none" w="med" len="med"/>
-                    </a:lnL>
-                    <a:lnR w="12700" cap="flat" cmpd="sng" algn="ctr">
-                      <a:solidFill>
-                        <a:srgbClr val="BFBFBF"/>
-                      </a:solidFill>
-                      <a:prstDash val="solid"/>
-                      <a:round/>
-                      <a:headEnd type="none" w="med" len="med"/>
-                      <a:tailEnd type="none" w="med" len="med"/>
-                    </a:lnR>
-                    <a:lnT w="12700" cap="flat" cmpd="sng" algn="ctr">
-                      <a:solidFill>
-                        <a:srgbClr val="BFBFBF"/>
-                      </a:solidFill>
-                      <a:prstDash val="solid"/>
-                      <a:round/>
-                      <a:headEnd type="none" w="med" len="med"/>
-                      <a:tailEnd type="none" w="med" len="med"/>
-                    </a:lnT>
-                    <a:lnB w="12700" cap="flat" cmpd="sng" algn="ctr">
-                      <a:solidFill>
-                        <a:srgbClr val="BFBFBF"/>
-                      </a:solidFill>
-                      <a:prstDash val="solid"/>
-                      <a:round/>
-                      <a:headEnd type="none" w="med" len="med"/>
-                      <a:tailEnd type="none" w="med" len="med"/>
-                    </a:lnB>
-                  </a:tcPr>
-                </a:tc>
-                <a:tc>
-                  <a:txBody>
-                    <a:bodyPr/>
-                    <a:lstStyle/>
-                    <a:p>
-                      <a:pPr algn="just">
-                        <a:lnSpc>
-                          <a:spcPct val="150000"/>
-                        </a:lnSpc>
-                        <a:spcAft>
-                          <a:spcPts val="800"/>
-                        </a:spcAft>
-                      </a:pPr>
-                      <a:r>
-                        <a:rPr lang="es-CL" sz="800" b="1">
-                          <a:effectLst/>
-                          <a:latin typeface="Calibri" panose="020F0502020204030204" pitchFamily="34" charset="0"/>
-                          <a:ea typeface="Calibri" panose="020F0502020204030204" pitchFamily="34" charset="0"/>
-                          <a:cs typeface="Times New Roman" panose="02020603050405020304" pitchFamily="18" charset="0"/>
-                        </a:rPr>
-                        <a:t> </a:t>
-                      </a:r>
-                      <a:endParaRPr lang="es-CL" sz="1100">
-                        <a:effectLst/>
-                        <a:latin typeface="Calibri" panose="020F0502020204030204" pitchFamily="34" charset="0"/>
-                        <a:ea typeface="Calibri" panose="020F0502020204030204" pitchFamily="34" charset="0"/>
-                        <a:cs typeface="Times New Roman" panose="02020603050405020304" pitchFamily="18" charset="0"/>
-                      </a:endParaRPr>
-                    </a:p>
-                  </a:txBody>
-                  <a:tcPr marL="68580" marR="68580" marT="0" marB="0">
-                    <a:lnL w="12700" cap="flat" cmpd="sng" algn="ctr">
-                      <a:solidFill>
-                        <a:srgbClr val="BFBFBF"/>
-                      </a:solidFill>
-                      <a:prstDash val="solid"/>
-                      <a:round/>
-                      <a:headEnd type="none" w="med" len="med"/>
-                      <a:tailEnd type="none" w="med" len="med"/>
-                    </a:lnL>
-                    <a:lnR w="12700" cap="flat" cmpd="sng" algn="ctr">
-                      <a:solidFill>
-                        <a:srgbClr val="BFBFBF"/>
-                      </a:solidFill>
-                      <a:prstDash val="solid"/>
-                      <a:round/>
-                      <a:headEnd type="none" w="med" len="med"/>
-                      <a:tailEnd type="none" w="med" len="med"/>
-                    </a:lnR>
-                    <a:lnT w="12700" cap="flat" cmpd="sng" algn="ctr">
-                      <a:solidFill>
-                        <a:srgbClr val="BFBFBF"/>
-                      </a:solidFill>
-                      <a:prstDash val="solid"/>
-                      <a:round/>
-                      <a:headEnd type="none" w="med" len="med"/>
-                      <a:tailEnd type="none" w="med" len="med"/>
-                    </a:lnT>
-                    <a:lnB w="12700" cap="flat" cmpd="sng" algn="ctr">
-                      <a:solidFill>
-                        <a:srgbClr val="BFBFBF"/>
-                      </a:solidFill>
-                      <a:prstDash val="solid"/>
-                      <a:round/>
-                      <a:headEnd type="none" w="med" len="med"/>
-                      <a:tailEnd type="none" w="med" len="med"/>
-                    </a:lnB>
-                  </a:tcPr>
-                </a:tc>
-                <a:tc>
-                  <a:txBody>
-                    <a:bodyPr/>
-                    <a:lstStyle/>
-                    <a:p>
-                      <a:pPr algn="just">
-                        <a:lnSpc>
-                          <a:spcPct val="150000"/>
-                        </a:lnSpc>
-                        <a:spcAft>
-                          <a:spcPts val="800"/>
-                        </a:spcAft>
-                      </a:pPr>
-                      <a:r>
-                        <a:rPr lang="es-CL" sz="800" b="1">
-                          <a:effectLst/>
-                          <a:latin typeface="Calibri" panose="020F0502020204030204" pitchFamily="34" charset="0"/>
-                          <a:ea typeface="Calibri" panose="020F0502020204030204" pitchFamily="34" charset="0"/>
-                          <a:cs typeface="Times New Roman" panose="02020603050405020304" pitchFamily="18" charset="0"/>
-                        </a:rPr>
-                        <a:t> </a:t>
-                      </a:r>
-                      <a:endParaRPr lang="es-CL" sz="1100">
-                        <a:effectLst/>
-                        <a:latin typeface="Calibri" panose="020F0502020204030204" pitchFamily="34" charset="0"/>
-                        <a:ea typeface="Calibri" panose="020F0502020204030204" pitchFamily="34" charset="0"/>
-                        <a:cs typeface="Times New Roman" panose="02020603050405020304" pitchFamily="18" charset="0"/>
-                      </a:endParaRPr>
-                    </a:p>
-                  </a:txBody>
-                  <a:tcPr marL="68580" marR="68580" marT="0" marB="0">
-                    <a:lnL w="12700" cap="flat" cmpd="sng" algn="ctr">
-                      <a:solidFill>
-                        <a:srgbClr val="BFBFBF"/>
-                      </a:solidFill>
-                      <a:prstDash val="solid"/>
-                      <a:round/>
-                      <a:headEnd type="none" w="med" len="med"/>
-                      <a:tailEnd type="none" w="med" len="med"/>
-                    </a:lnL>
-                    <a:lnR w="12700" cap="flat" cmpd="sng" algn="ctr">
-                      <a:solidFill>
-                        <a:srgbClr val="BFBFBF"/>
-                      </a:solidFill>
-                      <a:prstDash val="solid"/>
-                      <a:round/>
-                      <a:headEnd type="none" w="med" len="med"/>
-                      <a:tailEnd type="none" w="med" len="med"/>
-                    </a:lnR>
-                    <a:lnT w="12700" cap="flat" cmpd="sng" algn="ctr">
-                      <a:solidFill>
-                        <a:srgbClr val="BFBFBF"/>
-                      </a:solidFill>
-                      <a:prstDash val="solid"/>
-                      <a:round/>
-                      <a:headEnd type="none" w="med" len="med"/>
-                      <a:tailEnd type="none" w="med" len="med"/>
-                    </a:lnT>
-                    <a:lnB w="12700" cap="flat" cmpd="sng" algn="ctr">
-                      <a:solidFill>
-                        <a:srgbClr val="BFBFBF"/>
-                      </a:solidFill>
-                      <a:prstDash val="solid"/>
-                      <a:round/>
-                      <a:headEnd type="none" w="med" len="med"/>
-                      <a:tailEnd type="none" w="med" len="med"/>
-                    </a:lnB>
-                  </a:tcPr>
-                </a:tc>
-                <a:tc gridSpan="2">
-                  <a:txBody>
-                    <a:bodyPr/>
-                    <a:lstStyle/>
-                    <a:p>
-                      <a:pPr algn="just">
-                        <a:lnSpc>
-                          <a:spcPct val="150000"/>
-                        </a:lnSpc>
-                        <a:spcAft>
-                          <a:spcPts val="800"/>
-                        </a:spcAft>
-                      </a:pPr>
-                      <a:r>
-                        <a:rPr lang="es-CL" sz="800" b="1">
-                          <a:effectLst/>
-                          <a:latin typeface="Calibri" panose="020F0502020204030204" pitchFamily="34" charset="0"/>
-                          <a:ea typeface="Calibri" panose="020F0502020204030204" pitchFamily="34" charset="0"/>
-                          <a:cs typeface="Times New Roman" panose="02020603050405020304" pitchFamily="18" charset="0"/>
-                        </a:rPr>
-                        <a:t> </a:t>
-                      </a:r>
-                      <a:endParaRPr lang="es-CL" sz="1100">
-                        <a:effectLst/>
-                        <a:latin typeface="Calibri" panose="020F0502020204030204" pitchFamily="34" charset="0"/>
-                        <a:ea typeface="Calibri" panose="020F0502020204030204" pitchFamily="34" charset="0"/>
-                        <a:cs typeface="Times New Roman" panose="02020603050405020304" pitchFamily="18" charset="0"/>
-                      </a:endParaRPr>
-                    </a:p>
-                  </a:txBody>
-                  <a:tcPr marL="68580" marR="68580" marT="0" marB="0">
-                    <a:lnL w="12700" cap="flat" cmpd="sng" algn="ctr">
-                      <a:solidFill>
-                        <a:srgbClr val="BFBFBF"/>
-                      </a:solidFill>
-                      <a:prstDash val="solid"/>
-                      <a:round/>
-                      <a:headEnd type="none" w="med" len="med"/>
-                      <a:tailEnd type="none" w="med" len="med"/>
-                    </a:lnL>
-                    <a:lnR w="12700" cap="flat" cmpd="sng" algn="ctr">
-                      <a:solidFill>
-                        <a:srgbClr val="BFBFBF"/>
-                      </a:solidFill>
-                      <a:prstDash val="solid"/>
-                      <a:round/>
-                      <a:headEnd type="none" w="med" len="med"/>
-                      <a:tailEnd type="none" w="med" len="med"/>
-                    </a:lnR>
-                    <a:lnT w="12700" cap="flat" cmpd="sng" algn="ctr">
-                      <a:solidFill>
-                        <a:srgbClr val="BFBFBF"/>
-                      </a:solidFill>
-                      <a:prstDash val="solid"/>
-                      <a:round/>
-                      <a:headEnd type="none" w="med" len="med"/>
-                      <a:tailEnd type="none" w="med" len="med"/>
-                    </a:lnT>
-                    <a:lnB w="12700" cap="flat" cmpd="sng" algn="ctr">
-                      <a:solidFill>
-                        <a:srgbClr val="BFBFBF"/>
-                      </a:solidFill>
-                      <a:prstDash val="solid"/>
-                      <a:round/>
-                      <a:headEnd type="none" w="med" len="med"/>
-                      <a:tailEnd type="none" w="med" len="med"/>
-                    </a:lnB>
-                  </a:tcPr>
-                </a:tc>
-                <a:tc hMerge="1">
-                  <a:txBody>
-                    <a:bodyPr/>
-                    <a:lstStyle/>
-                    <a:p>
-                      <a:endParaRPr lang="es-CL"/>
-                    </a:p>
-                  </a:txBody>
-                  <a:tcPr/>
-                </a:tc>
-                <a:tc>
-                  <a:txBody>
-                    <a:bodyPr/>
-                    <a:lstStyle/>
-                    <a:p>
-                      <a:pPr algn="just">
-                        <a:lnSpc>
-                          <a:spcPct val="150000"/>
-                        </a:lnSpc>
-                        <a:spcAft>
-                          <a:spcPts val="800"/>
-                        </a:spcAft>
-                      </a:pPr>
-                      <a:r>
-                        <a:rPr lang="es-CL" sz="800" b="1">
-                          <a:effectLst/>
-                          <a:latin typeface="Calibri" panose="020F0502020204030204" pitchFamily="34" charset="0"/>
-                          <a:ea typeface="Calibri" panose="020F0502020204030204" pitchFamily="34" charset="0"/>
-                          <a:cs typeface="Times New Roman" panose="02020603050405020304" pitchFamily="18" charset="0"/>
-                        </a:rPr>
-                        <a:t> </a:t>
-                      </a:r>
-                      <a:endParaRPr lang="es-CL" sz="1100">
-                        <a:effectLst/>
-                        <a:latin typeface="Calibri" panose="020F0502020204030204" pitchFamily="34" charset="0"/>
-                        <a:ea typeface="Calibri" panose="020F0502020204030204" pitchFamily="34" charset="0"/>
-                        <a:cs typeface="Times New Roman" panose="02020603050405020304" pitchFamily="18" charset="0"/>
-                      </a:endParaRPr>
-                    </a:p>
-                  </a:txBody>
-                  <a:tcPr marL="68580" marR="68580" marT="0" marB="0">
-                    <a:lnL w="12700" cap="flat" cmpd="sng" algn="ctr">
-                      <a:solidFill>
-                        <a:srgbClr val="BFBFBF"/>
-                      </a:solidFill>
-                      <a:prstDash val="solid"/>
-                      <a:round/>
-                      <a:headEnd type="none" w="med" len="med"/>
-                      <a:tailEnd type="none" w="med" len="med"/>
-                    </a:lnL>
-                    <a:lnR w="12700" cap="flat" cmpd="sng" algn="ctr">
-                      <a:solidFill>
-                        <a:srgbClr val="BFBFBF"/>
-                      </a:solidFill>
-                      <a:prstDash val="solid"/>
-                      <a:round/>
-                      <a:headEnd type="none" w="med" len="med"/>
-                      <a:tailEnd type="none" w="med" len="med"/>
-                    </a:lnR>
-                    <a:lnT w="12700" cap="flat" cmpd="sng" algn="ctr">
-                      <a:solidFill>
-                        <a:srgbClr val="BFBFBF"/>
-                      </a:solidFill>
-                      <a:prstDash val="solid"/>
-                      <a:round/>
-                      <a:headEnd type="none" w="med" len="med"/>
-                      <a:tailEnd type="none" w="med" len="med"/>
-                    </a:lnT>
-                    <a:lnB w="12700" cap="flat" cmpd="sng" algn="ctr">
-                      <a:solidFill>
-                        <a:srgbClr val="BFBFBF"/>
-                      </a:solidFill>
-                      <a:prstDash val="solid"/>
-                      <a:round/>
-                      <a:headEnd type="none" w="med" len="med"/>
-                      <a:tailEnd type="none" w="med" len="med"/>
-                    </a:lnB>
-                  </a:tcPr>
-                </a:tc>
-                <a:tc>
-                  <a:txBody>
-                    <a:bodyPr/>
-                    <a:lstStyle/>
-                    <a:p>
-                      <a:pPr algn="just">
-                        <a:lnSpc>
-                          <a:spcPct val="150000"/>
-                        </a:lnSpc>
-                        <a:spcAft>
-                          <a:spcPts val="800"/>
-                        </a:spcAft>
-                      </a:pPr>
-                      <a:r>
-                        <a:rPr lang="es-CL" sz="800" b="1">
-                          <a:effectLst/>
-                          <a:latin typeface="Calibri" panose="020F0502020204030204" pitchFamily="34" charset="0"/>
-                          <a:ea typeface="Calibri" panose="020F0502020204030204" pitchFamily="34" charset="0"/>
-                          <a:cs typeface="Times New Roman" panose="02020603050405020304" pitchFamily="18" charset="0"/>
-                        </a:rPr>
-                        <a:t> </a:t>
-                      </a:r>
-                      <a:endParaRPr lang="es-CL" sz="1100">
-                        <a:effectLst/>
-                        <a:latin typeface="Calibri" panose="020F0502020204030204" pitchFamily="34" charset="0"/>
-                        <a:ea typeface="Calibri" panose="020F0502020204030204" pitchFamily="34" charset="0"/>
-                        <a:cs typeface="Times New Roman" panose="02020603050405020304" pitchFamily="18" charset="0"/>
-                      </a:endParaRPr>
                     </a:p>
                   </a:txBody>
                   <a:tcPr marL="68580" marR="68580" marT="0" marB="0">
@@ -15388,16 +16261,13 @@
           </a:p>
           <a:p>
             <a:pPr algn="ctr"/>
-            <a:r>
-              <a:rPr lang="es-MX" sz="2400" dirty="0">
-                <a:solidFill>
-                  <a:schemeClr val="bg2">
-                    <a:lumMod val="50000"/>
-                  </a:schemeClr>
-                </a:solidFill>
-              </a:rPr>
-              <a:t>*Presentar esquema</a:t>
-            </a:r>
+            <a:endParaRPr lang="es-MX" sz="2400" dirty="0">
+              <a:solidFill>
+                <a:schemeClr val="bg2">
+                  <a:lumMod val="50000"/>
+                </a:schemeClr>
+              </a:solidFill>
+            </a:endParaRPr>
           </a:p>
         </p:txBody>
       </p:sp>
@@ -15469,6 +16339,110 @@
           </a:fontRef>
         </p:style>
       </p:cxnSp>
+      <p:sp>
+        <p:nvSpPr>
+          <p:cNvPr id="2" name="Rectángulo: esquinas redondeadas 1">
+            <a:extLst>
+              <a:ext uri="{FF2B5EF4-FFF2-40B4-BE49-F238E27FC236}">
+                <a16:creationId xmlns:a16="http://schemas.microsoft.com/office/drawing/2014/main" id="{873C87AC-965F-EBE6-3BAF-AEE75BFFCE5D}"/>
+              </a:ext>
+            </a:extLst>
+          </p:cNvPr>
+          <p:cNvSpPr/>
+          <p:nvPr/>
+        </p:nvSpPr>
+        <p:spPr>
+          <a:xfrm>
+            <a:off x="614515" y="2300607"/>
+            <a:ext cx="10962967" cy="3958051"/>
+          </a:xfrm>
+          <a:prstGeom prst="roundRect">
+            <a:avLst/>
+          </a:prstGeom>
+        </p:spPr>
+        <p:style>
+          <a:lnRef idx="2">
+            <a:schemeClr val="accent1"/>
+          </a:lnRef>
+          <a:fillRef idx="1">
+            <a:schemeClr val="lt1"/>
+          </a:fillRef>
+          <a:effectRef idx="0">
+            <a:schemeClr val="accent1"/>
+          </a:effectRef>
+          <a:fontRef idx="minor">
+            <a:schemeClr val="dk1"/>
+          </a:fontRef>
+        </p:style>
+        <p:txBody>
+          <a:bodyPr rtlCol="0" anchor="ctr"/>
+          <a:lstStyle/>
+          <a:p>
+            <a:pPr algn="ctr"/>
+            <a:endParaRPr lang="es-CL" dirty="0"/>
+          </a:p>
+        </p:txBody>
+      </p:sp>
+      <p:pic>
+        <p:nvPicPr>
+          <p:cNvPr id="3" name="image2.png">
+            <a:extLst>
+              <a:ext uri="{FF2B5EF4-FFF2-40B4-BE49-F238E27FC236}">
+                <a16:creationId xmlns:a16="http://schemas.microsoft.com/office/drawing/2014/main" id="{9F892702-6067-EF1D-755C-571EFBB36372}"/>
+              </a:ext>
+            </a:extLst>
+          </p:cNvPr>
+          <p:cNvPicPr/>
+          <p:nvPr/>
+        </p:nvPicPr>
+        <p:blipFill>
+          <a:blip r:embed="rId3"/>
+          <a:srcRect t="5788" r="9126" b="16046"/>
+          <a:stretch>
+            <a:fillRect/>
+          </a:stretch>
+        </p:blipFill>
+        <p:spPr>
+          <a:xfrm>
+            <a:off x="957532" y="2489886"/>
+            <a:ext cx="3765610" cy="3579495"/>
+          </a:xfrm>
+          <a:prstGeom prst="rect">
+            <a:avLst/>
+          </a:prstGeom>
+          <a:ln/>
+        </p:spPr>
+      </p:pic>
+      <p:pic>
+        <p:nvPicPr>
+          <p:cNvPr id="4" name="image3.png">
+            <a:extLst>
+              <a:ext uri="{FF2B5EF4-FFF2-40B4-BE49-F238E27FC236}">
+                <a16:creationId xmlns:a16="http://schemas.microsoft.com/office/drawing/2014/main" id="{94050D4F-C70A-97B7-C48C-7E6208903F31}"/>
+              </a:ext>
+            </a:extLst>
+          </p:cNvPr>
+          <p:cNvPicPr/>
+          <p:nvPr/>
+        </p:nvPicPr>
+        <p:blipFill>
+          <a:blip r:embed="rId4"/>
+          <a:srcRect/>
+          <a:stretch>
+            <a:fillRect/>
+          </a:stretch>
+        </p:blipFill>
+        <p:spPr>
+          <a:xfrm>
+            <a:off x="6909758" y="2363246"/>
+            <a:ext cx="3372908" cy="3832771"/>
+          </a:xfrm>
+          <a:prstGeom prst="rect">
+            <a:avLst/>
+          </a:prstGeom>
+          <a:ln/>
+        </p:spPr>
+      </p:pic>
     </p:spTree>
     <p:extLst>
       <p:ext uri="{BB962C8B-B14F-4D97-AF65-F5344CB8AC3E}">
@@ -15694,6 +16668,80 @@
           </a:fontRef>
         </p:style>
       </p:cxnSp>
+      <p:sp>
+        <p:nvSpPr>
+          <p:cNvPr id="2" name="Rectángulo: esquinas redondeadas 1">
+            <a:extLst>
+              <a:ext uri="{FF2B5EF4-FFF2-40B4-BE49-F238E27FC236}">
+                <a16:creationId xmlns:a16="http://schemas.microsoft.com/office/drawing/2014/main" id="{3578B83C-E8BE-C84C-5158-BFA5C5FBDE1D}"/>
+              </a:ext>
+            </a:extLst>
+          </p:cNvPr>
+          <p:cNvSpPr/>
+          <p:nvPr/>
+        </p:nvSpPr>
+        <p:spPr>
+          <a:xfrm>
+            <a:off x="614515" y="2283354"/>
+            <a:ext cx="10962967" cy="3958051"/>
+          </a:xfrm>
+          <a:prstGeom prst="roundRect">
+            <a:avLst/>
+          </a:prstGeom>
+        </p:spPr>
+        <p:style>
+          <a:lnRef idx="2">
+            <a:schemeClr val="accent1"/>
+          </a:lnRef>
+          <a:fillRef idx="1">
+            <a:schemeClr val="lt1"/>
+          </a:fillRef>
+          <a:effectRef idx="0">
+            <a:schemeClr val="accent1"/>
+          </a:effectRef>
+          <a:fontRef idx="minor">
+            <a:schemeClr val="dk1"/>
+          </a:fontRef>
+        </p:style>
+        <p:txBody>
+          <a:bodyPr rtlCol="0" anchor="ctr"/>
+          <a:lstStyle/>
+          <a:p>
+            <a:pPr algn="ctr"/>
+            <a:endParaRPr lang="es-CL" dirty="0"/>
+          </a:p>
+        </p:txBody>
+      </p:sp>
+      <p:pic>
+        <p:nvPicPr>
+          <p:cNvPr id="4" name="Imagen 3">
+            <a:extLst>
+              <a:ext uri="{FF2B5EF4-FFF2-40B4-BE49-F238E27FC236}">
+                <a16:creationId xmlns:a16="http://schemas.microsoft.com/office/drawing/2014/main" id="{028E8368-01E2-990B-317B-0BA55D24D651}"/>
+              </a:ext>
+            </a:extLst>
+          </p:cNvPr>
+          <p:cNvPicPr>
+            <a:picLocks noChangeAspect="1"/>
+          </p:cNvPicPr>
+          <p:nvPr/>
+        </p:nvPicPr>
+        <p:blipFill>
+          <a:blip r:embed="rId3"/>
+          <a:stretch>
+            <a:fillRect/>
+          </a:stretch>
+        </p:blipFill>
+        <p:spPr>
+          <a:xfrm>
+            <a:off x="3842009" y="2350005"/>
+            <a:ext cx="4507978" cy="3891400"/>
+          </a:xfrm>
+          <a:prstGeom prst="rect">
+            <a:avLst/>
+          </a:prstGeom>
+        </p:spPr>
+      </p:pic>
     </p:spTree>
     <p:extLst>
       <p:ext uri="{BB962C8B-B14F-4D97-AF65-F5344CB8AC3E}">
